--- a/6th Semester/Level-3, Semester-II/CCE 323  Optical Fiber Communication/Muradul Boshir/Requirements_of_transmitter_and_receiver_in_WDM_networks_1_4_26.pptx
+++ b/6th Semester/Level-3, Semester-II/CCE 323  Optical Fiber Communication/Muradul Boshir/Requirements_of_transmitter_and_receiver_in_WDM_networks_1_4_26.pptx
@@ -1,21 +1,24 @@
 
 <file path=ppt/presentation.xml><?xml version="1.0" encoding="utf-8"?>
-<p:presentation xmlns:a="http://schemas.openxmlformats.org/drawingml/2006/main" xmlns:r="http://schemas.openxmlformats.org/officeDocument/2006/relationships" xmlns:p="http://schemas.openxmlformats.org/presentationml/2006/main" saveSubsetFonts="1">
+<p:presentation xmlns:a="http://schemas.openxmlformats.org/drawingml/2006/main" xmlns:r="http://schemas.openxmlformats.org/officeDocument/2006/relationships" xmlns:p="http://schemas.openxmlformats.org/presentationml/2006/main" xmlns:m="http://schemas.openxmlformats.org/officeDocument/2006/math" xmlns:w="http://schemas.openxmlformats.org/wordprocessingml/2006/main" saveSubsetFonts="1">
   <p:sldMasterIdLst>
     <p:sldMasterId id="2147483648" r:id="rId1"/>
   </p:sldMasterIdLst>
+  <p:notesMasterIdLst>
+    <p:notesMasterId r:id="rId15"/>
+  </p:notesMasterIdLst>
   <p:sldIdLst>
-    <p:sldId id="256" r:id="rId2"/>
-    <p:sldId id="257" r:id="rId3"/>
-    <p:sldId id="258" r:id="rId4"/>
-    <p:sldId id="261" r:id="rId5"/>
-    <p:sldId id="259" r:id="rId6"/>
-    <p:sldId id="260" r:id="rId7"/>
-    <p:sldId id="262" r:id="rId8"/>
-    <p:sldId id="263" r:id="rId9"/>
-    <p:sldId id="265" r:id="rId10"/>
-    <p:sldId id="266" r:id="rId11"/>
+    <p:sldId id="256" r:id="rId4"/>
+    <p:sldId id="257" r:id="rId5"/>
+    <p:sldId id="258" r:id="rId6"/>
+    <p:sldId id="259" r:id="rId7"/>
+    <p:sldId id="260" r:id="rId8"/>
+    <p:sldId id="261" r:id="rId9"/>
+    <p:sldId id="262" r:id="rId10"/>
+    <p:sldId id="263" r:id="rId11"/>
     <p:sldId id="264" r:id="rId12"/>
+    <p:sldId id="265" r:id="rId13"/>
+    <p:sldId id="266" r:id="rId14"/>
   </p:sldIdLst>
   <p:sldSz cx="12192000" cy="6858000"/>
   <p:notesSz cx="6858000" cy="9144000"/>
@@ -23,8 +26,8 @@
     <a:defPPr>
       <a:defRPr lang="en-US"/>
     </a:defPPr>
-    <a:lvl1pPr marL="0" algn="l" defTabSz="914400" rtl="0" eaLnBrk="1" latinLnBrk="0" hangingPunct="1">
-      <a:defRPr sz="1800" kern="1200">
+    <a:lvl1pPr marL="0" algn="l" defTabSz="914400" rtl="0">
+      <a:defRPr sz="1800">
         <a:solidFill>
           <a:schemeClr val="tx1"/>
         </a:solidFill>
@@ -33,8 +36,8 @@
         <a:cs typeface="+mn-cs"/>
       </a:defRPr>
     </a:lvl1pPr>
-    <a:lvl2pPr marL="457200" algn="l" defTabSz="914400" rtl="0" eaLnBrk="1" latinLnBrk="0" hangingPunct="1">
-      <a:defRPr sz="1800" kern="1200">
+    <a:lvl2pPr marL="457200" algn="l" defTabSz="914400" rtl="0">
+      <a:defRPr sz="1800">
         <a:solidFill>
           <a:schemeClr val="tx1"/>
         </a:solidFill>
@@ -43,8 +46,8 @@
         <a:cs typeface="+mn-cs"/>
       </a:defRPr>
     </a:lvl2pPr>
-    <a:lvl3pPr marL="914400" algn="l" defTabSz="914400" rtl="0" eaLnBrk="1" latinLnBrk="0" hangingPunct="1">
-      <a:defRPr sz="1800" kern="1200">
+    <a:lvl3pPr marL="914400" algn="l" defTabSz="914400" rtl="0">
+      <a:defRPr sz="1800">
         <a:solidFill>
           <a:schemeClr val="tx1"/>
         </a:solidFill>
@@ -53,8 +56,8 @@
         <a:cs typeface="+mn-cs"/>
       </a:defRPr>
     </a:lvl3pPr>
-    <a:lvl4pPr marL="1371600" algn="l" defTabSz="914400" rtl="0" eaLnBrk="1" latinLnBrk="0" hangingPunct="1">
-      <a:defRPr sz="1800" kern="1200">
+    <a:lvl4pPr marL="1371600" algn="l" defTabSz="914400" rtl="0">
+      <a:defRPr sz="1800">
         <a:solidFill>
           <a:schemeClr val="tx1"/>
         </a:solidFill>
@@ -63,8 +66,8 @@
         <a:cs typeface="+mn-cs"/>
       </a:defRPr>
     </a:lvl4pPr>
-    <a:lvl5pPr marL="1828800" algn="l" defTabSz="914400" rtl="0" eaLnBrk="1" latinLnBrk="0" hangingPunct="1">
-      <a:defRPr sz="1800" kern="1200">
+    <a:lvl5pPr marL="1828800" algn="l" defTabSz="914400" rtl="0">
+      <a:defRPr sz="1800">
         <a:solidFill>
           <a:schemeClr val="tx1"/>
         </a:solidFill>
@@ -73,8 +76,8 @@
         <a:cs typeface="+mn-cs"/>
       </a:defRPr>
     </a:lvl5pPr>
-    <a:lvl6pPr marL="2286000" algn="l" defTabSz="914400" rtl="0" eaLnBrk="1" latinLnBrk="0" hangingPunct="1">
-      <a:defRPr sz="1800" kern="1200">
+    <a:lvl6pPr marL="2286000" algn="l" defTabSz="914400" rtl="0">
+      <a:defRPr sz="1800">
         <a:solidFill>
           <a:schemeClr val="tx1"/>
         </a:solidFill>
@@ -83,8 +86,8 @@
         <a:cs typeface="+mn-cs"/>
       </a:defRPr>
     </a:lvl6pPr>
-    <a:lvl7pPr marL="2743200" algn="l" defTabSz="914400" rtl="0" eaLnBrk="1" latinLnBrk="0" hangingPunct="1">
-      <a:defRPr sz="1800" kern="1200">
+    <a:lvl7pPr marL="2743200" algn="l" defTabSz="914400" rtl="0">
+      <a:defRPr sz="1800">
         <a:solidFill>
           <a:schemeClr val="tx1"/>
         </a:solidFill>
@@ -93,8 +96,8 @@
         <a:cs typeface="+mn-cs"/>
       </a:defRPr>
     </a:lvl7pPr>
-    <a:lvl8pPr marL="3200400" algn="l" defTabSz="914400" rtl="0" eaLnBrk="1" latinLnBrk="0" hangingPunct="1">
-      <a:defRPr sz="1800" kern="1200">
+    <a:lvl8pPr marL="3200400" algn="l" defTabSz="914400" rtl="0">
+      <a:defRPr sz="1800">
         <a:solidFill>
           <a:schemeClr val="tx1"/>
         </a:solidFill>
@@ -103,8 +106,8 @@
         <a:cs typeface="+mn-cs"/>
       </a:defRPr>
     </a:lvl8pPr>
-    <a:lvl9pPr marL="3657600" algn="l" defTabSz="914400" rtl="0" eaLnBrk="1" latinLnBrk="0" hangingPunct="1">
-      <a:defRPr sz="1800" kern="1200">
+    <a:lvl9pPr marL="3657600" algn="l" defTabSz="914400" rtl="0">
+      <a:defRPr sz="1800">
         <a:solidFill>
           <a:schemeClr val="tx1"/>
         </a:solidFill>
@@ -117,8 +120,1263 @@
 </p:presentation>
 </file>
 
+<file path=ppt/notesMasters/notesMaster1.xml><?xml version="1.0" encoding="utf-8"?>
+<p:notesMaster xmlns:a="http://schemas.openxmlformats.org/drawingml/2006/main" xmlns:r="http://schemas.openxmlformats.org/officeDocument/2006/relationships" xmlns:p="http://schemas.openxmlformats.org/presentationml/2006/main">
+  <p:cSld name="">
+    <p:bg>
+      <p:bgRef idx="1001">
+        <a:schemeClr val="bg1"/>
+      </p:bgRef>
+    </p:bg>
+    <p:spTree>
+      <p:nvGrpSpPr>
+        <p:cNvPr id="1" name=""/>
+        <p:cNvGrpSpPr/>
+        <p:nvPr/>
+      </p:nvGrpSpPr>
+      <p:grpSpPr bwMode="auto">
+        <a:xfrm>
+          <a:off x="0" y="0"/>
+          <a:ext cx="0" cy="0"/>
+          <a:chOff x="0" y="0"/>
+          <a:chExt cx="0" cy="0"/>
+        </a:xfrm>
+      </p:grpSpPr>
+      <p:sp>
+        <p:nvSpPr>
+          <p:cNvPr id="2" name="Header Placeholder 1"/>
+          <p:cNvSpPr>
+            <a:spLocks noGrp="1"/>
+          </p:cNvSpPr>
+          <p:nvPr>
+            <p:ph type="hdr" sz="quarter"/>
+          </p:nvPr>
+        </p:nvSpPr>
+        <p:spPr bwMode="auto">
+          <a:xfrm>
+            <a:off x="0" y="0"/>
+            <a:ext cx="2971800" cy="458788"/>
+          </a:xfrm>
+          <a:prstGeom prst="rect">
+            <a:avLst/>
+          </a:prstGeom>
+        </p:spPr>
+        <p:txBody>
+          <a:bodyPr vert="horz" lIns="91440" tIns="45720" rIns="91440" bIns="45720" rtlCol="0" anchor="ctr"/>
+          <a:lstStyle>
+            <a:lvl1pPr algn="l">
+              <a:defRPr sz="1200"/>
+            </a:lvl1pPr>
+          </a:lstStyle>
+          <a:p>
+            <a:pPr>
+              <a:defRPr/>
+            </a:pPr>
+            <a:endParaRPr/>
+          </a:p>
+        </p:txBody>
+      </p:sp>
+      <p:sp>
+        <p:nvSpPr>
+          <p:cNvPr id="3" name="Date Placeholder 2"/>
+          <p:cNvSpPr>
+            <a:spLocks noGrp="1"/>
+          </p:cNvSpPr>
+          <p:nvPr>
+            <p:ph type="dt" idx="2"/>
+          </p:nvPr>
+        </p:nvSpPr>
+        <p:spPr bwMode="auto">
+          <a:xfrm>
+            <a:off x="3884613" y="0"/>
+            <a:ext cx="2971800" cy="458788"/>
+          </a:xfrm>
+          <a:prstGeom prst="rect">
+            <a:avLst/>
+          </a:prstGeom>
+        </p:spPr>
+        <p:txBody>
+          <a:bodyPr vert="horz" lIns="91440" tIns="45720" rIns="91440" bIns="45720" rtlCol="0" anchor="ctr"/>
+          <a:lstStyle>
+            <a:lvl1pPr algn="r">
+              <a:defRPr sz="1200"/>
+            </a:lvl1pPr>
+          </a:lstStyle>
+          <a:p>
+            <a:pPr>
+              <a:defRPr/>
+            </a:pPr>
+            <a:endParaRPr/>
+          </a:p>
+        </p:txBody>
+      </p:sp>
+      <p:sp>
+        <p:nvSpPr>
+          <p:cNvPr id="3" name="Date Placeholder 2"/>
+          <p:cNvSpPr>
+            <a:spLocks noGrp="1"/>
+          </p:cNvSpPr>
+          <p:nvPr>
+            <p:ph type="dt" idx="3"/>
+          </p:nvPr>
+        </p:nvSpPr>
+        <p:spPr bwMode="auto">
+          <a:xfrm>
+            <a:off x="3884613" y="0"/>
+            <a:ext cx="2971800" cy="458788"/>
+          </a:xfrm>
+          <a:prstGeom prst="rect">
+            <a:avLst/>
+          </a:prstGeom>
+        </p:spPr>
+        <p:txBody>
+          <a:bodyPr vert="horz" lIns="91440" tIns="45720" rIns="91440" bIns="45720" rtlCol="0" anchor="ctr"/>
+          <a:lstStyle>
+            <a:lvl1pPr algn="r">
+              <a:defRPr sz="1200"/>
+            </a:lvl1pPr>
+          </a:lstStyle>
+          <a:p>
+            <a:pPr>
+              <a:defRPr/>
+            </a:pPr>
+            <a:endParaRPr/>
+          </a:p>
+        </p:txBody>
+      </p:sp>
+      <p:sp>
+        <p:nvSpPr>
+          <p:cNvPr id="5" name="Notes Placeholder 4"/>
+          <p:cNvSpPr>
+            <a:spLocks noGrp="1"/>
+          </p:cNvSpPr>
+          <p:nvPr>
+            <p:ph type="body" sz="quarter" idx="1"/>
+          </p:nvPr>
+        </p:nvSpPr>
+        <p:spPr bwMode="auto">
+          <a:xfrm>
+            <a:off x="685800" y="4400550"/>
+            <a:ext cx="5486400" cy="3600450"/>
+          </a:xfrm>
+          <a:prstGeom prst="rect">
+            <a:avLst/>
+          </a:prstGeom>
+        </p:spPr>
+        <p:txBody>
+          <a:bodyPr vert="horz" lIns="91440" tIns="45720" rIns="91440" bIns="45720" rtlCol="0" anchor="ctr"/>
+          <a:lstStyle/>
+          <a:p>
+            <a:pPr>
+              <a:defRPr/>
+            </a:pPr>
+            <a:endParaRPr/>
+          </a:p>
+        </p:txBody>
+      </p:sp>
+      <p:sp>
+        <p:nvSpPr>
+          <p:cNvPr id="6" name="Footer Placeholder 5"/>
+          <p:cNvSpPr>
+            <a:spLocks noGrp="1"/>
+          </p:cNvSpPr>
+          <p:nvPr>
+            <p:ph type="ftr" sz="quarter" idx="4"/>
+          </p:nvPr>
+        </p:nvSpPr>
+        <p:spPr bwMode="auto">
+          <a:xfrm>
+            <a:off x="0" y="8685213"/>
+            <a:ext cx="2971800" cy="458787"/>
+          </a:xfrm>
+          <a:prstGeom prst="rect">
+            <a:avLst/>
+          </a:prstGeom>
+        </p:spPr>
+        <p:txBody>
+          <a:bodyPr vert="horz" lIns="91440" tIns="45720" rIns="91440" bIns="45720" rtlCol="0" anchor="b"/>
+          <a:lstStyle>
+            <a:lvl1pPr algn="l">
+              <a:defRPr sz="1200"/>
+            </a:lvl1pPr>
+          </a:lstStyle>
+          <a:p>
+            <a:pPr>
+              <a:defRPr/>
+            </a:pPr>
+            <a:endParaRPr/>
+          </a:p>
+        </p:txBody>
+      </p:sp>
+      <p:sp>
+        <p:nvSpPr>
+          <p:cNvPr id="7" name="Slide Number Placeholder 6"/>
+          <p:cNvSpPr>
+            <a:spLocks noGrp="1"/>
+          </p:cNvSpPr>
+          <p:nvPr>
+            <p:ph type="sldNum" sz="quarter" idx="10"/>
+          </p:nvPr>
+        </p:nvSpPr>
+        <p:spPr bwMode="auto">
+          <a:xfrm>
+            <a:off x="3884613" y="8685213"/>
+            <a:ext cx="2971800" cy="458787"/>
+          </a:xfrm>
+          <a:prstGeom prst="rect">
+            <a:avLst/>
+          </a:prstGeom>
+        </p:spPr>
+        <p:txBody>
+          <a:bodyPr vert="horz" lIns="91440" tIns="45720" rIns="91440" bIns="45720" rtlCol="0" anchor="b"/>
+          <a:lstStyle>
+            <a:lvl1pPr algn="r">
+              <a:defRPr sz="1200"/>
+            </a:lvl1pPr>
+          </a:lstStyle>
+          <a:p>
+            <a:pPr>
+              <a:defRPr/>
+            </a:pPr>
+            <a:endParaRPr/>
+          </a:p>
+        </p:txBody>
+      </p:sp>
+    </p:spTree>
+  </p:cSld>
+  <p:clrMap bg1="lt1" tx1="dk1" bg2="lt2" tx2="dk2" accent1="accent1" accent2="accent2" accent3="accent3" accent4="accent4" accent5="accent5" accent6="accent6" hlink="hlink" folHlink="folHlink"/>
+  <p:notesStyle>
+    <a:lvl1pPr marL="0" algn="l" defTabSz="914400">
+      <a:defRPr sz="1200">
+        <a:solidFill>
+          <a:schemeClr val="tx1"/>
+        </a:solidFill>
+        <a:latin typeface="+mn-lt"/>
+        <a:ea typeface="+mn-ea"/>
+        <a:cs typeface="+mn-cs"/>
+      </a:defRPr>
+    </a:lvl1pPr>
+    <a:lvl2pPr marL="457200" algn="l" defTabSz="914400">
+      <a:defRPr sz="1200">
+        <a:solidFill>
+          <a:schemeClr val="tx1"/>
+        </a:solidFill>
+        <a:latin typeface="+mn-lt"/>
+        <a:ea typeface="+mn-ea"/>
+        <a:cs typeface="+mn-cs"/>
+      </a:defRPr>
+    </a:lvl2pPr>
+    <a:lvl3pPr marL="914400" algn="l" defTabSz="914400">
+      <a:defRPr sz="1200">
+        <a:solidFill>
+          <a:schemeClr val="tx1"/>
+        </a:solidFill>
+        <a:latin typeface="+mn-lt"/>
+        <a:ea typeface="+mn-ea"/>
+        <a:cs typeface="+mn-cs"/>
+      </a:defRPr>
+    </a:lvl3pPr>
+    <a:lvl4pPr marL="1371600" algn="l" defTabSz="914400">
+      <a:defRPr sz="1200">
+        <a:solidFill>
+          <a:schemeClr val="tx1"/>
+        </a:solidFill>
+        <a:latin typeface="+mn-lt"/>
+        <a:ea typeface="+mn-ea"/>
+        <a:cs typeface="+mn-cs"/>
+      </a:defRPr>
+    </a:lvl4pPr>
+    <a:lvl5pPr marL="1828800" algn="l" defTabSz="914400">
+      <a:defRPr sz="1200">
+        <a:solidFill>
+          <a:schemeClr val="tx1"/>
+        </a:solidFill>
+        <a:latin typeface="+mn-lt"/>
+        <a:ea typeface="+mn-ea"/>
+        <a:cs typeface="+mn-cs"/>
+      </a:defRPr>
+    </a:lvl5pPr>
+    <a:lvl6pPr marL="2286000" algn="l" defTabSz="914400">
+      <a:defRPr sz="1200">
+        <a:solidFill>
+          <a:schemeClr val="tx1"/>
+        </a:solidFill>
+        <a:latin typeface="+mn-lt"/>
+        <a:ea typeface="+mn-ea"/>
+        <a:cs typeface="+mn-cs"/>
+      </a:defRPr>
+    </a:lvl6pPr>
+    <a:lvl7pPr marL="2743200" algn="l" defTabSz="914400">
+      <a:defRPr sz="1200">
+        <a:solidFill>
+          <a:schemeClr val="tx1"/>
+        </a:solidFill>
+        <a:latin typeface="+mn-lt"/>
+        <a:ea typeface="+mn-ea"/>
+        <a:cs typeface="+mn-cs"/>
+      </a:defRPr>
+    </a:lvl7pPr>
+    <a:lvl8pPr marL="3200400" algn="l" defTabSz="914400">
+      <a:defRPr sz="1200">
+        <a:solidFill>
+          <a:schemeClr val="tx1"/>
+        </a:solidFill>
+        <a:latin typeface="+mn-lt"/>
+        <a:ea typeface="+mn-ea"/>
+        <a:cs typeface="+mn-cs"/>
+      </a:defRPr>
+    </a:lvl8pPr>
+    <a:lvl9pPr marL="3657600" algn="l" defTabSz="914400">
+      <a:defRPr sz="1200">
+        <a:solidFill>
+          <a:schemeClr val="tx1"/>
+        </a:solidFill>
+        <a:latin typeface="+mn-lt"/>
+        <a:ea typeface="+mn-ea"/>
+        <a:cs typeface="+mn-cs"/>
+      </a:defRPr>
+    </a:lvl9pPr>
+  </p:notesStyle>
+</p:notesMaster>
+</file>
+
+<file path=ppt/notesSlides/notesSlide1.xml><?xml version="1.0" encoding="utf-8"?>
+<p:notes xmlns:a="http://schemas.openxmlformats.org/drawingml/2006/main" xmlns:r="http://schemas.openxmlformats.org/officeDocument/2006/relationships" xmlns:p="http://schemas.openxmlformats.org/presentationml/2006/main" xmlns:m="http://schemas.openxmlformats.org/officeDocument/2006/math" xmlns:w="http://schemas.openxmlformats.org/wordprocessingml/2006/main">
+  <p:cSld name="">
+    <p:spTree>
+      <p:nvGrpSpPr>
+        <p:cNvPr id="1" name=""/>
+        <p:cNvGrpSpPr/>
+        <p:nvPr/>
+      </p:nvGrpSpPr>
+      <p:grpSpPr bwMode="auto">
+        <a:xfrm>
+          <a:off x="0" y="0"/>
+          <a:ext cx="0" cy="0"/>
+          <a:chOff x="0" y="0"/>
+          <a:chExt cx="0" cy="0"/>
+        </a:xfrm>
+      </p:grpSpPr>
+      <p:sp>
+        <p:nvSpPr>
+          <p:cNvPr id="2" name="Slide Image Placeholder 1"/>
+          <p:cNvSpPr>
+            <a:spLocks noChangeAspect="1" noGrp="1" noRot="1"/>
+          </p:cNvSpPr>
+          <p:nvPr>
+            <p:ph type="sldImg"/>
+          </p:nvPr>
+        </p:nvSpPr>
+        <p:spPr bwMode="auto"/>
+      </p:sp>
+      <p:sp>
+        <p:nvSpPr>
+          <p:cNvPr id="3" name="Notes Placeholder 2"/>
+          <p:cNvSpPr>
+            <a:spLocks noGrp="1"/>
+          </p:cNvSpPr>
+          <p:nvPr>
+            <p:ph type="body" idx="1"/>
+          </p:nvPr>
+        </p:nvSpPr>
+        <p:spPr bwMode="auto"/>
+        <p:txBody>
+          <a:bodyPr/>
+          <a:lstStyle/>
+          <a:p>
+            <a:pPr>
+              <a:defRPr/>
+            </a:pPr>
+            <a:endParaRPr/>
+          </a:p>
+        </p:txBody>
+      </p:sp>
+      <p:sp>
+        <p:nvSpPr>
+          <p:cNvPr id="4" name="Slide Number Placeholder 3"/>
+          <p:cNvSpPr>
+            <a:spLocks noGrp="1"/>
+          </p:cNvSpPr>
+          <p:nvPr>
+            <p:ph type="sldNum" sz="quarter" idx="10"/>
+          </p:nvPr>
+        </p:nvSpPr>
+        <p:spPr bwMode="auto"/>
+        <p:txBody>
+          <a:bodyPr/>
+          <a:lstStyle/>
+          <a:p>
+            <a:pPr>
+              <a:defRPr/>
+            </a:pPr>
+            <a:fld id="{C8B15CB6-F16C-362B-5689-14C553A55D07}" type="slidenum">
+              <a:rPr/>
+              <a:t/>
+            </a:fld>
+            <a:endParaRPr/>
+          </a:p>
+        </p:txBody>
+      </p:sp>
+    </p:spTree>
+  </p:cSld>
+  <p:clrMapOvr>
+    <a:masterClrMapping/>
+  </p:clrMapOvr>
+</p:notes>
+</file>
+
+<file path=ppt/notesSlides/notesSlide10.xml><?xml version="1.0" encoding="utf-8"?>
+<p:notes xmlns:a="http://schemas.openxmlformats.org/drawingml/2006/main" xmlns:r="http://schemas.openxmlformats.org/officeDocument/2006/relationships" xmlns:p="http://schemas.openxmlformats.org/presentationml/2006/main" xmlns:m="http://schemas.openxmlformats.org/officeDocument/2006/math" xmlns:w="http://schemas.openxmlformats.org/wordprocessingml/2006/main">
+  <p:cSld name="">
+    <p:spTree>
+      <p:nvGrpSpPr>
+        <p:cNvPr id="1" name=""/>
+        <p:cNvGrpSpPr/>
+        <p:nvPr/>
+      </p:nvGrpSpPr>
+      <p:grpSpPr bwMode="auto">
+        <a:xfrm>
+          <a:off x="0" y="0"/>
+          <a:ext cx="0" cy="0"/>
+          <a:chOff x="0" y="0"/>
+          <a:chExt cx="0" cy="0"/>
+        </a:xfrm>
+      </p:grpSpPr>
+      <p:sp>
+        <p:nvSpPr>
+          <p:cNvPr id="2" name="Slide Image Placeholder 1"/>
+          <p:cNvSpPr>
+            <a:spLocks noChangeAspect="1" noGrp="1" noRot="1"/>
+          </p:cNvSpPr>
+          <p:nvPr>
+            <p:ph type="sldImg"/>
+          </p:nvPr>
+        </p:nvSpPr>
+        <p:spPr bwMode="auto"/>
+      </p:sp>
+      <p:sp>
+        <p:nvSpPr>
+          <p:cNvPr id="3" name="Notes Placeholder 2"/>
+          <p:cNvSpPr>
+            <a:spLocks noGrp="1"/>
+          </p:cNvSpPr>
+          <p:nvPr>
+            <p:ph type="body" idx="1"/>
+          </p:nvPr>
+        </p:nvSpPr>
+        <p:spPr bwMode="auto"/>
+        <p:txBody>
+          <a:bodyPr/>
+          <a:lstStyle/>
+          <a:p>
+            <a:pPr>
+              <a:defRPr/>
+            </a:pPr>
+            <a:endParaRPr/>
+          </a:p>
+        </p:txBody>
+      </p:sp>
+      <p:sp>
+        <p:nvSpPr>
+          <p:cNvPr id="4" name="Slide Number Placeholder 3"/>
+          <p:cNvSpPr>
+            <a:spLocks noGrp="1"/>
+          </p:cNvSpPr>
+          <p:nvPr>
+            <p:ph type="sldNum" sz="quarter" idx="10"/>
+          </p:nvPr>
+        </p:nvSpPr>
+        <p:spPr bwMode="auto"/>
+        <p:txBody>
+          <a:bodyPr/>
+          <a:lstStyle/>
+          <a:p>
+            <a:pPr>
+              <a:defRPr/>
+            </a:pPr>
+            <a:fld id="{46ED8841-358C-A386-AC87-9D7249B2BA68}" type="slidenum">
+              <a:rPr/>
+              <a:t/>
+            </a:fld>
+            <a:endParaRPr/>
+          </a:p>
+        </p:txBody>
+      </p:sp>
+    </p:spTree>
+  </p:cSld>
+  <p:clrMapOvr>
+    <a:masterClrMapping/>
+  </p:clrMapOvr>
+</p:notes>
+</file>
+
+<file path=ppt/notesSlides/notesSlide11.xml><?xml version="1.0" encoding="utf-8"?>
+<p:notes xmlns:a="http://schemas.openxmlformats.org/drawingml/2006/main" xmlns:r="http://schemas.openxmlformats.org/officeDocument/2006/relationships" xmlns:p="http://schemas.openxmlformats.org/presentationml/2006/main" xmlns:m="http://schemas.openxmlformats.org/officeDocument/2006/math" xmlns:w="http://schemas.openxmlformats.org/wordprocessingml/2006/main">
+  <p:cSld name="">
+    <p:spTree>
+      <p:nvGrpSpPr>
+        <p:cNvPr id="1" name=""/>
+        <p:cNvGrpSpPr/>
+        <p:nvPr/>
+      </p:nvGrpSpPr>
+      <p:grpSpPr bwMode="auto">
+        <a:xfrm>
+          <a:off x="0" y="0"/>
+          <a:ext cx="0" cy="0"/>
+          <a:chOff x="0" y="0"/>
+          <a:chExt cx="0" cy="0"/>
+        </a:xfrm>
+      </p:grpSpPr>
+      <p:sp>
+        <p:nvSpPr>
+          <p:cNvPr id="2" name="Slide Image Placeholder 1"/>
+          <p:cNvSpPr>
+            <a:spLocks noChangeAspect="1" noGrp="1" noRot="1"/>
+          </p:cNvSpPr>
+          <p:nvPr>
+            <p:ph type="sldImg"/>
+          </p:nvPr>
+        </p:nvSpPr>
+        <p:spPr bwMode="auto"/>
+      </p:sp>
+      <p:sp>
+        <p:nvSpPr>
+          <p:cNvPr id="3" name="Notes Placeholder 2"/>
+          <p:cNvSpPr>
+            <a:spLocks noGrp="1"/>
+          </p:cNvSpPr>
+          <p:nvPr>
+            <p:ph type="body" idx="1"/>
+          </p:nvPr>
+        </p:nvSpPr>
+        <p:spPr bwMode="auto"/>
+        <p:txBody>
+          <a:bodyPr/>
+          <a:lstStyle/>
+          <a:p>
+            <a:pPr>
+              <a:defRPr/>
+            </a:pPr>
+            <a:endParaRPr/>
+          </a:p>
+        </p:txBody>
+      </p:sp>
+      <p:sp>
+        <p:nvSpPr>
+          <p:cNvPr id="4" name="Slide Number Placeholder 3"/>
+          <p:cNvSpPr>
+            <a:spLocks noGrp="1"/>
+          </p:cNvSpPr>
+          <p:nvPr>
+            <p:ph type="sldNum" sz="quarter" idx="10"/>
+          </p:nvPr>
+        </p:nvSpPr>
+        <p:spPr bwMode="auto"/>
+        <p:txBody>
+          <a:bodyPr/>
+          <a:lstStyle/>
+          <a:p>
+            <a:pPr>
+              <a:defRPr/>
+            </a:pPr>
+            <a:fld id="{903C620E-1C5B-9E0E-C2A3-95F2227F7B8F}" type="slidenum">
+              <a:rPr/>
+              <a:t/>
+            </a:fld>
+            <a:endParaRPr/>
+          </a:p>
+        </p:txBody>
+      </p:sp>
+    </p:spTree>
+  </p:cSld>
+  <p:clrMapOvr>
+    <a:masterClrMapping/>
+  </p:clrMapOvr>
+</p:notes>
+</file>
+
+<file path=ppt/notesSlides/notesSlide2.xml><?xml version="1.0" encoding="utf-8"?>
+<p:notes xmlns:a="http://schemas.openxmlformats.org/drawingml/2006/main" xmlns:r="http://schemas.openxmlformats.org/officeDocument/2006/relationships" xmlns:p="http://schemas.openxmlformats.org/presentationml/2006/main" xmlns:m="http://schemas.openxmlformats.org/officeDocument/2006/math" xmlns:w="http://schemas.openxmlformats.org/wordprocessingml/2006/main">
+  <p:cSld name="">
+    <p:spTree>
+      <p:nvGrpSpPr>
+        <p:cNvPr id="1" name=""/>
+        <p:cNvGrpSpPr/>
+        <p:nvPr/>
+      </p:nvGrpSpPr>
+      <p:grpSpPr bwMode="auto">
+        <a:xfrm>
+          <a:off x="0" y="0"/>
+          <a:ext cx="0" cy="0"/>
+          <a:chOff x="0" y="0"/>
+          <a:chExt cx="0" cy="0"/>
+        </a:xfrm>
+      </p:grpSpPr>
+      <p:sp>
+        <p:nvSpPr>
+          <p:cNvPr id="2" name="Slide Image Placeholder 1"/>
+          <p:cNvSpPr>
+            <a:spLocks noChangeAspect="1" noGrp="1" noRot="1"/>
+          </p:cNvSpPr>
+          <p:nvPr>
+            <p:ph type="sldImg"/>
+          </p:nvPr>
+        </p:nvSpPr>
+        <p:spPr bwMode="auto"/>
+      </p:sp>
+      <p:sp>
+        <p:nvSpPr>
+          <p:cNvPr id="3" name="Notes Placeholder 2"/>
+          <p:cNvSpPr>
+            <a:spLocks noGrp="1"/>
+          </p:cNvSpPr>
+          <p:nvPr>
+            <p:ph type="body" idx="1"/>
+          </p:nvPr>
+        </p:nvSpPr>
+        <p:spPr bwMode="auto"/>
+        <p:txBody>
+          <a:bodyPr/>
+          <a:lstStyle/>
+          <a:p>
+            <a:pPr>
+              <a:defRPr/>
+            </a:pPr>
+            <a:endParaRPr/>
+          </a:p>
+        </p:txBody>
+      </p:sp>
+      <p:sp>
+        <p:nvSpPr>
+          <p:cNvPr id="4" name="Slide Number Placeholder 3"/>
+          <p:cNvSpPr>
+            <a:spLocks noGrp="1"/>
+          </p:cNvSpPr>
+          <p:nvPr>
+            <p:ph type="sldNum" sz="quarter" idx="10"/>
+          </p:nvPr>
+        </p:nvSpPr>
+        <p:spPr bwMode="auto"/>
+        <p:txBody>
+          <a:bodyPr/>
+          <a:lstStyle/>
+          <a:p>
+            <a:pPr>
+              <a:defRPr/>
+            </a:pPr>
+            <a:fld id="{A7282E64-6F79-425F-1E72-0DCE477DFD62}" type="slidenum">
+              <a:rPr/>
+              <a:t/>
+            </a:fld>
+            <a:endParaRPr/>
+          </a:p>
+        </p:txBody>
+      </p:sp>
+    </p:spTree>
+  </p:cSld>
+  <p:clrMapOvr>
+    <a:masterClrMapping/>
+  </p:clrMapOvr>
+</p:notes>
+</file>
+
+<file path=ppt/notesSlides/notesSlide3.xml><?xml version="1.0" encoding="utf-8"?>
+<p:notes xmlns:a="http://schemas.openxmlformats.org/drawingml/2006/main" xmlns:r="http://schemas.openxmlformats.org/officeDocument/2006/relationships" xmlns:p="http://schemas.openxmlformats.org/presentationml/2006/main" xmlns:m="http://schemas.openxmlformats.org/officeDocument/2006/math" xmlns:w="http://schemas.openxmlformats.org/wordprocessingml/2006/main">
+  <p:cSld name="">
+    <p:spTree>
+      <p:nvGrpSpPr>
+        <p:cNvPr id="1" name=""/>
+        <p:cNvGrpSpPr/>
+        <p:nvPr/>
+      </p:nvGrpSpPr>
+      <p:grpSpPr bwMode="auto">
+        <a:xfrm>
+          <a:off x="0" y="0"/>
+          <a:ext cx="0" cy="0"/>
+          <a:chOff x="0" y="0"/>
+          <a:chExt cx="0" cy="0"/>
+        </a:xfrm>
+      </p:grpSpPr>
+      <p:sp>
+        <p:nvSpPr>
+          <p:cNvPr id="2" name="Slide Image Placeholder 1"/>
+          <p:cNvSpPr>
+            <a:spLocks noChangeAspect="1" noGrp="1" noRot="1"/>
+          </p:cNvSpPr>
+          <p:nvPr>
+            <p:ph type="sldImg"/>
+          </p:nvPr>
+        </p:nvSpPr>
+        <p:spPr bwMode="auto"/>
+      </p:sp>
+      <p:sp>
+        <p:nvSpPr>
+          <p:cNvPr id="3" name="Notes Placeholder 2"/>
+          <p:cNvSpPr>
+            <a:spLocks noGrp="1"/>
+          </p:cNvSpPr>
+          <p:nvPr>
+            <p:ph type="body" idx="1"/>
+          </p:nvPr>
+        </p:nvSpPr>
+        <p:spPr bwMode="auto"/>
+        <p:txBody>
+          <a:bodyPr/>
+          <a:lstStyle/>
+          <a:p>
+            <a:pPr>
+              <a:defRPr/>
+            </a:pPr>
+            <a:endParaRPr/>
+          </a:p>
+        </p:txBody>
+      </p:sp>
+      <p:sp>
+        <p:nvSpPr>
+          <p:cNvPr id="4" name="Slide Number Placeholder 3"/>
+          <p:cNvSpPr>
+            <a:spLocks noGrp="1"/>
+          </p:cNvSpPr>
+          <p:nvPr>
+            <p:ph type="sldNum" sz="quarter" idx="10"/>
+          </p:nvPr>
+        </p:nvSpPr>
+        <p:spPr bwMode="auto"/>
+        <p:txBody>
+          <a:bodyPr/>
+          <a:lstStyle/>
+          <a:p>
+            <a:pPr>
+              <a:defRPr/>
+            </a:pPr>
+            <a:fld id="{E03ABFCE-CFBC-0CD4-714F-388AD5807657}" type="slidenum">
+              <a:rPr/>
+              <a:t/>
+            </a:fld>
+            <a:endParaRPr/>
+          </a:p>
+        </p:txBody>
+      </p:sp>
+    </p:spTree>
+  </p:cSld>
+  <p:clrMapOvr>
+    <a:masterClrMapping/>
+  </p:clrMapOvr>
+</p:notes>
+</file>
+
+<file path=ppt/notesSlides/notesSlide4.xml><?xml version="1.0" encoding="utf-8"?>
+<p:notes xmlns:a="http://schemas.openxmlformats.org/drawingml/2006/main" xmlns:r="http://schemas.openxmlformats.org/officeDocument/2006/relationships" xmlns:p="http://schemas.openxmlformats.org/presentationml/2006/main" xmlns:m="http://schemas.openxmlformats.org/officeDocument/2006/math" xmlns:w="http://schemas.openxmlformats.org/wordprocessingml/2006/main">
+  <p:cSld name="">
+    <p:spTree>
+      <p:nvGrpSpPr>
+        <p:cNvPr id="1" name=""/>
+        <p:cNvGrpSpPr/>
+        <p:nvPr/>
+      </p:nvGrpSpPr>
+      <p:grpSpPr bwMode="auto">
+        <a:xfrm>
+          <a:off x="0" y="0"/>
+          <a:ext cx="0" cy="0"/>
+          <a:chOff x="0" y="0"/>
+          <a:chExt cx="0" cy="0"/>
+        </a:xfrm>
+      </p:grpSpPr>
+      <p:sp>
+        <p:nvSpPr>
+          <p:cNvPr id="2" name="Slide Image Placeholder 1"/>
+          <p:cNvSpPr>
+            <a:spLocks noChangeAspect="1" noGrp="1" noRot="1"/>
+          </p:cNvSpPr>
+          <p:nvPr>
+            <p:ph type="sldImg"/>
+          </p:nvPr>
+        </p:nvSpPr>
+        <p:spPr bwMode="auto"/>
+      </p:sp>
+      <p:sp>
+        <p:nvSpPr>
+          <p:cNvPr id="3" name="Notes Placeholder 2"/>
+          <p:cNvSpPr>
+            <a:spLocks noGrp="1"/>
+          </p:cNvSpPr>
+          <p:nvPr>
+            <p:ph type="body" idx="1"/>
+          </p:nvPr>
+        </p:nvSpPr>
+        <p:spPr bwMode="auto"/>
+        <p:txBody>
+          <a:bodyPr/>
+          <a:lstStyle/>
+          <a:p>
+            <a:pPr>
+              <a:defRPr/>
+            </a:pPr>
+            <a:endParaRPr/>
+          </a:p>
+        </p:txBody>
+      </p:sp>
+      <p:sp>
+        <p:nvSpPr>
+          <p:cNvPr id="4" name="Slide Number Placeholder 3"/>
+          <p:cNvSpPr>
+            <a:spLocks noGrp="1"/>
+          </p:cNvSpPr>
+          <p:nvPr>
+            <p:ph type="sldNum" sz="quarter" idx="10"/>
+          </p:nvPr>
+        </p:nvSpPr>
+        <p:spPr bwMode="auto"/>
+        <p:txBody>
+          <a:bodyPr/>
+          <a:lstStyle/>
+          <a:p>
+            <a:pPr>
+              <a:defRPr/>
+            </a:pPr>
+            <a:fld id="{4BA2413F-0516-A1EB-C5F9-65CE94761CA1}" type="slidenum">
+              <a:rPr/>
+              <a:t/>
+            </a:fld>
+            <a:endParaRPr/>
+          </a:p>
+        </p:txBody>
+      </p:sp>
+    </p:spTree>
+  </p:cSld>
+  <p:clrMapOvr>
+    <a:masterClrMapping/>
+  </p:clrMapOvr>
+</p:notes>
+</file>
+
+<file path=ppt/notesSlides/notesSlide5.xml><?xml version="1.0" encoding="utf-8"?>
+<p:notes xmlns:a="http://schemas.openxmlformats.org/drawingml/2006/main" xmlns:r="http://schemas.openxmlformats.org/officeDocument/2006/relationships" xmlns:p="http://schemas.openxmlformats.org/presentationml/2006/main" xmlns:m="http://schemas.openxmlformats.org/officeDocument/2006/math" xmlns:w="http://schemas.openxmlformats.org/wordprocessingml/2006/main">
+  <p:cSld name="">
+    <p:spTree>
+      <p:nvGrpSpPr>
+        <p:cNvPr id="1" name=""/>
+        <p:cNvGrpSpPr/>
+        <p:nvPr/>
+      </p:nvGrpSpPr>
+      <p:grpSpPr bwMode="auto">
+        <a:xfrm>
+          <a:off x="0" y="0"/>
+          <a:ext cx="0" cy="0"/>
+          <a:chOff x="0" y="0"/>
+          <a:chExt cx="0" cy="0"/>
+        </a:xfrm>
+      </p:grpSpPr>
+      <p:sp>
+        <p:nvSpPr>
+          <p:cNvPr id="2" name="Slide Image Placeholder 1"/>
+          <p:cNvSpPr>
+            <a:spLocks noChangeAspect="1" noGrp="1" noRot="1"/>
+          </p:cNvSpPr>
+          <p:nvPr>
+            <p:ph type="sldImg"/>
+          </p:nvPr>
+        </p:nvSpPr>
+        <p:spPr bwMode="auto"/>
+      </p:sp>
+      <p:sp>
+        <p:nvSpPr>
+          <p:cNvPr id="3" name="Notes Placeholder 2"/>
+          <p:cNvSpPr>
+            <a:spLocks noGrp="1"/>
+          </p:cNvSpPr>
+          <p:nvPr>
+            <p:ph type="body" idx="1"/>
+          </p:nvPr>
+        </p:nvSpPr>
+        <p:spPr bwMode="auto"/>
+        <p:txBody>
+          <a:bodyPr/>
+          <a:lstStyle/>
+          <a:p>
+            <a:pPr>
+              <a:defRPr/>
+            </a:pPr>
+            <a:endParaRPr/>
+          </a:p>
+        </p:txBody>
+      </p:sp>
+      <p:sp>
+        <p:nvSpPr>
+          <p:cNvPr id="4" name="Slide Number Placeholder 3"/>
+          <p:cNvSpPr>
+            <a:spLocks noGrp="1"/>
+          </p:cNvSpPr>
+          <p:nvPr>
+            <p:ph type="sldNum" sz="quarter" idx="10"/>
+          </p:nvPr>
+        </p:nvSpPr>
+        <p:spPr bwMode="auto"/>
+        <p:txBody>
+          <a:bodyPr/>
+          <a:lstStyle/>
+          <a:p>
+            <a:pPr>
+              <a:defRPr/>
+            </a:pPr>
+            <a:fld id="{D15BF170-E5F2-1620-2DF3-BEEF3D7C3F85}" type="slidenum">
+              <a:rPr/>
+              <a:t/>
+            </a:fld>
+            <a:endParaRPr/>
+          </a:p>
+        </p:txBody>
+      </p:sp>
+    </p:spTree>
+  </p:cSld>
+  <p:clrMapOvr>
+    <a:masterClrMapping/>
+  </p:clrMapOvr>
+</p:notes>
+</file>
+
+<file path=ppt/notesSlides/notesSlide6.xml><?xml version="1.0" encoding="utf-8"?>
+<p:notes xmlns:a="http://schemas.openxmlformats.org/drawingml/2006/main" xmlns:r="http://schemas.openxmlformats.org/officeDocument/2006/relationships" xmlns:p="http://schemas.openxmlformats.org/presentationml/2006/main" xmlns:m="http://schemas.openxmlformats.org/officeDocument/2006/math" xmlns:w="http://schemas.openxmlformats.org/wordprocessingml/2006/main">
+  <p:cSld name="">
+    <p:spTree>
+      <p:nvGrpSpPr>
+        <p:cNvPr id="1" name=""/>
+        <p:cNvGrpSpPr/>
+        <p:nvPr/>
+      </p:nvGrpSpPr>
+      <p:grpSpPr bwMode="auto">
+        <a:xfrm>
+          <a:off x="0" y="0"/>
+          <a:ext cx="0" cy="0"/>
+          <a:chOff x="0" y="0"/>
+          <a:chExt cx="0" cy="0"/>
+        </a:xfrm>
+      </p:grpSpPr>
+      <p:sp>
+        <p:nvSpPr>
+          <p:cNvPr id="2" name="Slide Image Placeholder 1"/>
+          <p:cNvSpPr>
+            <a:spLocks noChangeAspect="1" noGrp="1" noRot="1"/>
+          </p:cNvSpPr>
+          <p:nvPr>
+            <p:ph type="sldImg"/>
+          </p:nvPr>
+        </p:nvSpPr>
+        <p:spPr bwMode="auto"/>
+      </p:sp>
+      <p:sp>
+        <p:nvSpPr>
+          <p:cNvPr id="3" name="Notes Placeholder 2"/>
+          <p:cNvSpPr>
+            <a:spLocks noGrp="1"/>
+          </p:cNvSpPr>
+          <p:nvPr>
+            <p:ph type="body" idx="1"/>
+          </p:nvPr>
+        </p:nvSpPr>
+        <p:spPr bwMode="auto"/>
+        <p:txBody>
+          <a:bodyPr/>
+          <a:lstStyle/>
+          <a:p>
+            <a:pPr>
+              <a:defRPr/>
+            </a:pPr>
+            <a:endParaRPr/>
+          </a:p>
+        </p:txBody>
+      </p:sp>
+      <p:sp>
+        <p:nvSpPr>
+          <p:cNvPr id="4" name="Slide Number Placeholder 3"/>
+          <p:cNvSpPr>
+            <a:spLocks noGrp="1"/>
+          </p:cNvSpPr>
+          <p:nvPr>
+            <p:ph type="sldNum" sz="quarter" idx="10"/>
+          </p:nvPr>
+        </p:nvSpPr>
+        <p:spPr bwMode="auto"/>
+        <p:txBody>
+          <a:bodyPr/>
+          <a:lstStyle/>
+          <a:p>
+            <a:pPr>
+              <a:defRPr/>
+            </a:pPr>
+            <a:fld id="{44241E4D-7742-3691-9D63-0FE42231721A}" type="slidenum">
+              <a:rPr/>
+              <a:t/>
+            </a:fld>
+            <a:endParaRPr/>
+          </a:p>
+        </p:txBody>
+      </p:sp>
+    </p:spTree>
+  </p:cSld>
+  <p:clrMapOvr>
+    <a:masterClrMapping/>
+  </p:clrMapOvr>
+</p:notes>
+</file>
+
+<file path=ppt/notesSlides/notesSlide7.xml><?xml version="1.0" encoding="utf-8"?>
+<p:notes xmlns:a="http://schemas.openxmlformats.org/drawingml/2006/main" xmlns:r="http://schemas.openxmlformats.org/officeDocument/2006/relationships" xmlns:p="http://schemas.openxmlformats.org/presentationml/2006/main" xmlns:m="http://schemas.openxmlformats.org/officeDocument/2006/math" xmlns:w="http://schemas.openxmlformats.org/wordprocessingml/2006/main">
+  <p:cSld name="">
+    <p:spTree>
+      <p:nvGrpSpPr>
+        <p:cNvPr id="1" name=""/>
+        <p:cNvGrpSpPr/>
+        <p:nvPr/>
+      </p:nvGrpSpPr>
+      <p:grpSpPr bwMode="auto">
+        <a:xfrm>
+          <a:off x="0" y="0"/>
+          <a:ext cx="0" cy="0"/>
+          <a:chOff x="0" y="0"/>
+          <a:chExt cx="0" cy="0"/>
+        </a:xfrm>
+      </p:grpSpPr>
+      <p:sp>
+        <p:nvSpPr>
+          <p:cNvPr id="2" name="Slide Image Placeholder 1"/>
+          <p:cNvSpPr>
+            <a:spLocks noChangeAspect="1" noGrp="1" noRot="1"/>
+          </p:cNvSpPr>
+          <p:nvPr>
+            <p:ph type="sldImg"/>
+          </p:nvPr>
+        </p:nvSpPr>
+        <p:spPr bwMode="auto"/>
+      </p:sp>
+      <p:sp>
+        <p:nvSpPr>
+          <p:cNvPr id="3" name="Notes Placeholder 2"/>
+          <p:cNvSpPr>
+            <a:spLocks noGrp="1"/>
+          </p:cNvSpPr>
+          <p:nvPr>
+            <p:ph type="body" idx="1"/>
+          </p:nvPr>
+        </p:nvSpPr>
+        <p:spPr bwMode="auto"/>
+        <p:txBody>
+          <a:bodyPr/>
+          <a:lstStyle/>
+          <a:p>
+            <a:pPr>
+              <a:defRPr/>
+            </a:pPr>
+            <a:endParaRPr/>
+          </a:p>
+        </p:txBody>
+      </p:sp>
+      <p:sp>
+        <p:nvSpPr>
+          <p:cNvPr id="4" name="Slide Number Placeholder 3"/>
+          <p:cNvSpPr>
+            <a:spLocks noGrp="1"/>
+          </p:cNvSpPr>
+          <p:nvPr>
+            <p:ph type="sldNum" sz="quarter" idx="10"/>
+          </p:nvPr>
+        </p:nvSpPr>
+        <p:spPr bwMode="auto"/>
+        <p:txBody>
+          <a:bodyPr/>
+          <a:lstStyle/>
+          <a:p>
+            <a:pPr>
+              <a:defRPr/>
+            </a:pPr>
+            <a:fld id="{C7E39CEC-8F1B-3583-2EDA-2E3BC699261B}" type="slidenum">
+              <a:rPr/>
+              <a:t/>
+            </a:fld>
+            <a:endParaRPr/>
+          </a:p>
+        </p:txBody>
+      </p:sp>
+    </p:spTree>
+  </p:cSld>
+  <p:clrMapOvr>
+    <a:masterClrMapping/>
+  </p:clrMapOvr>
+</p:notes>
+</file>
+
+<file path=ppt/notesSlides/notesSlide8.xml><?xml version="1.0" encoding="utf-8"?>
+<p:notes xmlns:a="http://schemas.openxmlformats.org/drawingml/2006/main" xmlns:r="http://schemas.openxmlformats.org/officeDocument/2006/relationships" xmlns:p="http://schemas.openxmlformats.org/presentationml/2006/main" xmlns:m="http://schemas.openxmlformats.org/officeDocument/2006/math" xmlns:w="http://schemas.openxmlformats.org/wordprocessingml/2006/main">
+  <p:cSld name="">
+    <p:spTree>
+      <p:nvGrpSpPr>
+        <p:cNvPr id="1" name=""/>
+        <p:cNvGrpSpPr/>
+        <p:nvPr/>
+      </p:nvGrpSpPr>
+      <p:grpSpPr bwMode="auto">
+        <a:xfrm>
+          <a:off x="0" y="0"/>
+          <a:ext cx="0" cy="0"/>
+          <a:chOff x="0" y="0"/>
+          <a:chExt cx="0" cy="0"/>
+        </a:xfrm>
+      </p:grpSpPr>
+      <p:sp>
+        <p:nvSpPr>
+          <p:cNvPr id="2" name="Slide Image Placeholder 1"/>
+          <p:cNvSpPr>
+            <a:spLocks noChangeAspect="1" noGrp="1" noRot="1"/>
+          </p:cNvSpPr>
+          <p:nvPr>
+            <p:ph type="sldImg"/>
+          </p:nvPr>
+        </p:nvSpPr>
+        <p:spPr bwMode="auto"/>
+      </p:sp>
+      <p:sp>
+        <p:nvSpPr>
+          <p:cNvPr id="3" name="Notes Placeholder 2"/>
+          <p:cNvSpPr>
+            <a:spLocks noGrp="1"/>
+          </p:cNvSpPr>
+          <p:nvPr>
+            <p:ph type="body" idx="1"/>
+          </p:nvPr>
+        </p:nvSpPr>
+        <p:spPr bwMode="auto"/>
+        <p:txBody>
+          <a:bodyPr/>
+          <a:lstStyle/>
+          <a:p>
+            <a:pPr>
+              <a:defRPr/>
+            </a:pPr>
+            <a:endParaRPr/>
+          </a:p>
+        </p:txBody>
+      </p:sp>
+      <p:sp>
+        <p:nvSpPr>
+          <p:cNvPr id="4" name="Slide Number Placeholder 3"/>
+          <p:cNvSpPr>
+            <a:spLocks noGrp="1"/>
+          </p:cNvSpPr>
+          <p:nvPr>
+            <p:ph type="sldNum" sz="quarter" idx="10"/>
+          </p:nvPr>
+        </p:nvSpPr>
+        <p:spPr bwMode="auto"/>
+        <p:txBody>
+          <a:bodyPr/>
+          <a:lstStyle/>
+          <a:p>
+            <a:pPr>
+              <a:defRPr/>
+            </a:pPr>
+            <a:fld id="{4E672908-52DE-3D01-3772-6294655EC57B}" type="slidenum">
+              <a:rPr/>
+              <a:t/>
+            </a:fld>
+            <a:endParaRPr/>
+          </a:p>
+        </p:txBody>
+      </p:sp>
+    </p:spTree>
+  </p:cSld>
+  <p:clrMapOvr>
+    <a:masterClrMapping/>
+  </p:clrMapOvr>
+</p:notes>
+</file>
+
+<file path=ppt/notesSlides/notesSlide9.xml><?xml version="1.0" encoding="utf-8"?>
+<p:notes xmlns:a="http://schemas.openxmlformats.org/drawingml/2006/main" xmlns:r="http://schemas.openxmlformats.org/officeDocument/2006/relationships" xmlns:p="http://schemas.openxmlformats.org/presentationml/2006/main" xmlns:m="http://schemas.openxmlformats.org/officeDocument/2006/math" xmlns:w="http://schemas.openxmlformats.org/wordprocessingml/2006/main">
+  <p:cSld name="">
+    <p:spTree>
+      <p:nvGrpSpPr>
+        <p:cNvPr id="1" name=""/>
+        <p:cNvGrpSpPr/>
+        <p:nvPr/>
+      </p:nvGrpSpPr>
+      <p:grpSpPr bwMode="auto">
+        <a:xfrm>
+          <a:off x="0" y="0"/>
+          <a:ext cx="0" cy="0"/>
+          <a:chOff x="0" y="0"/>
+          <a:chExt cx="0" cy="0"/>
+        </a:xfrm>
+      </p:grpSpPr>
+      <p:sp>
+        <p:nvSpPr>
+          <p:cNvPr id="2" name="Slide Image Placeholder 1"/>
+          <p:cNvSpPr>
+            <a:spLocks noChangeAspect="1" noGrp="1" noRot="1"/>
+          </p:cNvSpPr>
+          <p:nvPr>
+            <p:ph type="sldImg"/>
+          </p:nvPr>
+        </p:nvSpPr>
+        <p:spPr bwMode="auto"/>
+      </p:sp>
+      <p:sp>
+        <p:nvSpPr>
+          <p:cNvPr id="3" name="Notes Placeholder 2"/>
+          <p:cNvSpPr>
+            <a:spLocks noGrp="1"/>
+          </p:cNvSpPr>
+          <p:nvPr>
+            <p:ph type="body" idx="1"/>
+          </p:nvPr>
+        </p:nvSpPr>
+        <p:spPr bwMode="auto"/>
+        <p:txBody>
+          <a:bodyPr/>
+          <a:lstStyle/>
+          <a:p>
+            <a:pPr>
+              <a:defRPr/>
+            </a:pPr>
+            <a:endParaRPr/>
+          </a:p>
+        </p:txBody>
+      </p:sp>
+      <p:sp>
+        <p:nvSpPr>
+          <p:cNvPr id="4" name="Slide Number Placeholder 3"/>
+          <p:cNvSpPr>
+            <a:spLocks noGrp="1"/>
+          </p:cNvSpPr>
+          <p:nvPr>
+            <p:ph type="sldNum" sz="quarter" idx="10"/>
+          </p:nvPr>
+        </p:nvSpPr>
+        <p:spPr bwMode="auto"/>
+        <p:txBody>
+          <a:bodyPr/>
+          <a:lstStyle/>
+          <a:p>
+            <a:pPr>
+              <a:defRPr/>
+            </a:pPr>
+            <a:fld id="{374CFBA0-D264-AE62-2DFB-5B5BC9A54F3E}" type="slidenum">
+              <a:rPr/>
+              <a:t/>
+            </a:fld>
+            <a:endParaRPr/>
+          </a:p>
+        </p:txBody>
+      </p:sp>
+    </p:spTree>
+  </p:cSld>
+  <p:clrMapOvr>
+    <a:masterClrMapping/>
+  </p:clrMapOvr>
+</p:notes>
+</file>
+
 <file path=ppt/slideLayouts/slideLayout1.xml><?xml version="1.0" encoding="utf-8"?>
-<p:sldLayout xmlns:a="http://schemas.openxmlformats.org/drawingml/2006/main" xmlns:r="http://schemas.openxmlformats.org/officeDocument/2006/relationships" xmlns:p="http://schemas.openxmlformats.org/presentationml/2006/main" type="title" preserve="1">
+<p:sldLayout xmlns:a="http://schemas.openxmlformats.org/drawingml/2006/main" xmlns:r="http://schemas.openxmlformats.org/officeDocument/2006/relationships" xmlns:p="http://schemas.openxmlformats.org/presentationml/2006/main" xmlns:m="http://schemas.openxmlformats.org/officeDocument/2006/math" xmlns:w="http://schemas.openxmlformats.org/wordprocessingml/2006/main" matchingName="" preserve="1" showMasterPhAnim="0" showMasterSp="1" type="title" userDrawn="1">
   <p:cSld name="Title Slide">
     <p:spTree>
       <p:nvGrpSpPr>
@@ -126,7 +1384,7 @@
         <p:cNvGrpSpPr/>
         <p:nvPr/>
       </p:nvGrpSpPr>
-      <p:grpSpPr>
+      <p:grpSpPr bwMode="auto">
         <a:xfrm>
           <a:off x="0" y="0"/>
           <a:ext cx="0" cy="0"/>
@@ -136,7 +1394,7 @@
       </p:grpSpPr>
       <p:sp>
         <p:nvSpPr>
-          <p:cNvPr id="2" name="Title 1"/>
+          <p:cNvPr id="976016393" name="Title 1"/>
           <p:cNvSpPr>
             <a:spLocks noGrp="1"/>
           </p:cNvSpPr>
@@ -144,7 +1402,7 @@
             <p:ph type="ctrTitle"/>
           </p:nvPr>
         </p:nvSpPr>
-        <p:spPr>
+        <p:spPr bwMode="auto">
           <a:xfrm>
             <a:off x="1524000" y="1122363"/>
             <a:ext cx="9144000" cy="2387600"/>
@@ -158,8 +1416,11 @@
             </a:lvl1pPr>
           </a:lstStyle>
           <a:p>
-            <a:r>
-              <a:rPr lang="en-US" smtClean="0"/>
+            <a:pPr>
+              <a:defRPr/>
+            </a:pPr>
+            <a:r>
+              <a:rPr lang="en-US"/>
               <a:t>Click to edit Master title style</a:t>
             </a:r>
             <a:endParaRPr lang="en-US"/>
@@ -168,7 +1429,7 @@
       </p:sp>
       <p:sp>
         <p:nvSpPr>
-          <p:cNvPr id="3" name="Subtitle 2"/>
+          <p:cNvPr id="1765539831" name="Subtitle 2"/>
           <p:cNvSpPr>
             <a:spLocks noGrp="1"/>
           </p:cNvSpPr>
@@ -176,7 +1437,7 @@
             <p:ph type="subTitle" idx="1"/>
           </p:nvPr>
         </p:nvSpPr>
-        <p:spPr>
+        <p:spPr bwMode="auto">
           <a:xfrm>
             <a:off x="1524000" y="3602038"/>
             <a:ext cx="9144000" cy="1655762"/>
@@ -223,8 +1484,11 @@
             </a:lvl9pPr>
           </a:lstStyle>
           <a:p>
-            <a:r>
-              <a:rPr lang="en-US" smtClean="0"/>
+            <a:pPr>
+              <a:defRPr/>
+            </a:pPr>
+            <a:r>
+              <a:rPr lang="en-US"/>
               <a:t>Click to edit Master subtitle style</a:t>
             </a:r>
             <a:endParaRPr lang="en-US"/>
@@ -233,7 +1497,7 @@
       </p:sp>
       <p:sp>
         <p:nvSpPr>
-          <p:cNvPr id="4" name="Date Placeholder 3"/>
+          <p:cNvPr id="1903504423" name="Date Placeholder 3"/>
           <p:cNvSpPr>
             <a:spLocks noGrp="1"/>
           </p:cNvSpPr>
@@ -241,13 +1505,16 @@
             <p:ph type="dt" sz="half" idx="10"/>
           </p:nvPr>
         </p:nvSpPr>
-        <p:spPr/>
-        <p:txBody>
-          <a:bodyPr/>
-          <a:lstStyle/>
-          <a:p>
+        <p:spPr bwMode="auto"/>
+        <p:txBody>
+          <a:bodyPr/>
+          <a:lstStyle/>
+          <a:p>
+            <a:pPr>
+              <a:defRPr/>
+            </a:pPr>
             <a:fld id="{EDBC742C-A8E5-4E57-BD43-F0B8F462B862}" type="datetimeFigureOut">
-              <a:rPr lang="en-US" smtClean="0"/>
+              <a:rPr lang="en-US"/>
               <a:t>4/1/2026</a:t>
             </a:fld>
             <a:endParaRPr lang="en-US"/>
@@ -256,7 +1523,7 @@
       </p:sp>
       <p:sp>
         <p:nvSpPr>
-          <p:cNvPr id="5" name="Footer Placeholder 4"/>
+          <p:cNvPr id="955750246" name="Footer Placeholder 4"/>
           <p:cNvSpPr>
             <a:spLocks noGrp="1"/>
           </p:cNvSpPr>
@@ -264,18 +1531,21 @@
             <p:ph type="ftr" sz="quarter" idx="11"/>
           </p:nvPr>
         </p:nvSpPr>
-        <p:spPr/>
-        <p:txBody>
-          <a:bodyPr/>
-          <a:lstStyle/>
-          <a:p>
-            <a:endParaRPr lang="en-US"/>
-          </a:p>
-        </p:txBody>
-      </p:sp>
-      <p:sp>
-        <p:nvSpPr>
-          <p:cNvPr id="6" name="Slide Number Placeholder 5"/>
+        <p:spPr bwMode="auto"/>
+        <p:txBody>
+          <a:bodyPr/>
+          <a:lstStyle/>
+          <a:p>
+            <a:pPr>
+              <a:defRPr/>
+            </a:pPr>
+            <a:endParaRPr lang="en-US"/>
+          </a:p>
+        </p:txBody>
+      </p:sp>
+      <p:sp>
+        <p:nvSpPr>
+          <p:cNvPr id="1950930702" name="Slide Number Placeholder 5"/>
           <p:cNvSpPr>
             <a:spLocks noGrp="1"/>
           </p:cNvSpPr>
@@ -283,13 +1553,16 @@
             <p:ph type="sldNum" sz="quarter" idx="12"/>
           </p:nvPr>
         </p:nvSpPr>
-        <p:spPr/>
-        <p:txBody>
-          <a:bodyPr/>
-          <a:lstStyle/>
-          <a:p>
+        <p:spPr bwMode="auto"/>
+        <p:txBody>
+          <a:bodyPr/>
+          <a:lstStyle/>
+          <a:p>
+            <a:pPr>
+              <a:defRPr/>
+            </a:pPr>
             <a:fld id="{FD8C485D-1393-4FBB-854E-BDC6A27E3064}" type="slidenum">
-              <a:rPr lang="en-US" smtClean="0"/>
+              <a:rPr lang="en-US"/>
               <a:t>‹#›</a:t>
             </a:fld>
             <a:endParaRPr lang="en-US"/>
@@ -297,11 +1570,6 @@
         </p:txBody>
       </p:sp>
     </p:spTree>
-    <p:extLst>
-      <p:ext uri="{BB962C8B-B14F-4D97-AF65-F5344CB8AC3E}">
-        <p14:creationId xmlns:p14="http://schemas.microsoft.com/office/powerpoint/2010/main" val="1058853109"/>
-      </p:ext>
-    </p:extLst>
   </p:cSld>
   <p:clrMapOvr>
     <a:masterClrMapping/>
@@ -310,7 +1578,7 @@
 </file>
 
 <file path=ppt/slideLayouts/slideLayout10.xml><?xml version="1.0" encoding="utf-8"?>
-<p:sldLayout xmlns:a="http://schemas.openxmlformats.org/drawingml/2006/main" xmlns:r="http://schemas.openxmlformats.org/officeDocument/2006/relationships" xmlns:p="http://schemas.openxmlformats.org/presentationml/2006/main" type="vertTx" preserve="1">
+<p:sldLayout xmlns:a="http://schemas.openxmlformats.org/drawingml/2006/main" xmlns:r="http://schemas.openxmlformats.org/officeDocument/2006/relationships" xmlns:p="http://schemas.openxmlformats.org/presentationml/2006/main" xmlns:m="http://schemas.openxmlformats.org/officeDocument/2006/math" xmlns:w="http://schemas.openxmlformats.org/wordprocessingml/2006/main" matchingName="" preserve="1" showMasterPhAnim="0" showMasterSp="1" type="vertTx" userDrawn="1">
   <p:cSld name="Title and Vertical Text">
     <p:spTree>
       <p:nvGrpSpPr>
@@ -318,7 +1586,7 @@
         <p:cNvGrpSpPr/>
         <p:nvPr/>
       </p:nvGrpSpPr>
-      <p:grpSpPr>
+      <p:grpSpPr bwMode="auto">
         <a:xfrm>
           <a:off x="0" y="0"/>
           <a:ext cx="0" cy="0"/>
@@ -328,7 +1596,7 @@
       </p:grpSpPr>
       <p:sp>
         <p:nvSpPr>
-          <p:cNvPr id="2" name="Title 1"/>
+          <p:cNvPr id="450930762" name="Title 1"/>
           <p:cNvSpPr>
             <a:spLocks noGrp="1"/>
           </p:cNvSpPr>
@@ -336,13 +1604,16 @@
             <p:ph type="title"/>
           </p:nvPr>
         </p:nvSpPr>
-        <p:spPr/>
-        <p:txBody>
-          <a:bodyPr/>
-          <a:lstStyle/>
-          <a:p>
-            <a:r>
-              <a:rPr lang="en-US" smtClean="0"/>
+        <p:spPr bwMode="auto"/>
+        <p:txBody>
+          <a:bodyPr/>
+          <a:lstStyle/>
+          <a:p>
+            <a:pPr>
+              <a:defRPr/>
+            </a:pPr>
+            <a:r>
+              <a:rPr lang="en-US"/>
               <a:t>Click to edit Master title style</a:t>
             </a:r>
             <a:endParaRPr lang="en-US"/>
@@ -351,7 +1622,7 @@
       </p:sp>
       <p:sp>
         <p:nvSpPr>
-          <p:cNvPr id="3" name="Vertical Text Placeholder 2"/>
+          <p:cNvPr id="353407919" name="Vertical Text Placeholder 2"/>
           <p:cNvSpPr>
             <a:spLocks noGrp="1"/>
           </p:cNvSpPr>
@@ -359,42 +1630,56 @@
             <p:ph type="body" orient="vert" idx="1"/>
           </p:nvPr>
         </p:nvSpPr>
-        <p:spPr/>
+        <p:spPr bwMode="auto"/>
         <p:txBody>
           <a:bodyPr vert="eaVert"/>
           <a:lstStyle/>
           <a:p>
-            <a:pPr lvl="0"/>
-            <a:r>
-              <a:rPr lang="en-US" smtClean="0"/>
+            <a:pPr lvl="0">
+              <a:defRPr/>
+            </a:pPr>
+            <a:r>
+              <a:rPr lang="en-US"/>
               <a:t>Edit Master text styles</a:t>
             </a:r>
-          </a:p>
-          <a:p>
-            <a:pPr lvl="1"/>
-            <a:r>
-              <a:rPr lang="en-US" smtClean="0"/>
+            <a:endParaRPr/>
+          </a:p>
+          <a:p>
+            <a:pPr lvl="1">
+              <a:defRPr/>
+            </a:pPr>
+            <a:r>
+              <a:rPr lang="en-US"/>
               <a:t>Second level</a:t>
             </a:r>
-          </a:p>
-          <a:p>
-            <a:pPr lvl="2"/>
-            <a:r>
-              <a:rPr lang="en-US" smtClean="0"/>
+            <a:endParaRPr/>
+          </a:p>
+          <a:p>
+            <a:pPr lvl="2">
+              <a:defRPr/>
+            </a:pPr>
+            <a:r>
+              <a:rPr lang="en-US"/>
               <a:t>Third level</a:t>
             </a:r>
-          </a:p>
-          <a:p>
-            <a:pPr lvl="3"/>
-            <a:r>
-              <a:rPr lang="en-US" smtClean="0"/>
+            <a:endParaRPr/>
+          </a:p>
+          <a:p>
+            <a:pPr lvl="3">
+              <a:defRPr/>
+            </a:pPr>
+            <a:r>
+              <a:rPr lang="en-US"/>
               <a:t>Fourth level</a:t>
             </a:r>
-          </a:p>
-          <a:p>
-            <a:pPr lvl="4"/>
-            <a:r>
-              <a:rPr lang="en-US" smtClean="0"/>
+            <a:endParaRPr/>
+          </a:p>
+          <a:p>
+            <a:pPr lvl="4">
+              <a:defRPr/>
+            </a:pPr>
+            <a:r>
+              <a:rPr lang="en-US"/>
               <a:t>Fifth level</a:t>
             </a:r>
             <a:endParaRPr lang="en-US"/>
@@ -403,7 +1688,7 @@
       </p:sp>
       <p:sp>
         <p:nvSpPr>
-          <p:cNvPr id="4" name="Date Placeholder 3"/>
+          <p:cNvPr id="274480694" name="Date Placeholder 3"/>
           <p:cNvSpPr>
             <a:spLocks noGrp="1"/>
           </p:cNvSpPr>
@@ -411,13 +1696,16 @@
             <p:ph type="dt" sz="half" idx="10"/>
           </p:nvPr>
         </p:nvSpPr>
-        <p:spPr/>
-        <p:txBody>
-          <a:bodyPr/>
-          <a:lstStyle/>
-          <a:p>
+        <p:spPr bwMode="auto"/>
+        <p:txBody>
+          <a:bodyPr/>
+          <a:lstStyle/>
+          <a:p>
+            <a:pPr>
+              <a:defRPr/>
+            </a:pPr>
             <a:fld id="{EDBC742C-A8E5-4E57-BD43-F0B8F462B862}" type="datetimeFigureOut">
-              <a:rPr lang="en-US" smtClean="0"/>
+              <a:rPr lang="en-US"/>
               <a:t>4/1/2026</a:t>
             </a:fld>
             <a:endParaRPr lang="en-US"/>
@@ -426,7 +1714,7 @@
       </p:sp>
       <p:sp>
         <p:nvSpPr>
-          <p:cNvPr id="5" name="Footer Placeholder 4"/>
+          <p:cNvPr id="765382114" name="Footer Placeholder 4"/>
           <p:cNvSpPr>
             <a:spLocks noGrp="1"/>
           </p:cNvSpPr>
@@ -434,18 +1722,21 @@
             <p:ph type="ftr" sz="quarter" idx="11"/>
           </p:nvPr>
         </p:nvSpPr>
-        <p:spPr/>
-        <p:txBody>
-          <a:bodyPr/>
-          <a:lstStyle/>
-          <a:p>
-            <a:endParaRPr lang="en-US"/>
-          </a:p>
-        </p:txBody>
-      </p:sp>
-      <p:sp>
-        <p:nvSpPr>
-          <p:cNvPr id="6" name="Slide Number Placeholder 5"/>
+        <p:spPr bwMode="auto"/>
+        <p:txBody>
+          <a:bodyPr/>
+          <a:lstStyle/>
+          <a:p>
+            <a:pPr>
+              <a:defRPr/>
+            </a:pPr>
+            <a:endParaRPr lang="en-US"/>
+          </a:p>
+        </p:txBody>
+      </p:sp>
+      <p:sp>
+        <p:nvSpPr>
+          <p:cNvPr id="1085515334" name="Slide Number Placeholder 5"/>
           <p:cNvSpPr>
             <a:spLocks noGrp="1"/>
           </p:cNvSpPr>
@@ -453,13 +1744,16 @@
             <p:ph type="sldNum" sz="quarter" idx="12"/>
           </p:nvPr>
         </p:nvSpPr>
-        <p:spPr/>
-        <p:txBody>
-          <a:bodyPr/>
-          <a:lstStyle/>
-          <a:p>
+        <p:spPr bwMode="auto"/>
+        <p:txBody>
+          <a:bodyPr/>
+          <a:lstStyle/>
+          <a:p>
+            <a:pPr>
+              <a:defRPr/>
+            </a:pPr>
             <a:fld id="{FD8C485D-1393-4FBB-854E-BDC6A27E3064}" type="slidenum">
-              <a:rPr lang="en-US" smtClean="0"/>
+              <a:rPr lang="en-US"/>
               <a:t>‹#›</a:t>
             </a:fld>
             <a:endParaRPr lang="en-US"/>
@@ -467,11 +1761,6 @@
         </p:txBody>
       </p:sp>
     </p:spTree>
-    <p:extLst>
-      <p:ext uri="{BB962C8B-B14F-4D97-AF65-F5344CB8AC3E}">
-        <p14:creationId xmlns:p14="http://schemas.microsoft.com/office/powerpoint/2010/main" val="3248884022"/>
-      </p:ext>
-    </p:extLst>
   </p:cSld>
   <p:clrMapOvr>
     <a:masterClrMapping/>
@@ -480,7 +1769,7 @@
 </file>
 
 <file path=ppt/slideLayouts/slideLayout11.xml><?xml version="1.0" encoding="utf-8"?>
-<p:sldLayout xmlns:a="http://schemas.openxmlformats.org/drawingml/2006/main" xmlns:r="http://schemas.openxmlformats.org/officeDocument/2006/relationships" xmlns:p="http://schemas.openxmlformats.org/presentationml/2006/main" type="vertTitleAndTx" preserve="1">
+<p:sldLayout xmlns:a="http://schemas.openxmlformats.org/drawingml/2006/main" xmlns:r="http://schemas.openxmlformats.org/officeDocument/2006/relationships" xmlns:p="http://schemas.openxmlformats.org/presentationml/2006/main" xmlns:m="http://schemas.openxmlformats.org/officeDocument/2006/math" xmlns:w="http://schemas.openxmlformats.org/wordprocessingml/2006/main" matchingName="" preserve="1" showMasterPhAnim="0" showMasterSp="1" type="vertTitleAndTx" userDrawn="1">
   <p:cSld name="Vertical Title and Text">
     <p:spTree>
       <p:nvGrpSpPr>
@@ -488,7 +1777,7 @@
         <p:cNvGrpSpPr/>
         <p:nvPr/>
       </p:nvGrpSpPr>
-      <p:grpSpPr>
+      <p:grpSpPr bwMode="auto">
         <a:xfrm>
           <a:off x="0" y="0"/>
           <a:ext cx="0" cy="0"/>
@@ -498,7 +1787,7 @@
       </p:grpSpPr>
       <p:sp>
         <p:nvSpPr>
-          <p:cNvPr id="2" name="Vertical Title 1"/>
+          <p:cNvPr id="1935920182" name="Vertical Title 1"/>
           <p:cNvSpPr>
             <a:spLocks noGrp="1"/>
           </p:cNvSpPr>
@@ -506,7 +1795,7 @@
             <p:ph type="title" orient="vert"/>
           </p:nvPr>
         </p:nvSpPr>
-        <p:spPr>
+        <p:spPr bwMode="auto">
           <a:xfrm>
             <a:off x="8724900" y="365125"/>
             <a:ext cx="2628900" cy="5811838"/>
@@ -516,8 +1805,11 @@
           <a:bodyPr vert="eaVert"/>
           <a:lstStyle/>
           <a:p>
-            <a:r>
-              <a:rPr lang="en-US" smtClean="0"/>
+            <a:pPr>
+              <a:defRPr/>
+            </a:pPr>
+            <a:r>
+              <a:rPr lang="en-US"/>
               <a:t>Click to edit Master title style</a:t>
             </a:r>
             <a:endParaRPr lang="en-US"/>
@@ -526,7 +1818,7 @@
       </p:sp>
       <p:sp>
         <p:nvSpPr>
-          <p:cNvPr id="3" name="Vertical Text Placeholder 2"/>
+          <p:cNvPr id="876420167" name="Vertical Text Placeholder 2"/>
           <p:cNvSpPr>
             <a:spLocks noGrp="1"/>
           </p:cNvSpPr>
@@ -534,7 +1826,7 @@
             <p:ph type="body" orient="vert" idx="1"/>
           </p:nvPr>
         </p:nvSpPr>
-        <p:spPr>
+        <p:spPr bwMode="auto">
           <a:xfrm>
             <a:off x="838200" y="365125"/>
             <a:ext cx="7734300" cy="5811838"/>
@@ -544,37 +1836,51 @@
           <a:bodyPr vert="eaVert"/>
           <a:lstStyle/>
           <a:p>
-            <a:pPr lvl="0"/>
-            <a:r>
-              <a:rPr lang="en-US" smtClean="0"/>
+            <a:pPr lvl="0">
+              <a:defRPr/>
+            </a:pPr>
+            <a:r>
+              <a:rPr lang="en-US"/>
               <a:t>Edit Master text styles</a:t>
             </a:r>
-          </a:p>
-          <a:p>
-            <a:pPr lvl="1"/>
-            <a:r>
-              <a:rPr lang="en-US" smtClean="0"/>
+            <a:endParaRPr/>
+          </a:p>
+          <a:p>
+            <a:pPr lvl="1">
+              <a:defRPr/>
+            </a:pPr>
+            <a:r>
+              <a:rPr lang="en-US"/>
               <a:t>Second level</a:t>
             </a:r>
-          </a:p>
-          <a:p>
-            <a:pPr lvl="2"/>
-            <a:r>
-              <a:rPr lang="en-US" smtClean="0"/>
+            <a:endParaRPr/>
+          </a:p>
+          <a:p>
+            <a:pPr lvl="2">
+              <a:defRPr/>
+            </a:pPr>
+            <a:r>
+              <a:rPr lang="en-US"/>
               <a:t>Third level</a:t>
             </a:r>
-          </a:p>
-          <a:p>
-            <a:pPr lvl="3"/>
-            <a:r>
-              <a:rPr lang="en-US" smtClean="0"/>
+            <a:endParaRPr/>
+          </a:p>
+          <a:p>
+            <a:pPr lvl="3">
+              <a:defRPr/>
+            </a:pPr>
+            <a:r>
+              <a:rPr lang="en-US"/>
               <a:t>Fourth level</a:t>
             </a:r>
-          </a:p>
-          <a:p>
-            <a:pPr lvl="4"/>
-            <a:r>
-              <a:rPr lang="en-US" smtClean="0"/>
+            <a:endParaRPr/>
+          </a:p>
+          <a:p>
+            <a:pPr lvl="4">
+              <a:defRPr/>
+            </a:pPr>
+            <a:r>
+              <a:rPr lang="en-US"/>
               <a:t>Fifth level</a:t>
             </a:r>
             <a:endParaRPr lang="en-US"/>
@@ -583,7 +1889,7 @@
       </p:sp>
       <p:sp>
         <p:nvSpPr>
-          <p:cNvPr id="4" name="Date Placeholder 3"/>
+          <p:cNvPr id="1822163649" name="Date Placeholder 3"/>
           <p:cNvSpPr>
             <a:spLocks noGrp="1"/>
           </p:cNvSpPr>
@@ -591,13 +1897,16 @@
             <p:ph type="dt" sz="half" idx="10"/>
           </p:nvPr>
         </p:nvSpPr>
-        <p:spPr/>
-        <p:txBody>
-          <a:bodyPr/>
-          <a:lstStyle/>
-          <a:p>
+        <p:spPr bwMode="auto"/>
+        <p:txBody>
+          <a:bodyPr/>
+          <a:lstStyle/>
+          <a:p>
+            <a:pPr>
+              <a:defRPr/>
+            </a:pPr>
             <a:fld id="{EDBC742C-A8E5-4E57-BD43-F0B8F462B862}" type="datetimeFigureOut">
-              <a:rPr lang="en-US" smtClean="0"/>
+              <a:rPr lang="en-US"/>
               <a:t>4/1/2026</a:t>
             </a:fld>
             <a:endParaRPr lang="en-US"/>
@@ -606,7 +1915,7 @@
       </p:sp>
       <p:sp>
         <p:nvSpPr>
-          <p:cNvPr id="5" name="Footer Placeholder 4"/>
+          <p:cNvPr id="1140603659" name="Footer Placeholder 4"/>
           <p:cNvSpPr>
             <a:spLocks noGrp="1"/>
           </p:cNvSpPr>
@@ -614,18 +1923,21 @@
             <p:ph type="ftr" sz="quarter" idx="11"/>
           </p:nvPr>
         </p:nvSpPr>
-        <p:spPr/>
-        <p:txBody>
-          <a:bodyPr/>
-          <a:lstStyle/>
-          <a:p>
-            <a:endParaRPr lang="en-US"/>
-          </a:p>
-        </p:txBody>
-      </p:sp>
-      <p:sp>
-        <p:nvSpPr>
-          <p:cNvPr id="6" name="Slide Number Placeholder 5"/>
+        <p:spPr bwMode="auto"/>
+        <p:txBody>
+          <a:bodyPr/>
+          <a:lstStyle/>
+          <a:p>
+            <a:pPr>
+              <a:defRPr/>
+            </a:pPr>
+            <a:endParaRPr lang="en-US"/>
+          </a:p>
+        </p:txBody>
+      </p:sp>
+      <p:sp>
+        <p:nvSpPr>
+          <p:cNvPr id="1652474144" name="Slide Number Placeholder 5"/>
           <p:cNvSpPr>
             <a:spLocks noGrp="1"/>
           </p:cNvSpPr>
@@ -633,13 +1945,16 @@
             <p:ph type="sldNum" sz="quarter" idx="12"/>
           </p:nvPr>
         </p:nvSpPr>
-        <p:spPr/>
-        <p:txBody>
-          <a:bodyPr/>
-          <a:lstStyle/>
-          <a:p>
+        <p:spPr bwMode="auto"/>
+        <p:txBody>
+          <a:bodyPr/>
+          <a:lstStyle/>
+          <a:p>
+            <a:pPr>
+              <a:defRPr/>
+            </a:pPr>
             <a:fld id="{FD8C485D-1393-4FBB-854E-BDC6A27E3064}" type="slidenum">
-              <a:rPr lang="en-US" smtClean="0"/>
+              <a:rPr lang="en-US"/>
               <a:t>‹#›</a:t>
             </a:fld>
             <a:endParaRPr lang="en-US"/>
@@ -647,11 +1962,6 @@
         </p:txBody>
       </p:sp>
     </p:spTree>
-    <p:extLst>
-      <p:ext uri="{BB962C8B-B14F-4D97-AF65-F5344CB8AC3E}">
-        <p14:creationId xmlns:p14="http://schemas.microsoft.com/office/powerpoint/2010/main" val="1587243103"/>
-      </p:ext>
-    </p:extLst>
   </p:cSld>
   <p:clrMapOvr>
     <a:masterClrMapping/>
@@ -660,7 +1970,7 @@
 </file>
 
 <file path=ppt/slideLayouts/slideLayout2.xml><?xml version="1.0" encoding="utf-8"?>
-<p:sldLayout xmlns:a="http://schemas.openxmlformats.org/drawingml/2006/main" xmlns:r="http://schemas.openxmlformats.org/officeDocument/2006/relationships" xmlns:p="http://schemas.openxmlformats.org/presentationml/2006/main" type="obj" preserve="1">
+<p:sldLayout xmlns:a="http://schemas.openxmlformats.org/drawingml/2006/main" xmlns:r="http://schemas.openxmlformats.org/officeDocument/2006/relationships" xmlns:p="http://schemas.openxmlformats.org/presentationml/2006/main" xmlns:m="http://schemas.openxmlformats.org/officeDocument/2006/math" xmlns:w="http://schemas.openxmlformats.org/wordprocessingml/2006/main" matchingName="" preserve="1" showMasterPhAnim="0" showMasterSp="1" type="obj" userDrawn="1">
   <p:cSld name="Title and Content">
     <p:spTree>
       <p:nvGrpSpPr>
@@ -668,7 +1978,7 @@
         <p:cNvGrpSpPr/>
         <p:nvPr/>
       </p:nvGrpSpPr>
-      <p:grpSpPr>
+      <p:grpSpPr bwMode="auto">
         <a:xfrm>
           <a:off x="0" y="0"/>
           <a:ext cx="0" cy="0"/>
@@ -678,7 +1988,7 @@
       </p:grpSpPr>
       <p:sp>
         <p:nvSpPr>
-          <p:cNvPr id="2" name="Title 1"/>
+          <p:cNvPr id="2011744376" name="Title 1"/>
           <p:cNvSpPr>
             <a:spLocks noGrp="1"/>
           </p:cNvSpPr>
@@ -686,13 +1996,16 @@
             <p:ph type="title"/>
           </p:nvPr>
         </p:nvSpPr>
-        <p:spPr/>
-        <p:txBody>
-          <a:bodyPr/>
-          <a:lstStyle/>
-          <a:p>
-            <a:r>
-              <a:rPr lang="en-US" smtClean="0"/>
+        <p:spPr bwMode="auto"/>
+        <p:txBody>
+          <a:bodyPr/>
+          <a:lstStyle/>
+          <a:p>
+            <a:pPr>
+              <a:defRPr/>
+            </a:pPr>
+            <a:r>
+              <a:rPr lang="en-US"/>
               <a:t>Click to edit Master title style</a:t>
             </a:r>
             <a:endParaRPr lang="en-US"/>
@@ -701,7 +2014,7 @@
       </p:sp>
       <p:sp>
         <p:nvSpPr>
-          <p:cNvPr id="3" name="Content Placeholder 2"/>
+          <p:cNvPr id="1174097145" name="Content Placeholder 2"/>
           <p:cNvSpPr>
             <a:spLocks noGrp="1"/>
           </p:cNvSpPr>
@@ -709,42 +2022,56 @@
             <p:ph idx="1"/>
           </p:nvPr>
         </p:nvSpPr>
-        <p:spPr/>
-        <p:txBody>
-          <a:bodyPr/>
-          <a:lstStyle/>
-          <a:p>
-            <a:pPr lvl="0"/>
-            <a:r>
-              <a:rPr lang="en-US" smtClean="0"/>
+        <p:spPr bwMode="auto"/>
+        <p:txBody>
+          <a:bodyPr/>
+          <a:lstStyle/>
+          <a:p>
+            <a:pPr lvl="0">
+              <a:defRPr/>
+            </a:pPr>
+            <a:r>
+              <a:rPr lang="en-US"/>
               <a:t>Edit Master text styles</a:t>
             </a:r>
-          </a:p>
-          <a:p>
-            <a:pPr lvl="1"/>
-            <a:r>
-              <a:rPr lang="en-US" smtClean="0"/>
+            <a:endParaRPr/>
+          </a:p>
+          <a:p>
+            <a:pPr lvl="1">
+              <a:defRPr/>
+            </a:pPr>
+            <a:r>
+              <a:rPr lang="en-US"/>
               <a:t>Second level</a:t>
             </a:r>
-          </a:p>
-          <a:p>
-            <a:pPr lvl="2"/>
-            <a:r>
-              <a:rPr lang="en-US" smtClean="0"/>
+            <a:endParaRPr/>
+          </a:p>
+          <a:p>
+            <a:pPr lvl="2">
+              <a:defRPr/>
+            </a:pPr>
+            <a:r>
+              <a:rPr lang="en-US"/>
               <a:t>Third level</a:t>
             </a:r>
-          </a:p>
-          <a:p>
-            <a:pPr lvl="3"/>
-            <a:r>
-              <a:rPr lang="en-US" smtClean="0"/>
+            <a:endParaRPr/>
+          </a:p>
+          <a:p>
+            <a:pPr lvl="3">
+              <a:defRPr/>
+            </a:pPr>
+            <a:r>
+              <a:rPr lang="en-US"/>
               <a:t>Fourth level</a:t>
             </a:r>
-          </a:p>
-          <a:p>
-            <a:pPr lvl="4"/>
-            <a:r>
-              <a:rPr lang="en-US" smtClean="0"/>
+            <a:endParaRPr/>
+          </a:p>
+          <a:p>
+            <a:pPr lvl="4">
+              <a:defRPr/>
+            </a:pPr>
+            <a:r>
+              <a:rPr lang="en-US"/>
               <a:t>Fifth level</a:t>
             </a:r>
             <a:endParaRPr lang="en-US"/>
@@ -753,7 +2080,7 @@
       </p:sp>
       <p:sp>
         <p:nvSpPr>
-          <p:cNvPr id="4" name="Date Placeholder 3"/>
+          <p:cNvPr id="1520635747" name="Date Placeholder 3"/>
           <p:cNvSpPr>
             <a:spLocks noGrp="1"/>
           </p:cNvSpPr>
@@ -761,13 +2088,16 @@
             <p:ph type="dt" sz="half" idx="10"/>
           </p:nvPr>
         </p:nvSpPr>
-        <p:spPr/>
-        <p:txBody>
-          <a:bodyPr/>
-          <a:lstStyle/>
-          <a:p>
+        <p:spPr bwMode="auto"/>
+        <p:txBody>
+          <a:bodyPr/>
+          <a:lstStyle/>
+          <a:p>
+            <a:pPr>
+              <a:defRPr/>
+            </a:pPr>
             <a:fld id="{EDBC742C-A8E5-4E57-BD43-F0B8F462B862}" type="datetimeFigureOut">
-              <a:rPr lang="en-US" smtClean="0"/>
+              <a:rPr lang="en-US"/>
               <a:t>4/1/2026</a:t>
             </a:fld>
             <a:endParaRPr lang="en-US"/>
@@ -776,7 +2106,7 @@
       </p:sp>
       <p:sp>
         <p:nvSpPr>
-          <p:cNvPr id="5" name="Footer Placeholder 4"/>
+          <p:cNvPr id="1128284917" name="Footer Placeholder 4"/>
           <p:cNvSpPr>
             <a:spLocks noGrp="1"/>
           </p:cNvSpPr>
@@ -784,18 +2114,21 @@
             <p:ph type="ftr" sz="quarter" idx="11"/>
           </p:nvPr>
         </p:nvSpPr>
-        <p:spPr/>
-        <p:txBody>
-          <a:bodyPr/>
-          <a:lstStyle/>
-          <a:p>
-            <a:endParaRPr lang="en-US"/>
-          </a:p>
-        </p:txBody>
-      </p:sp>
-      <p:sp>
-        <p:nvSpPr>
-          <p:cNvPr id="6" name="Slide Number Placeholder 5"/>
+        <p:spPr bwMode="auto"/>
+        <p:txBody>
+          <a:bodyPr/>
+          <a:lstStyle/>
+          <a:p>
+            <a:pPr>
+              <a:defRPr/>
+            </a:pPr>
+            <a:endParaRPr lang="en-US"/>
+          </a:p>
+        </p:txBody>
+      </p:sp>
+      <p:sp>
+        <p:nvSpPr>
+          <p:cNvPr id="188458803" name="Slide Number Placeholder 5"/>
           <p:cNvSpPr>
             <a:spLocks noGrp="1"/>
           </p:cNvSpPr>
@@ -803,13 +2136,16 @@
             <p:ph type="sldNum" sz="quarter" idx="12"/>
           </p:nvPr>
         </p:nvSpPr>
-        <p:spPr/>
-        <p:txBody>
-          <a:bodyPr/>
-          <a:lstStyle/>
-          <a:p>
+        <p:spPr bwMode="auto"/>
+        <p:txBody>
+          <a:bodyPr/>
+          <a:lstStyle/>
+          <a:p>
+            <a:pPr>
+              <a:defRPr/>
+            </a:pPr>
             <a:fld id="{FD8C485D-1393-4FBB-854E-BDC6A27E3064}" type="slidenum">
-              <a:rPr lang="en-US" smtClean="0"/>
+              <a:rPr lang="en-US"/>
               <a:t>‹#›</a:t>
             </a:fld>
             <a:endParaRPr lang="en-US"/>
@@ -817,11 +2153,6 @@
         </p:txBody>
       </p:sp>
     </p:spTree>
-    <p:extLst>
-      <p:ext uri="{BB962C8B-B14F-4D97-AF65-F5344CB8AC3E}">
-        <p14:creationId xmlns:p14="http://schemas.microsoft.com/office/powerpoint/2010/main" val="3409692575"/>
-      </p:ext>
-    </p:extLst>
   </p:cSld>
   <p:clrMapOvr>
     <a:masterClrMapping/>
@@ -830,7 +2161,7 @@
 </file>
 
 <file path=ppt/slideLayouts/slideLayout3.xml><?xml version="1.0" encoding="utf-8"?>
-<p:sldLayout xmlns:a="http://schemas.openxmlformats.org/drawingml/2006/main" xmlns:r="http://schemas.openxmlformats.org/officeDocument/2006/relationships" xmlns:p="http://schemas.openxmlformats.org/presentationml/2006/main" type="secHead" preserve="1">
+<p:sldLayout xmlns:a="http://schemas.openxmlformats.org/drawingml/2006/main" xmlns:r="http://schemas.openxmlformats.org/officeDocument/2006/relationships" xmlns:p="http://schemas.openxmlformats.org/presentationml/2006/main" xmlns:m="http://schemas.openxmlformats.org/officeDocument/2006/math" xmlns:w="http://schemas.openxmlformats.org/wordprocessingml/2006/main" matchingName="" preserve="1" showMasterPhAnim="0" showMasterSp="1" type="secHead" userDrawn="1">
   <p:cSld name="Section Header">
     <p:spTree>
       <p:nvGrpSpPr>
@@ -838,7 +2169,7 @@
         <p:cNvGrpSpPr/>
         <p:nvPr/>
       </p:nvGrpSpPr>
-      <p:grpSpPr>
+      <p:grpSpPr bwMode="auto">
         <a:xfrm>
           <a:off x="0" y="0"/>
           <a:ext cx="0" cy="0"/>
@@ -848,7 +2179,7 @@
       </p:grpSpPr>
       <p:sp>
         <p:nvSpPr>
-          <p:cNvPr id="2" name="Title 1"/>
+          <p:cNvPr id="934054078" name="Title 1"/>
           <p:cNvSpPr>
             <a:spLocks noGrp="1"/>
           </p:cNvSpPr>
@@ -856,7 +2187,7 @@
             <p:ph type="title"/>
           </p:nvPr>
         </p:nvSpPr>
-        <p:spPr>
+        <p:spPr bwMode="auto">
           <a:xfrm>
             <a:off x="831850" y="1709738"/>
             <a:ext cx="10515600" cy="2852737"/>
@@ -870,8 +2201,11 @@
             </a:lvl1pPr>
           </a:lstStyle>
           <a:p>
-            <a:r>
-              <a:rPr lang="en-US" smtClean="0"/>
+            <a:pPr>
+              <a:defRPr/>
+            </a:pPr>
+            <a:r>
+              <a:rPr lang="en-US"/>
               <a:t>Click to edit Master title style</a:t>
             </a:r>
             <a:endParaRPr lang="en-US"/>
@@ -880,7 +2214,7 @@
       </p:sp>
       <p:sp>
         <p:nvSpPr>
-          <p:cNvPr id="3" name="Text Placeholder 2"/>
+          <p:cNvPr id="1900997538" name="Text Placeholder 2"/>
           <p:cNvSpPr>
             <a:spLocks noGrp="1"/>
           </p:cNvSpPr>
@@ -888,7 +2222,7 @@
             <p:ph type="body" idx="1"/>
           </p:nvPr>
         </p:nvSpPr>
-        <p:spPr>
+        <p:spPr bwMode="auto">
           <a:xfrm>
             <a:off x="831850" y="4589463"/>
             <a:ext cx="10515600" cy="1500187"/>
@@ -989,17 +2323,20 @@
             </a:lvl9pPr>
           </a:lstStyle>
           <a:p>
-            <a:pPr lvl="0"/>
-            <a:r>
-              <a:rPr lang="en-US" smtClean="0"/>
+            <a:pPr lvl="0">
+              <a:defRPr/>
+            </a:pPr>
+            <a:r>
+              <a:rPr lang="en-US"/>
               <a:t>Edit Master text styles</a:t>
             </a:r>
-          </a:p>
-        </p:txBody>
-      </p:sp>
-      <p:sp>
-        <p:nvSpPr>
-          <p:cNvPr id="4" name="Date Placeholder 3"/>
+            <a:endParaRPr/>
+          </a:p>
+        </p:txBody>
+      </p:sp>
+      <p:sp>
+        <p:nvSpPr>
+          <p:cNvPr id="1902818808" name="Date Placeholder 3"/>
           <p:cNvSpPr>
             <a:spLocks noGrp="1"/>
           </p:cNvSpPr>
@@ -1007,13 +2344,16 @@
             <p:ph type="dt" sz="half" idx="10"/>
           </p:nvPr>
         </p:nvSpPr>
-        <p:spPr/>
-        <p:txBody>
-          <a:bodyPr/>
-          <a:lstStyle/>
-          <a:p>
+        <p:spPr bwMode="auto"/>
+        <p:txBody>
+          <a:bodyPr/>
+          <a:lstStyle/>
+          <a:p>
+            <a:pPr>
+              <a:defRPr/>
+            </a:pPr>
             <a:fld id="{EDBC742C-A8E5-4E57-BD43-F0B8F462B862}" type="datetimeFigureOut">
-              <a:rPr lang="en-US" smtClean="0"/>
+              <a:rPr lang="en-US"/>
               <a:t>4/1/2026</a:t>
             </a:fld>
             <a:endParaRPr lang="en-US"/>
@@ -1022,7 +2362,7 @@
       </p:sp>
       <p:sp>
         <p:nvSpPr>
-          <p:cNvPr id="5" name="Footer Placeholder 4"/>
+          <p:cNvPr id="1217265965" name="Footer Placeholder 4"/>
           <p:cNvSpPr>
             <a:spLocks noGrp="1"/>
           </p:cNvSpPr>
@@ -1030,18 +2370,21 @@
             <p:ph type="ftr" sz="quarter" idx="11"/>
           </p:nvPr>
         </p:nvSpPr>
-        <p:spPr/>
-        <p:txBody>
-          <a:bodyPr/>
-          <a:lstStyle/>
-          <a:p>
-            <a:endParaRPr lang="en-US"/>
-          </a:p>
-        </p:txBody>
-      </p:sp>
-      <p:sp>
-        <p:nvSpPr>
-          <p:cNvPr id="6" name="Slide Number Placeholder 5"/>
+        <p:spPr bwMode="auto"/>
+        <p:txBody>
+          <a:bodyPr/>
+          <a:lstStyle/>
+          <a:p>
+            <a:pPr>
+              <a:defRPr/>
+            </a:pPr>
+            <a:endParaRPr lang="en-US"/>
+          </a:p>
+        </p:txBody>
+      </p:sp>
+      <p:sp>
+        <p:nvSpPr>
+          <p:cNvPr id="1725778035" name="Slide Number Placeholder 5"/>
           <p:cNvSpPr>
             <a:spLocks noGrp="1"/>
           </p:cNvSpPr>
@@ -1049,13 +2392,16 @@
             <p:ph type="sldNum" sz="quarter" idx="12"/>
           </p:nvPr>
         </p:nvSpPr>
-        <p:spPr/>
-        <p:txBody>
-          <a:bodyPr/>
-          <a:lstStyle/>
-          <a:p>
+        <p:spPr bwMode="auto"/>
+        <p:txBody>
+          <a:bodyPr/>
+          <a:lstStyle/>
+          <a:p>
+            <a:pPr>
+              <a:defRPr/>
+            </a:pPr>
             <a:fld id="{FD8C485D-1393-4FBB-854E-BDC6A27E3064}" type="slidenum">
-              <a:rPr lang="en-US" smtClean="0"/>
+              <a:rPr lang="en-US"/>
               <a:t>‹#›</a:t>
             </a:fld>
             <a:endParaRPr lang="en-US"/>
@@ -1063,11 +2409,6 @@
         </p:txBody>
       </p:sp>
     </p:spTree>
-    <p:extLst>
-      <p:ext uri="{BB962C8B-B14F-4D97-AF65-F5344CB8AC3E}">
-        <p14:creationId xmlns:p14="http://schemas.microsoft.com/office/powerpoint/2010/main" val="33427637"/>
-      </p:ext>
-    </p:extLst>
   </p:cSld>
   <p:clrMapOvr>
     <a:masterClrMapping/>
@@ -1076,7 +2417,7 @@
 </file>
 
 <file path=ppt/slideLayouts/slideLayout4.xml><?xml version="1.0" encoding="utf-8"?>
-<p:sldLayout xmlns:a="http://schemas.openxmlformats.org/drawingml/2006/main" xmlns:r="http://schemas.openxmlformats.org/officeDocument/2006/relationships" xmlns:p="http://schemas.openxmlformats.org/presentationml/2006/main" type="twoObj" preserve="1">
+<p:sldLayout xmlns:a="http://schemas.openxmlformats.org/drawingml/2006/main" xmlns:r="http://schemas.openxmlformats.org/officeDocument/2006/relationships" xmlns:p="http://schemas.openxmlformats.org/presentationml/2006/main" xmlns:m="http://schemas.openxmlformats.org/officeDocument/2006/math" xmlns:w="http://schemas.openxmlformats.org/wordprocessingml/2006/main" matchingName="" preserve="1" showMasterPhAnim="0" showMasterSp="1" type="twoObj" userDrawn="1">
   <p:cSld name="Two Content">
     <p:spTree>
       <p:nvGrpSpPr>
@@ -1084,7 +2425,7 @@
         <p:cNvGrpSpPr/>
         <p:nvPr/>
       </p:nvGrpSpPr>
-      <p:grpSpPr>
+      <p:grpSpPr bwMode="auto">
         <a:xfrm>
           <a:off x="0" y="0"/>
           <a:ext cx="0" cy="0"/>
@@ -1094,7 +2435,7 @@
       </p:grpSpPr>
       <p:sp>
         <p:nvSpPr>
-          <p:cNvPr id="2" name="Title 1"/>
+          <p:cNvPr id="878999230" name="Title 1"/>
           <p:cNvSpPr>
             <a:spLocks noGrp="1"/>
           </p:cNvSpPr>
@@ -1102,13 +2443,16 @@
             <p:ph type="title"/>
           </p:nvPr>
         </p:nvSpPr>
-        <p:spPr/>
-        <p:txBody>
-          <a:bodyPr/>
-          <a:lstStyle/>
-          <a:p>
-            <a:r>
-              <a:rPr lang="en-US" smtClean="0"/>
+        <p:spPr bwMode="auto"/>
+        <p:txBody>
+          <a:bodyPr/>
+          <a:lstStyle/>
+          <a:p>
+            <a:pPr>
+              <a:defRPr/>
+            </a:pPr>
+            <a:r>
+              <a:rPr lang="en-US"/>
               <a:t>Click to edit Master title style</a:t>
             </a:r>
             <a:endParaRPr lang="en-US"/>
@@ -1117,7 +2461,7 @@
       </p:sp>
       <p:sp>
         <p:nvSpPr>
-          <p:cNvPr id="3" name="Content Placeholder 2"/>
+          <p:cNvPr id="1459915382" name="Content Placeholder 2"/>
           <p:cNvSpPr>
             <a:spLocks noGrp="1"/>
           </p:cNvSpPr>
@@ -1125,7 +2469,7 @@
             <p:ph sz="half" idx="1"/>
           </p:nvPr>
         </p:nvSpPr>
-        <p:spPr>
+        <p:spPr bwMode="auto">
           <a:xfrm>
             <a:off x="838200" y="1825625"/>
             <a:ext cx="5181600" cy="4351338"/>
@@ -1135,37 +2479,51 @@
           <a:bodyPr/>
           <a:lstStyle/>
           <a:p>
-            <a:pPr lvl="0"/>
-            <a:r>
-              <a:rPr lang="en-US" smtClean="0"/>
+            <a:pPr lvl="0">
+              <a:defRPr/>
+            </a:pPr>
+            <a:r>
+              <a:rPr lang="en-US"/>
               <a:t>Edit Master text styles</a:t>
             </a:r>
-          </a:p>
-          <a:p>
-            <a:pPr lvl="1"/>
-            <a:r>
-              <a:rPr lang="en-US" smtClean="0"/>
+            <a:endParaRPr/>
+          </a:p>
+          <a:p>
+            <a:pPr lvl="1">
+              <a:defRPr/>
+            </a:pPr>
+            <a:r>
+              <a:rPr lang="en-US"/>
               <a:t>Second level</a:t>
             </a:r>
-          </a:p>
-          <a:p>
-            <a:pPr lvl="2"/>
-            <a:r>
-              <a:rPr lang="en-US" smtClean="0"/>
+            <a:endParaRPr/>
+          </a:p>
+          <a:p>
+            <a:pPr lvl="2">
+              <a:defRPr/>
+            </a:pPr>
+            <a:r>
+              <a:rPr lang="en-US"/>
               <a:t>Third level</a:t>
             </a:r>
-          </a:p>
-          <a:p>
-            <a:pPr lvl="3"/>
-            <a:r>
-              <a:rPr lang="en-US" smtClean="0"/>
+            <a:endParaRPr/>
+          </a:p>
+          <a:p>
+            <a:pPr lvl="3">
+              <a:defRPr/>
+            </a:pPr>
+            <a:r>
+              <a:rPr lang="en-US"/>
               <a:t>Fourth level</a:t>
             </a:r>
-          </a:p>
-          <a:p>
-            <a:pPr lvl="4"/>
-            <a:r>
-              <a:rPr lang="en-US" smtClean="0"/>
+            <a:endParaRPr/>
+          </a:p>
+          <a:p>
+            <a:pPr lvl="4">
+              <a:defRPr/>
+            </a:pPr>
+            <a:r>
+              <a:rPr lang="en-US"/>
               <a:t>Fifth level</a:t>
             </a:r>
             <a:endParaRPr lang="en-US"/>
@@ -1174,7 +2532,7 @@
       </p:sp>
       <p:sp>
         <p:nvSpPr>
-          <p:cNvPr id="4" name="Content Placeholder 3"/>
+          <p:cNvPr id="1219617859" name="Content Placeholder 3"/>
           <p:cNvSpPr>
             <a:spLocks noGrp="1"/>
           </p:cNvSpPr>
@@ -1182,7 +2540,7 @@
             <p:ph sz="half" idx="2"/>
           </p:nvPr>
         </p:nvSpPr>
-        <p:spPr>
+        <p:spPr bwMode="auto">
           <a:xfrm>
             <a:off x="6172200" y="1825625"/>
             <a:ext cx="5181600" cy="4351338"/>
@@ -1192,37 +2550,51 @@
           <a:bodyPr/>
           <a:lstStyle/>
           <a:p>
-            <a:pPr lvl="0"/>
-            <a:r>
-              <a:rPr lang="en-US" smtClean="0"/>
+            <a:pPr lvl="0">
+              <a:defRPr/>
+            </a:pPr>
+            <a:r>
+              <a:rPr lang="en-US"/>
               <a:t>Edit Master text styles</a:t>
             </a:r>
-          </a:p>
-          <a:p>
-            <a:pPr lvl="1"/>
-            <a:r>
-              <a:rPr lang="en-US" smtClean="0"/>
+            <a:endParaRPr/>
+          </a:p>
+          <a:p>
+            <a:pPr lvl="1">
+              <a:defRPr/>
+            </a:pPr>
+            <a:r>
+              <a:rPr lang="en-US"/>
               <a:t>Second level</a:t>
             </a:r>
-          </a:p>
-          <a:p>
-            <a:pPr lvl="2"/>
-            <a:r>
-              <a:rPr lang="en-US" smtClean="0"/>
+            <a:endParaRPr/>
+          </a:p>
+          <a:p>
+            <a:pPr lvl="2">
+              <a:defRPr/>
+            </a:pPr>
+            <a:r>
+              <a:rPr lang="en-US"/>
               <a:t>Third level</a:t>
             </a:r>
-          </a:p>
-          <a:p>
-            <a:pPr lvl="3"/>
-            <a:r>
-              <a:rPr lang="en-US" smtClean="0"/>
+            <a:endParaRPr/>
+          </a:p>
+          <a:p>
+            <a:pPr lvl="3">
+              <a:defRPr/>
+            </a:pPr>
+            <a:r>
+              <a:rPr lang="en-US"/>
               <a:t>Fourth level</a:t>
             </a:r>
-          </a:p>
-          <a:p>
-            <a:pPr lvl="4"/>
-            <a:r>
-              <a:rPr lang="en-US" smtClean="0"/>
+            <a:endParaRPr/>
+          </a:p>
+          <a:p>
+            <a:pPr lvl="4">
+              <a:defRPr/>
+            </a:pPr>
+            <a:r>
+              <a:rPr lang="en-US"/>
               <a:t>Fifth level</a:t>
             </a:r>
             <a:endParaRPr lang="en-US"/>
@@ -1231,7 +2603,7 @@
       </p:sp>
       <p:sp>
         <p:nvSpPr>
-          <p:cNvPr id="5" name="Date Placeholder 4"/>
+          <p:cNvPr id="452390182" name="Date Placeholder 4"/>
           <p:cNvSpPr>
             <a:spLocks noGrp="1"/>
           </p:cNvSpPr>
@@ -1239,13 +2611,16 @@
             <p:ph type="dt" sz="half" idx="10"/>
           </p:nvPr>
         </p:nvSpPr>
-        <p:spPr/>
-        <p:txBody>
-          <a:bodyPr/>
-          <a:lstStyle/>
-          <a:p>
+        <p:spPr bwMode="auto"/>
+        <p:txBody>
+          <a:bodyPr/>
+          <a:lstStyle/>
+          <a:p>
+            <a:pPr>
+              <a:defRPr/>
+            </a:pPr>
             <a:fld id="{EDBC742C-A8E5-4E57-BD43-F0B8F462B862}" type="datetimeFigureOut">
-              <a:rPr lang="en-US" smtClean="0"/>
+              <a:rPr lang="en-US"/>
               <a:t>4/1/2026</a:t>
             </a:fld>
             <a:endParaRPr lang="en-US"/>
@@ -1254,7 +2629,7 @@
       </p:sp>
       <p:sp>
         <p:nvSpPr>
-          <p:cNvPr id="6" name="Footer Placeholder 5"/>
+          <p:cNvPr id="1046221878" name="Footer Placeholder 5"/>
           <p:cNvSpPr>
             <a:spLocks noGrp="1"/>
           </p:cNvSpPr>
@@ -1262,18 +2637,21 @@
             <p:ph type="ftr" sz="quarter" idx="11"/>
           </p:nvPr>
         </p:nvSpPr>
-        <p:spPr/>
-        <p:txBody>
-          <a:bodyPr/>
-          <a:lstStyle/>
-          <a:p>
-            <a:endParaRPr lang="en-US"/>
-          </a:p>
-        </p:txBody>
-      </p:sp>
-      <p:sp>
-        <p:nvSpPr>
-          <p:cNvPr id="7" name="Slide Number Placeholder 6"/>
+        <p:spPr bwMode="auto"/>
+        <p:txBody>
+          <a:bodyPr/>
+          <a:lstStyle/>
+          <a:p>
+            <a:pPr>
+              <a:defRPr/>
+            </a:pPr>
+            <a:endParaRPr lang="en-US"/>
+          </a:p>
+        </p:txBody>
+      </p:sp>
+      <p:sp>
+        <p:nvSpPr>
+          <p:cNvPr id="1509523444" name="Slide Number Placeholder 6"/>
           <p:cNvSpPr>
             <a:spLocks noGrp="1"/>
           </p:cNvSpPr>
@@ -1281,13 +2659,16 @@
             <p:ph type="sldNum" sz="quarter" idx="12"/>
           </p:nvPr>
         </p:nvSpPr>
-        <p:spPr/>
-        <p:txBody>
-          <a:bodyPr/>
-          <a:lstStyle/>
-          <a:p>
+        <p:spPr bwMode="auto"/>
+        <p:txBody>
+          <a:bodyPr/>
+          <a:lstStyle/>
+          <a:p>
+            <a:pPr>
+              <a:defRPr/>
+            </a:pPr>
             <a:fld id="{FD8C485D-1393-4FBB-854E-BDC6A27E3064}" type="slidenum">
-              <a:rPr lang="en-US" smtClean="0"/>
+              <a:rPr lang="en-US"/>
               <a:t>‹#›</a:t>
             </a:fld>
             <a:endParaRPr lang="en-US"/>
@@ -1295,11 +2676,6 @@
         </p:txBody>
       </p:sp>
     </p:spTree>
-    <p:extLst>
-      <p:ext uri="{BB962C8B-B14F-4D97-AF65-F5344CB8AC3E}">
-        <p14:creationId xmlns:p14="http://schemas.microsoft.com/office/powerpoint/2010/main" val="250839989"/>
-      </p:ext>
-    </p:extLst>
   </p:cSld>
   <p:clrMapOvr>
     <a:masterClrMapping/>
@@ -1308,7 +2684,7 @@
 </file>
 
 <file path=ppt/slideLayouts/slideLayout5.xml><?xml version="1.0" encoding="utf-8"?>
-<p:sldLayout xmlns:a="http://schemas.openxmlformats.org/drawingml/2006/main" xmlns:r="http://schemas.openxmlformats.org/officeDocument/2006/relationships" xmlns:p="http://schemas.openxmlformats.org/presentationml/2006/main" type="twoTxTwoObj" preserve="1">
+<p:sldLayout xmlns:a="http://schemas.openxmlformats.org/drawingml/2006/main" xmlns:r="http://schemas.openxmlformats.org/officeDocument/2006/relationships" xmlns:p="http://schemas.openxmlformats.org/presentationml/2006/main" xmlns:m="http://schemas.openxmlformats.org/officeDocument/2006/math" xmlns:w="http://schemas.openxmlformats.org/wordprocessingml/2006/main" matchingName="" preserve="1" showMasterPhAnim="0" showMasterSp="1" type="twoTxTwoObj" userDrawn="1">
   <p:cSld name="Comparison">
     <p:spTree>
       <p:nvGrpSpPr>
@@ -1316,7 +2692,7 @@
         <p:cNvGrpSpPr/>
         <p:nvPr/>
       </p:nvGrpSpPr>
-      <p:grpSpPr>
+      <p:grpSpPr bwMode="auto">
         <a:xfrm>
           <a:off x="0" y="0"/>
           <a:ext cx="0" cy="0"/>
@@ -1326,7 +2702,7 @@
       </p:grpSpPr>
       <p:sp>
         <p:nvSpPr>
-          <p:cNvPr id="2" name="Title 1"/>
+          <p:cNvPr id="120485709" name="Title 1"/>
           <p:cNvSpPr>
             <a:spLocks noGrp="1"/>
           </p:cNvSpPr>
@@ -1334,7 +2710,7 @@
             <p:ph type="title"/>
           </p:nvPr>
         </p:nvSpPr>
-        <p:spPr>
+        <p:spPr bwMode="auto">
           <a:xfrm>
             <a:off x="839788" y="365125"/>
             <a:ext cx="10515600" cy="1325563"/>
@@ -1344,8 +2720,11 @@
           <a:bodyPr/>
           <a:lstStyle/>
           <a:p>
-            <a:r>
-              <a:rPr lang="en-US" smtClean="0"/>
+            <a:pPr>
+              <a:defRPr/>
+            </a:pPr>
+            <a:r>
+              <a:rPr lang="en-US"/>
               <a:t>Click to edit Master title style</a:t>
             </a:r>
             <a:endParaRPr lang="en-US"/>
@@ -1354,7 +2733,7 @@
       </p:sp>
       <p:sp>
         <p:nvSpPr>
-          <p:cNvPr id="3" name="Text Placeholder 2"/>
+          <p:cNvPr id="1679511531" name="Text Placeholder 2"/>
           <p:cNvSpPr>
             <a:spLocks noGrp="1"/>
           </p:cNvSpPr>
@@ -1362,7 +2741,7 @@
             <p:ph type="body" idx="1"/>
           </p:nvPr>
         </p:nvSpPr>
-        <p:spPr>
+        <p:spPr bwMode="auto">
           <a:xfrm>
             <a:off x="839788" y="1681163"/>
             <a:ext cx="5157787" cy="823912"/>
@@ -1409,17 +2788,20 @@
             </a:lvl9pPr>
           </a:lstStyle>
           <a:p>
-            <a:pPr lvl="0"/>
-            <a:r>
-              <a:rPr lang="en-US" smtClean="0"/>
+            <a:pPr lvl="0">
+              <a:defRPr/>
+            </a:pPr>
+            <a:r>
+              <a:rPr lang="en-US"/>
               <a:t>Edit Master text styles</a:t>
             </a:r>
-          </a:p>
-        </p:txBody>
-      </p:sp>
-      <p:sp>
-        <p:nvSpPr>
-          <p:cNvPr id="4" name="Content Placeholder 3"/>
+            <a:endParaRPr/>
+          </a:p>
+        </p:txBody>
+      </p:sp>
+      <p:sp>
+        <p:nvSpPr>
+          <p:cNvPr id="1967120179" name="Content Placeholder 3"/>
           <p:cNvSpPr>
             <a:spLocks noGrp="1"/>
           </p:cNvSpPr>
@@ -1427,9 +2809,9 @@
             <p:ph sz="half" idx="2"/>
           </p:nvPr>
         </p:nvSpPr>
-        <p:spPr>
+        <p:spPr bwMode="auto">
           <a:xfrm>
-            <a:off x="839788" y="2505075"/>
+            <a:off x="839788" y="2505074"/>
             <a:ext cx="5157787" cy="3684588"/>
           </a:xfrm>
         </p:spPr>
@@ -1437,37 +2819,51 @@
           <a:bodyPr/>
           <a:lstStyle/>
           <a:p>
-            <a:pPr lvl="0"/>
-            <a:r>
-              <a:rPr lang="en-US" smtClean="0"/>
+            <a:pPr lvl="0">
+              <a:defRPr/>
+            </a:pPr>
+            <a:r>
+              <a:rPr lang="en-US"/>
               <a:t>Edit Master text styles</a:t>
             </a:r>
-          </a:p>
-          <a:p>
-            <a:pPr lvl="1"/>
-            <a:r>
-              <a:rPr lang="en-US" smtClean="0"/>
+            <a:endParaRPr/>
+          </a:p>
+          <a:p>
+            <a:pPr lvl="1">
+              <a:defRPr/>
+            </a:pPr>
+            <a:r>
+              <a:rPr lang="en-US"/>
               <a:t>Second level</a:t>
             </a:r>
-          </a:p>
-          <a:p>
-            <a:pPr lvl="2"/>
-            <a:r>
-              <a:rPr lang="en-US" smtClean="0"/>
+            <a:endParaRPr/>
+          </a:p>
+          <a:p>
+            <a:pPr lvl="2">
+              <a:defRPr/>
+            </a:pPr>
+            <a:r>
+              <a:rPr lang="en-US"/>
               <a:t>Third level</a:t>
             </a:r>
-          </a:p>
-          <a:p>
-            <a:pPr lvl="3"/>
-            <a:r>
-              <a:rPr lang="en-US" smtClean="0"/>
+            <a:endParaRPr/>
+          </a:p>
+          <a:p>
+            <a:pPr lvl="3">
+              <a:defRPr/>
+            </a:pPr>
+            <a:r>
+              <a:rPr lang="en-US"/>
               <a:t>Fourth level</a:t>
             </a:r>
-          </a:p>
-          <a:p>
-            <a:pPr lvl="4"/>
-            <a:r>
-              <a:rPr lang="en-US" smtClean="0"/>
+            <a:endParaRPr/>
+          </a:p>
+          <a:p>
+            <a:pPr lvl="4">
+              <a:defRPr/>
+            </a:pPr>
+            <a:r>
+              <a:rPr lang="en-US"/>
               <a:t>Fifth level</a:t>
             </a:r>
             <a:endParaRPr lang="en-US"/>
@@ -1476,7 +2872,7 @@
       </p:sp>
       <p:sp>
         <p:nvSpPr>
-          <p:cNvPr id="5" name="Text Placeholder 4"/>
+          <p:cNvPr id="2011066761" name="Text Placeholder 4"/>
           <p:cNvSpPr>
             <a:spLocks noGrp="1"/>
           </p:cNvSpPr>
@@ -1484,7 +2880,7 @@
             <p:ph type="body" sz="quarter" idx="3"/>
           </p:nvPr>
         </p:nvSpPr>
-        <p:spPr>
+        <p:spPr bwMode="auto">
           <a:xfrm>
             <a:off x="6172200" y="1681163"/>
             <a:ext cx="5183188" cy="823912"/>
@@ -1531,17 +2927,20 @@
             </a:lvl9pPr>
           </a:lstStyle>
           <a:p>
-            <a:pPr lvl="0"/>
-            <a:r>
-              <a:rPr lang="en-US" smtClean="0"/>
+            <a:pPr lvl="0">
+              <a:defRPr/>
+            </a:pPr>
+            <a:r>
+              <a:rPr lang="en-US"/>
               <a:t>Edit Master text styles</a:t>
             </a:r>
-          </a:p>
-        </p:txBody>
-      </p:sp>
-      <p:sp>
-        <p:nvSpPr>
-          <p:cNvPr id="6" name="Content Placeholder 5"/>
+            <a:endParaRPr/>
+          </a:p>
+        </p:txBody>
+      </p:sp>
+      <p:sp>
+        <p:nvSpPr>
+          <p:cNvPr id="777473316" name="Content Placeholder 5"/>
           <p:cNvSpPr>
             <a:spLocks noGrp="1"/>
           </p:cNvSpPr>
@@ -1549,9 +2948,9 @@
             <p:ph sz="quarter" idx="4"/>
           </p:nvPr>
         </p:nvSpPr>
-        <p:spPr>
+        <p:spPr bwMode="auto">
           <a:xfrm>
-            <a:off x="6172200" y="2505075"/>
+            <a:off x="6172200" y="2505074"/>
             <a:ext cx="5183188" cy="3684588"/>
           </a:xfrm>
         </p:spPr>
@@ -1559,37 +2958,51 @@
           <a:bodyPr/>
           <a:lstStyle/>
           <a:p>
-            <a:pPr lvl="0"/>
-            <a:r>
-              <a:rPr lang="en-US" smtClean="0"/>
+            <a:pPr lvl="0">
+              <a:defRPr/>
+            </a:pPr>
+            <a:r>
+              <a:rPr lang="en-US"/>
               <a:t>Edit Master text styles</a:t>
             </a:r>
-          </a:p>
-          <a:p>
-            <a:pPr lvl="1"/>
-            <a:r>
-              <a:rPr lang="en-US" smtClean="0"/>
+            <a:endParaRPr/>
+          </a:p>
+          <a:p>
+            <a:pPr lvl="1">
+              <a:defRPr/>
+            </a:pPr>
+            <a:r>
+              <a:rPr lang="en-US"/>
               <a:t>Second level</a:t>
             </a:r>
-          </a:p>
-          <a:p>
-            <a:pPr lvl="2"/>
-            <a:r>
-              <a:rPr lang="en-US" smtClean="0"/>
+            <a:endParaRPr/>
+          </a:p>
+          <a:p>
+            <a:pPr lvl="2">
+              <a:defRPr/>
+            </a:pPr>
+            <a:r>
+              <a:rPr lang="en-US"/>
               <a:t>Third level</a:t>
             </a:r>
-          </a:p>
-          <a:p>
-            <a:pPr lvl="3"/>
-            <a:r>
-              <a:rPr lang="en-US" smtClean="0"/>
+            <a:endParaRPr/>
+          </a:p>
+          <a:p>
+            <a:pPr lvl="3">
+              <a:defRPr/>
+            </a:pPr>
+            <a:r>
+              <a:rPr lang="en-US"/>
               <a:t>Fourth level</a:t>
             </a:r>
-          </a:p>
-          <a:p>
-            <a:pPr lvl="4"/>
-            <a:r>
-              <a:rPr lang="en-US" smtClean="0"/>
+            <a:endParaRPr/>
+          </a:p>
+          <a:p>
+            <a:pPr lvl="4">
+              <a:defRPr/>
+            </a:pPr>
+            <a:r>
+              <a:rPr lang="en-US"/>
               <a:t>Fifth level</a:t>
             </a:r>
             <a:endParaRPr lang="en-US"/>
@@ -1598,7 +3011,7 @@
       </p:sp>
       <p:sp>
         <p:nvSpPr>
-          <p:cNvPr id="7" name="Date Placeholder 6"/>
+          <p:cNvPr id="794918566" name="Date Placeholder 6"/>
           <p:cNvSpPr>
             <a:spLocks noGrp="1"/>
           </p:cNvSpPr>
@@ -1606,13 +3019,16 @@
             <p:ph type="dt" sz="half" idx="10"/>
           </p:nvPr>
         </p:nvSpPr>
-        <p:spPr/>
-        <p:txBody>
-          <a:bodyPr/>
-          <a:lstStyle/>
-          <a:p>
+        <p:spPr bwMode="auto"/>
+        <p:txBody>
+          <a:bodyPr/>
+          <a:lstStyle/>
+          <a:p>
+            <a:pPr>
+              <a:defRPr/>
+            </a:pPr>
             <a:fld id="{EDBC742C-A8E5-4E57-BD43-F0B8F462B862}" type="datetimeFigureOut">
-              <a:rPr lang="en-US" smtClean="0"/>
+              <a:rPr lang="en-US"/>
               <a:t>4/1/2026</a:t>
             </a:fld>
             <a:endParaRPr lang="en-US"/>
@@ -1621,7 +3037,7 @@
       </p:sp>
       <p:sp>
         <p:nvSpPr>
-          <p:cNvPr id="8" name="Footer Placeholder 7"/>
+          <p:cNvPr id="820657646" name="Footer Placeholder 7"/>
           <p:cNvSpPr>
             <a:spLocks noGrp="1"/>
           </p:cNvSpPr>
@@ -1629,18 +3045,21 @@
             <p:ph type="ftr" sz="quarter" idx="11"/>
           </p:nvPr>
         </p:nvSpPr>
-        <p:spPr/>
-        <p:txBody>
-          <a:bodyPr/>
-          <a:lstStyle/>
-          <a:p>
-            <a:endParaRPr lang="en-US"/>
-          </a:p>
-        </p:txBody>
-      </p:sp>
-      <p:sp>
-        <p:nvSpPr>
-          <p:cNvPr id="9" name="Slide Number Placeholder 8"/>
+        <p:spPr bwMode="auto"/>
+        <p:txBody>
+          <a:bodyPr/>
+          <a:lstStyle/>
+          <a:p>
+            <a:pPr>
+              <a:defRPr/>
+            </a:pPr>
+            <a:endParaRPr lang="en-US"/>
+          </a:p>
+        </p:txBody>
+      </p:sp>
+      <p:sp>
+        <p:nvSpPr>
+          <p:cNvPr id="1616739034" name="Slide Number Placeholder 8"/>
           <p:cNvSpPr>
             <a:spLocks noGrp="1"/>
           </p:cNvSpPr>
@@ -1648,13 +3067,16 @@
             <p:ph type="sldNum" sz="quarter" idx="12"/>
           </p:nvPr>
         </p:nvSpPr>
-        <p:spPr/>
-        <p:txBody>
-          <a:bodyPr/>
-          <a:lstStyle/>
-          <a:p>
+        <p:spPr bwMode="auto"/>
+        <p:txBody>
+          <a:bodyPr/>
+          <a:lstStyle/>
+          <a:p>
+            <a:pPr>
+              <a:defRPr/>
+            </a:pPr>
             <a:fld id="{FD8C485D-1393-4FBB-854E-BDC6A27E3064}" type="slidenum">
-              <a:rPr lang="en-US" smtClean="0"/>
+              <a:rPr lang="en-US"/>
               <a:t>‹#›</a:t>
             </a:fld>
             <a:endParaRPr lang="en-US"/>
@@ -1662,11 +3084,6 @@
         </p:txBody>
       </p:sp>
     </p:spTree>
-    <p:extLst>
-      <p:ext uri="{BB962C8B-B14F-4D97-AF65-F5344CB8AC3E}">
-        <p14:creationId xmlns:p14="http://schemas.microsoft.com/office/powerpoint/2010/main" val="3896510184"/>
-      </p:ext>
-    </p:extLst>
   </p:cSld>
   <p:clrMapOvr>
     <a:masterClrMapping/>
@@ -1675,7 +3092,7 @@
 </file>
 
 <file path=ppt/slideLayouts/slideLayout6.xml><?xml version="1.0" encoding="utf-8"?>
-<p:sldLayout xmlns:a="http://schemas.openxmlformats.org/drawingml/2006/main" xmlns:r="http://schemas.openxmlformats.org/officeDocument/2006/relationships" xmlns:p="http://schemas.openxmlformats.org/presentationml/2006/main" type="titleOnly" preserve="1">
+<p:sldLayout xmlns:a="http://schemas.openxmlformats.org/drawingml/2006/main" xmlns:r="http://schemas.openxmlformats.org/officeDocument/2006/relationships" xmlns:p="http://schemas.openxmlformats.org/presentationml/2006/main" xmlns:m="http://schemas.openxmlformats.org/officeDocument/2006/math" xmlns:w="http://schemas.openxmlformats.org/wordprocessingml/2006/main" matchingName="" preserve="1" showMasterPhAnim="0" showMasterSp="1" type="titleOnly" userDrawn="1">
   <p:cSld name="Title Only">
     <p:spTree>
       <p:nvGrpSpPr>
@@ -1683,7 +3100,7 @@
         <p:cNvGrpSpPr/>
         <p:nvPr/>
       </p:nvGrpSpPr>
-      <p:grpSpPr>
+      <p:grpSpPr bwMode="auto">
         <a:xfrm>
           <a:off x="0" y="0"/>
           <a:ext cx="0" cy="0"/>
@@ -1693,7 +3110,7 @@
       </p:grpSpPr>
       <p:sp>
         <p:nvSpPr>
-          <p:cNvPr id="2" name="Title 1"/>
+          <p:cNvPr id="1176879999" name="Title 1"/>
           <p:cNvSpPr>
             <a:spLocks noGrp="1"/>
           </p:cNvSpPr>
@@ -1701,13 +3118,16 @@
             <p:ph type="title"/>
           </p:nvPr>
         </p:nvSpPr>
-        <p:spPr/>
-        <p:txBody>
-          <a:bodyPr/>
-          <a:lstStyle/>
-          <a:p>
-            <a:r>
-              <a:rPr lang="en-US" smtClean="0"/>
+        <p:spPr bwMode="auto"/>
+        <p:txBody>
+          <a:bodyPr/>
+          <a:lstStyle/>
+          <a:p>
+            <a:pPr>
+              <a:defRPr/>
+            </a:pPr>
+            <a:r>
+              <a:rPr lang="en-US"/>
               <a:t>Click to edit Master title style</a:t>
             </a:r>
             <a:endParaRPr lang="en-US"/>
@@ -1716,7 +3136,7 @@
       </p:sp>
       <p:sp>
         <p:nvSpPr>
-          <p:cNvPr id="3" name="Date Placeholder 2"/>
+          <p:cNvPr id="939155794" name="Date Placeholder 2"/>
           <p:cNvSpPr>
             <a:spLocks noGrp="1"/>
           </p:cNvSpPr>
@@ -1724,13 +3144,16 @@
             <p:ph type="dt" sz="half" idx="10"/>
           </p:nvPr>
         </p:nvSpPr>
-        <p:spPr/>
-        <p:txBody>
-          <a:bodyPr/>
-          <a:lstStyle/>
-          <a:p>
+        <p:spPr bwMode="auto"/>
+        <p:txBody>
+          <a:bodyPr/>
+          <a:lstStyle/>
+          <a:p>
+            <a:pPr>
+              <a:defRPr/>
+            </a:pPr>
             <a:fld id="{EDBC742C-A8E5-4E57-BD43-F0B8F462B862}" type="datetimeFigureOut">
-              <a:rPr lang="en-US" smtClean="0"/>
+              <a:rPr lang="en-US"/>
               <a:t>4/1/2026</a:t>
             </a:fld>
             <a:endParaRPr lang="en-US"/>
@@ -1739,7 +3162,7 @@
       </p:sp>
       <p:sp>
         <p:nvSpPr>
-          <p:cNvPr id="4" name="Footer Placeholder 3"/>
+          <p:cNvPr id="986600315" name="Footer Placeholder 3"/>
           <p:cNvSpPr>
             <a:spLocks noGrp="1"/>
           </p:cNvSpPr>
@@ -1747,18 +3170,21 @@
             <p:ph type="ftr" sz="quarter" idx="11"/>
           </p:nvPr>
         </p:nvSpPr>
-        <p:spPr/>
-        <p:txBody>
-          <a:bodyPr/>
-          <a:lstStyle/>
-          <a:p>
-            <a:endParaRPr lang="en-US"/>
-          </a:p>
-        </p:txBody>
-      </p:sp>
-      <p:sp>
-        <p:nvSpPr>
-          <p:cNvPr id="5" name="Slide Number Placeholder 4"/>
+        <p:spPr bwMode="auto"/>
+        <p:txBody>
+          <a:bodyPr/>
+          <a:lstStyle/>
+          <a:p>
+            <a:pPr>
+              <a:defRPr/>
+            </a:pPr>
+            <a:endParaRPr lang="en-US"/>
+          </a:p>
+        </p:txBody>
+      </p:sp>
+      <p:sp>
+        <p:nvSpPr>
+          <p:cNvPr id="1777342010" name="Slide Number Placeholder 4"/>
           <p:cNvSpPr>
             <a:spLocks noGrp="1"/>
           </p:cNvSpPr>
@@ -1766,13 +3192,16 @@
             <p:ph type="sldNum" sz="quarter" idx="12"/>
           </p:nvPr>
         </p:nvSpPr>
-        <p:spPr/>
-        <p:txBody>
-          <a:bodyPr/>
-          <a:lstStyle/>
-          <a:p>
+        <p:spPr bwMode="auto"/>
+        <p:txBody>
+          <a:bodyPr/>
+          <a:lstStyle/>
+          <a:p>
+            <a:pPr>
+              <a:defRPr/>
+            </a:pPr>
             <a:fld id="{FD8C485D-1393-4FBB-854E-BDC6A27E3064}" type="slidenum">
-              <a:rPr lang="en-US" smtClean="0"/>
+              <a:rPr lang="en-US"/>
               <a:t>‹#›</a:t>
             </a:fld>
             <a:endParaRPr lang="en-US"/>
@@ -1780,11 +3209,6 @@
         </p:txBody>
       </p:sp>
     </p:spTree>
-    <p:extLst>
-      <p:ext uri="{BB962C8B-B14F-4D97-AF65-F5344CB8AC3E}">
-        <p14:creationId xmlns:p14="http://schemas.microsoft.com/office/powerpoint/2010/main" val="3532691460"/>
-      </p:ext>
-    </p:extLst>
   </p:cSld>
   <p:clrMapOvr>
     <a:masterClrMapping/>
@@ -1793,7 +3217,7 @@
 </file>
 
 <file path=ppt/slideLayouts/slideLayout7.xml><?xml version="1.0" encoding="utf-8"?>
-<p:sldLayout xmlns:a="http://schemas.openxmlformats.org/drawingml/2006/main" xmlns:r="http://schemas.openxmlformats.org/officeDocument/2006/relationships" xmlns:p="http://schemas.openxmlformats.org/presentationml/2006/main" type="blank" preserve="1">
+<p:sldLayout xmlns:a="http://schemas.openxmlformats.org/drawingml/2006/main" xmlns:r="http://schemas.openxmlformats.org/officeDocument/2006/relationships" xmlns:p="http://schemas.openxmlformats.org/presentationml/2006/main" xmlns:m="http://schemas.openxmlformats.org/officeDocument/2006/math" xmlns:w="http://schemas.openxmlformats.org/wordprocessingml/2006/main" matchingName="" preserve="1" showMasterPhAnim="0" showMasterSp="1" type="blank" userDrawn="1">
   <p:cSld name="Blank">
     <p:spTree>
       <p:nvGrpSpPr>
@@ -1801,7 +3225,7 @@
         <p:cNvGrpSpPr/>
         <p:nvPr/>
       </p:nvGrpSpPr>
-      <p:grpSpPr>
+      <p:grpSpPr bwMode="auto">
         <a:xfrm>
           <a:off x="0" y="0"/>
           <a:ext cx="0" cy="0"/>
@@ -1811,7 +3235,7 @@
       </p:grpSpPr>
       <p:sp>
         <p:nvSpPr>
-          <p:cNvPr id="2" name="Date Placeholder 1"/>
+          <p:cNvPr id="1833552029" name="Date Placeholder 1"/>
           <p:cNvSpPr>
             <a:spLocks noGrp="1"/>
           </p:cNvSpPr>
@@ -1819,13 +3243,16 @@
             <p:ph type="dt" sz="half" idx="10"/>
           </p:nvPr>
         </p:nvSpPr>
-        <p:spPr/>
-        <p:txBody>
-          <a:bodyPr/>
-          <a:lstStyle/>
-          <a:p>
+        <p:spPr bwMode="auto"/>
+        <p:txBody>
+          <a:bodyPr/>
+          <a:lstStyle/>
+          <a:p>
+            <a:pPr>
+              <a:defRPr/>
+            </a:pPr>
             <a:fld id="{EDBC742C-A8E5-4E57-BD43-F0B8F462B862}" type="datetimeFigureOut">
-              <a:rPr lang="en-US" smtClean="0"/>
+              <a:rPr lang="en-US"/>
               <a:t>4/1/2026</a:t>
             </a:fld>
             <a:endParaRPr lang="en-US"/>
@@ -1834,7 +3261,7 @@
       </p:sp>
       <p:sp>
         <p:nvSpPr>
-          <p:cNvPr id="3" name="Footer Placeholder 2"/>
+          <p:cNvPr id="874878642" name="Footer Placeholder 2"/>
           <p:cNvSpPr>
             <a:spLocks noGrp="1"/>
           </p:cNvSpPr>
@@ -1842,18 +3269,21 @@
             <p:ph type="ftr" sz="quarter" idx="11"/>
           </p:nvPr>
         </p:nvSpPr>
-        <p:spPr/>
-        <p:txBody>
-          <a:bodyPr/>
-          <a:lstStyle/>
-          <a:p>
-            <a:endParaRPr lang="en-US"/>
-          </a:p>
-        </p:txBody>
-      </p:sp>
-      <p:sp>
-        <p:nvSpPr>
-          <p:cNvPr id="4" name="Slide Number Placeholder 3"/>
+        <p:spPr bwMode="auto"/>
+        <p:txBody>
+          <a:bodyPr/>
+          <a:lstStyle/>
+          <a:p>
+            <a:pPr>
+              <a:defRPr/>
+            </a:pPr>
+            <a:endParaRPr lang="en-US"/>
+          </a:p>
+        </p:txBody>
+      </p:sp>
+      <p:sp>
+        <p:nvSpPr>
+          <p:cNvPr id="1283793244" name="Slide Number Placeholder 3"/>
           <p:cNvSpPr>
             <a:spLocks noGrp="1"/>
           </p:cNvSpPr>
@@ -1861,13 +3291,16 @@
             <p:ph type="sldNum" sz="quarter" idx="12"/>
           </p:nvPr>
         </p:nvSpPr>
-        <p:spPr/>
-        <p:txBody>
-          <a:bodyPr/>
-          <a:lstStyle/>
-          <a:p>
+        <p:spPr bwMode="auto"/>
+        <p:txBody>
+          <a:bodyPr/>
+          <a:lstStyle/>
+          <a:p>
+            <a:pPr>
+              <a:defRPr/>
+            </a:pPr>
             <a:fld id="{FD8C485D-1393-4FBB-854E-BDC6A27E3064}" type="slidenum">
-              <a:rPr lang="en-US" smtClean="0"/>
+              <a:rPr lang="en-US"/>
               <a:t>‹#›</a:t>
             </a:fld>
             <a:endParaRPr lang="en-US"/>
@@ -1875,11 +3308,6 @@
         </p:txBody>
       </p:sp>
     </p:spTree>
-    <p:extLst>
-      <p:ext uri="{BB962C8B-B14F-4D97-AF65-F5344CB8AC3E}">
-        <p14:creationId xmlns:p14="http://schemas.microsoft.com/office/powerpoint/2010/main" val="3487052196"/>
-      </p:ext>
-    </p:extLst>
   </p:cSld>
   <p:clrMapOvr>
     <a:masterClrMapping/>
@@ -1888,7 +3316,7 @@
 </file>
 
 <file path=ppt/slideLayouts/slideLayout8.xml><?xml version="1.0" encoding="utf-8"?>
-<p:sldLayout xmlns:a="http://schemas.openxmlformats.org/drawingml/2006/main" xmlns:r="http://schemas.openxmlformats.org/officeDocument/2006/relationships" xmlns:p="http://schemas.openxmlformats.org/presentationml/2006/main" type="objTx" preserve="1">
+<p:sldLayout xmlns:a="http://schemas.openxmlformats.org/drawingml/2006/main" xmlns:r="http://schemas.openxmlformats.org/officeDocument/2006/relationships" xmlns:p="http://schemas.openxmlformats.org/presentationml/2006/main" xmlns:m="http://schemas.openxmlformats.org/officeDocument/2006/math" xmlns:w="http://schemas.openxmlformats.org/wordprocessingml/2006/main" matchingName="" preserve="1" showMasterPhAnim="0" showMasterSp="1" type="objTx" userDrawn="1">
   <p:cSld name="Content with Caption">
     <p:spTree>
       <p:nvGrpSpPr>
@@ -1896,7 +3324,7 @@
         <p:cNvGrpSpPr/>
         <p:nvPr/>
       </p:nvGrpSpPr>
-      <p:grpSpPr>
+      <p:grpSpPr bwMode="auto">
         <a:xfrm>
           <a:off x="0" y="0"/>
           <a:ext cx="0" cy="0"/>
@@ -1906,7 +3334,7 @@
       </p:grpSpPr>
       <p:sp>
         <p:nvSpPr>
-          <p:cNvPr id="2" name="Title 1"/>
+          <p:cNvPr id="1128249954" name="Title 1"/>
           <p:cNvSpPr>
             <a:spLocks noGrp="1"/>
           </p:cNvSpPr>
@@ -1914,7 +3342,7 @@
             <p:ph type="title"/>
           </p:nvPr>
         </p:nvSpPr>
-        <p:spPr>
+        <p:spPr bwMode="auto">
           <a:xfrm>
             <a:off x="839788" y="457200"/>
             <a:ext cx="3932237" cy="1600200"/>
@@ -1928,8 +3356,11 @@
             </a:lvl1pPr>
           </a:lstStyle>
           <a:p>
-            <a:r>
-              <a:rPr lang="en-US" smtClean="0"/>
+            <a:pPr>
+              <a:defRPr/>
+            </a:pPr>
+            <a:r>
+              <a:rPr lang="en-US"/>
               <a:t>Click to edit Master title style</a:t>
             </a:r>
             <a:endParaRPr lang="en-US"/>
@@ -1938,7 +3369,7 @@
       </p:sp>
       <p:sp>
         <p:nvSpPr>
-          <p:cNvPr id="3" name="Content Placeholder 2"/>
+          <p:cNvPr id="1897579032" name="Content Placeholder 2"/>
           <p:cNvSpPr>
             <a:spLocks noGrp="1"/>
           </p:cNvSpPr>
@@ -1946,7 +3377,7 @@
             <p:ph idx="1"/>
           </p:nvPr>
         </p:nvSpPr>
-        <p:spPr>
+        <p:spPr bwMode="auto">
           <a:xfrm>
             <a:off x="5183188" y="987425"/>
             <a:ext cx="6172200" cy="4873625"/>
@@ -1984,37 +3415,51 @@
             </a:lvl9pPr>
           </a:lstStyle>
           <a:p>
-            <a:pPr lvl="0"/>
-            <a:r>
-              <a:rPr lang="en-US" smtClean="0"/>
+            <a:pPr lvl="0">
+              <a:defRPr/>
+            </a:pPr>
+            <a:r>
+              <a:rPr lang="en-US"/>
               <a:t>Edit Master text styles</a:t>
             </a:r>
-          </a:p>
-          <a:p>
-            <a:pPr lvl="1"/>
-            <a:r>
-              <a:rPr lang="en-US" smtClean="0"/>
+            <a:endParaRPr/>
+          </a:p>
+          <a:p>
+            <a:pPr lvl="1">
+              <a:defRPr/>
+            </a:pPr>
+            <a:r>
+              <a:rPr lang="en-US"/>
               <a:t>Second level</a:t>
             </a:r>
-          </a:p>
-          <a:p>
-            <a:pPr lvl="2"/>
-            <a:r>
-              <a:rPr lang="en-US" smtClean="0"/>
+            <a:endParaRPr/>
+          </a:p>
+          <a:p>
+            <a:pPr lvl="2">
+              <a:defRPr/>
+            </a:pPr>
+            <a:r>
+              <a:rPr lang="en-US"/>
               <a:t>Third level</a:t>
             </a:r>
-          </a:p>
-          <a:p>
-            <a:pPr lvl="3"/>
-            <a:r>
-              <a:rPr lang="en-US" smtClean="0"/>
+            <a:endParaRPr/>
+          </a:p>
+          <a:p>
+            <a:pPr lvl="3">
+              <a:defRPr/>
+            </a:pPr>
+            <a:r>
+              <a:rPr lang="en-US"/>
               <a:t>Fourth level</a:t>
             </a:r>
-          </a:p>
-          <a:p>
-            <a:pPr lvl="4"/>
-            <a:r>
-              <a:rPr lang="en-US" smtClean="0"/>
+            <a:endParaRPr/>
+          </a:p>
+          <a:p>
+            <a:pPr lvl="4">
+              <a:defRPr/>
+            </a:pPr>
+            <a:r>
+              <a:rPr lang="en-US"/>
               <a:t>Fifth level</a:t>
             </a:r>
             <a:endParaRPr lang="en-US"/>
@@ -2023,7 +3468,7 @@
       </p:sp>
       <p:sp>
         <p:nvSpPr>
-          <p:cNvPr id="4" name="Text Placeholder 3"/>
+          <p:cNvPr id="840167404" name="Text Placeholder 3"/>
           <p:cNvSpPr>
             <a:spLocks noGrp="1"/>
           </p:cNvSpPr>
@@ -2031,7 +3476,7 @@
             <p:ph type="body" sz="half" idx="2"/>
           </p:nvPr>
         </p:nvSpPr>
-        <p:spPr>
+        <p:spPr bwMode="auto">
           <a:xfrm>
             <a:off x="839788" y="2057400"/>
             <a:ext cx="3932237" cy="3811588"/>
@@ -2078,17 +3523,20 @@
             </a:lvl9pPr>
           </a:lstStyle>
           <a:p>
-            <a:pPr lvl="0"/>
-            <a:r>
-              <a:rPr lang="en-US" smtClean="0"/>
+            <a:pPr lvl="0">
+              <a:defRPr/>
+            </a:pPr>
+            <a:r>
+              <a:rPr lang="en-US"/>
               <a:t>Edit Master text styles</a:t>
             </a:r>
-          </a:p>
-        </p:txBody>
-      </p:sp>
-      <p:sp>
-        <p:nvSpPr>
-          <p:cNvPr id="5" name="Date Placeholder 4"/>
+            <a:endParaRPr/>
+          </a:p>
+        </p:txBody>
+      </p:sp>
+      <p:sp>
+        <p:nvSpPr>
+          <p:cNvPr id="2013875820" name="Date Placeholder 4"/>
           <p:cNvSpPr>
             <a:spLocks noGrp="1"/>
           </p:cNvSpPr>
@@ -2096,13 +3544,16 @@
             <p:ph type="dt" sz="half" idx="10"/>
           </p:nvPr>
         </p:nvSpPr>
-        <p:spPr/>
-        <p:txBody>
-          <a:bodyPr/>
-          <a:lstStyle/>
-          <a:p>
+        <p:spPr bwMode="auto"/>
+        <p:txBody>
+          <a:bodyPr/>
+          <a:lstStyle/>
+          <a:p>
+            <a:pPr>
+              <a:defRPr/>
+            </a:pPr>
             <a:fld id="{EDBC742C-A8E5-4E57-BD43-F0B8F462B862}" type="datetimeFigureOut">
-              <a:rPr lang="en-US" smtClean="0"/>
+              <a:rPr lang="en-US"/>
               <a:t>4/1/2026</a:t>
             </a:fld>
             <a:endParaRPr lang="en-US"/>
@@ -2111,7 +3562,7 @@
       </p:sp>
       <p:sp>
         <p:nvSpPr>
-          <p:cNvPr id="6" name="Footer Placeholder 5"/>
+          <p:cNvPr id="701997092" name="Footer Placeholder 5"/>
           <p:cNvSpPr>
             <a:spLocks noGrp="1"/>
           </p:cNvSpPr>
@@ -2119,18 +3570,21 @@
             <p:ph type="ftr" sz="quarter" idx="11"/>
           </p:nvPr>
         </p:nvSpPr>
-        <p:spPr/>
-        <p:txBody>
-          <a:bodyPr/>
-          <a:lstStyle/>
-          <a:p>
-            <a:endParaRPr lang="en-US"/>
-          </a:p>
-        </p:txBody>
-      </p:sp>
-      <p:sp>
-        <p:nvSpPr>
-          <p:cNvPr id="7" name="Slide Number Placeholder 6"/>
+        <p:spPr bwMode="auto"/>
+        <p:txBody>
+          <a:bodyPr/>
+          <a:lstStyle/>
+          <a:p>
+            <a:pPr>
+              <a:defRPr/>
+            </a:pPr>
+            <a:endParaRPr lang="en-US"/>
+          </a:p>
+        </p:txBody>
+      </p:sp>
+      <p:sp>
+        <p:nvSpPr>
+          <p:cNvPr id="595442855" name="Slide Number Placeholder 6"/>
           <p:cNvSpPr>
             <a:spLocks noGrp="1"/>
           </p:cNvSpPr>
@@ -2138,13 +3592,16 @@
             <p:ph type="sldNum" sz="quarter" idx="12"/>
           </p:nvPr>
         </p:nvSpPr>
-        <p:spPr/>
-        <p:txBody>
-          <a:bodyPr/>
-          <a:lstStyle/>
-          <a:p>
+        <p:spPr bwMode="auto"/>
+        <p:txBody>
+          <a:bodyPr/>
+          <a:lstStyle/>
+          <a:p>
+            <a:pPr>
+              <a:defRPr/>
+            </a:pPr>
             <a:fld id="{FD8C485D-1393-4FBB-854E-BDC6A27E3064}" type="slidenum">
-              <a:rPr lang="en-US" smtClean="0"/>
+              <a:rPr lang="en-US"/>
               <a:t>‹#›</a:t>
             </a:fld>
             <a:endParaRPr lang="en-US"/>
@@ -2152,11 +3609,6 @@
         </p:txBody>
       </p:sp>
     </p:spTree>
-    <p:extLst>
-      <p:ext uri="{BB962C8B-B14F-4D97-AF65-F5344CB8AC3E}">
-        <p14:creationId xmlns:p14="http://schemas.microsoft.com/office/powerpoint/2010/main" val="715328388"/>
-      </p:ext>
-    </p:extLst>
   </p:cSld>
   <p:clrMapOvr>
     <a:masterClrMapping/>
@@ -2165,7 +3617,7 @@
 </file>
 
 <file path=ppt/slideLayouts/slideLayout9.xml><?xml version="1.0" encoding="utf-8"?>
-<p:sldLayout xmlns:a="http://schemas.openxmlformats.org/drawingml/2006/main" xmlns:r="http://schemas.openxmlformats.org/officeDocument/2006/relationships" xmlns:p="http://schemas.openxmlformats.org/presentationml/2006/main" type="picTx" preserve="1">
+<p:sldLayout xmlns:a="http://schemas.openxmlformats.org/drawingml/2006/main" xmlns:r="http://schemas.openxmlformats.org/officeDocument/2006/relationships" xmlns:p="http://schemas.openxmlformats.org/presentationml/2006/main" xmlns:m="http://schemas.openxmlformats.org/officeDocument/2006/math" xmlns:w="http://schemas.openxmlformats.org/wordprocessingml/2006/main" matchingName="" preserve="1" showMasterPhAnim="0" showMasterSp="1" type="picTx" userDrawn="1">
   <p:cSld name="Picture with Caption">
     <p:spTree>
       <p:nvGrpSpPr>
@@ -2173,7 +3625,7 @@
         <p:cNvGrpSpPr/>
         <p:nvPr/>
       </p:nvGrpSpPr>
-      <p:grpSpPr>
+      <p:grpSpPr bwMode="auto">
         <a:xfrm>
           <a:off x="0" y="0"/>
           <a:ext cx="0" cy="0"/>
@@ -2183,7 +3635,7 @@
       </p:grpSpPr>
       <p:sp>
         <p:nvSpPr>
-          <p:cNvPr id="2" name="Title 1"/>
+          <p:cNvPr id="350907134" name="Title 1"/>
           <p:cNvSpPr>
             <a:spLocks noGrp="1"/>
           </p:cNvSpPr>
@@ -2191,7 +3643,7 @@
             <p:ph type="title"/>
           </p:nvPr>
         </p:nvSpPr>
-        <p:spPr>
+        <p:spPr bwMode="auto">
           <a:xfrm>
             <a:off x="839788" y="457200"/>
             <a:ext cx="3932237" cy="1600200"/>
@@ -2205,8 +3657,11 @@
             </a:lvl1pPr>
           </a:lstStyle>
           <a:p>
-            <a:r>
-              <a:rPr lang="en-US" smtClean="0"/>
+            <a:pPr>
+              <a:defRPr/>
+            </a:pPr>
+            <a:r>
+              <a:rPr lang="en-US"/>
               <a:t>Click to edit Master title style</a:t>
             </a:r>
             <a:endParaRPr lang="en-US"/>
@@ -2215,7 +3670,7 @@
       </p:sp>
       <p:sp>
         <p:nvSpPr>
-          <p:cNvPr id="3" name="Picture Placeholder 2"/>
+          <p:cNvPr id="517055461" name="Picture Placeholder 2"/>
           <p:cNvSpPr>
             <a:spLocks noGrp="1"/>
           </p:cNvSpPr>
@@ -2223,7 +3678,7 @@
             <p:ph type="pic" idx="1"/>
           </p:nvPr>
         </p:nvSpPr>
-        <p:spPr>
+        <p:spPr bwMode="auto">
           <a:xfrm>
             <a:off x="5183188" y="987425"/>
             <a:ext cx="6172200" cy="4873625"/>
@@ -2270,13 +3725,16 @@
             </a:lvl9pPr>
           </a:lstStyle>
           <a:p>
-            <a:endParaRPr lang="en-US"/>
-          </a:p>
-        </p:txBody>
-      </p:sp>
-      <p:sp>
-        <p:nvSpPr>
-          <p:cNvPr id="4" name="Text Placeholder 3"/>
+            <a:pPr>
+              <a:defRPr/>
+            </a:pPr>
+            <a:endParaRPr lang="en-US"/>
+          </a:p>
+        </p:txBody>
+      </p:sp>
+      <p:sp>
+        <p:nvSpPr>
+          <p:cNvPr id="1923573648" name="Text Placeholder 3"/>
           <p:cNvSpPr>
             <a:spLocks noGrp="1"/>
           </p:cNvSpPr>
@@ -2284,7 +3742,7 @@
             <p:ph type="body" sz="half" idx="2"/>
           </p:nvPr>
         </p:nvSpPr>
-        <p:spPr>
+        <p:spPr bwMode="auto">
           <a:xfrm>
             <a:off x="839788" y="2057400"/>
             <a:ext cx="3932237" cy="3811588"/>
@@ -2331,17 +3789,20 @@
             </a:lvl9pPr>
           </a:lstStyle>
           <a:p>
-            <a:pPr lvl="0"/>
-            <a:r>
-              <a:rPr lang="en-US" smtClean="0"/>
+            <a:pPr lvl="0">
+              <a:defRPr/>
+            </a:pPr>
+            <a:r>
+              <a:rPr lang="en-US"/>
               <a:t>Edit Master text styles</a:t>
             </a:r>
-          </a:p>
-        </p:txBody>
-      </p:sp>
-      <p:sp>
-        <p:nvSpPr>
-          <p:cNvPr id="5" name="Date Placeholder 4"/>
+            <a:endParaRPr/>
+          </a:p>
+        </p:txBody>
+      </p:sp>
+      <p:sp>
+        <p:nvSpPr>
+          <p:cNvPr id="1239645736" name="Date Placeholder 4"/>
           <p:cNvSpPr>
             <a:spLocks noGrp="1"/>
           </p:cNvSpPr>
@@ -2349,13 +3810,16 @@
             <p:ph type="dt" sz="half" idx="10"/>
           </p:nvPr>
         </p:nvSpPr>
-        <p:spPr/>
-        <p:txBody>
-          <a:bodyPr/>
-          <a:lstStyle/>
-          <a:p>
+        <p:spPr bwMode="auto"/>
+        <p:txBody>
+          <a:bodyPr/>
+          <a:lstStyle/>
+          <a:p>
+            <a:pPr>
+              <a:defRPr/>
+            </a:pPr>
             <a:fld id="{EDBC742C-A8E5-4E57-BD43-F0B8F462B862}" type="datetimeFigureOut">
-              <a:rPr lang="en-US" smtClean="0"/>
+              <a:rPr lang="en-US"/>
               <a:t>4/1/2026</a:t>
             </a:fld>
             <a:endParaRPr lang="en-US"/>
@@ -2364,7 +3828,7 @@
       </p:sp>
       <p:sp>
         <p:nvSpPr>
-          <p:cNvPr id="6" name="Footer Placeholder 5"/>
+          <p:cNvPr id="1323839439" name="Footer Placeholder 5"/>
           <p:cNvSpPr>
             <a:spLocks noGrp="1"/>
           </p:cNvSpPr>
@@ -2372,18 +3836,21 @@
             <p:ph type="ftr" sz="quarter" idx="11"/>
           </p:nvPr>
         </p:nvSpPr>
-        <p:spPr/>
-        <p:txBody>
-          <a:bodyPr/>
-          <a:lstStyle/>
-          <a:p>
-            <a:endParaRPr lang="en-US"/>
-          </a:p>
-        </p:txBody>
-      </p:sp>
-      <p:sp>
-        <p:nvSpPr>
-          <p:cNvPr id="7" name="Slide Number Placeholder 6"/>
+        <p:spPr bwMode="auto"/>
+        <p:txBody>
+          <a:bodyPr/>
+          <a:lstStyle/>
+          <a:p>
+            <a:pPr>
+              <a:defRPr/>
+            </a:pPr>
+            <a:endParaRPr lang="en-US"/>
+          </a:p>
+        </p:txBody>
+      </p:sp>
+      <p:sp>
+        <p:nvSpPr>
+          <p:cNvPr id="1073571455" name="Slide Number Placeholder 6"/>
           <p:cNvSpPr>
             <a:spLocks noGrp="1"/>
           </p:cNvSpPr>
@@ -2391,13 +3858,16 @@
             <p:ph type="sldNum" sz="quarter" idx="12"/>
           </p:nvPr>
         </p:nvSpPr>
-        <p:spPr/>
-        <p:txBody>
-          <a:bodyPr/>
-          <a:lstStyle/>
-          <a:p>
+        <p:spPr bwMode="auto"/>
+        <p:txBody>
+          <a:bodyPr/>
+          <a:lstStyle/>
+          <a:p>
+            <a:pPr>
+              <a:defRPr/>
+            </a:pPr>
             <a:fld id="{FD8C485D-1393-4FBB-854E-BDC6A27E3064}" type="slidenum">
-              <a:rPr lang="en-US" smtClean="0"/>
+              <a:rPr lang="en-US"/>
               <a:t>‹#›</a:t>
             </a:fld>
             <a:endParaRPr lang="en-US"/>
@@ -2405,11 +3875,6 @@
         </p:txBody>
       </p:sp>
     </p:spTree>
-    <p:extLst>
-      <p:ext uri="{BB962C8B-B14F-4D97-AF65-F5344CB8AC3E}">
-        <p14:creationId xmlns:p14="http://schemas.microsoft.com/office/powerpoint/2010/main" val="3756030313"/>
-      </p:ext>
-    </p:extLst>
   </p:cSld>
   <p:clrMapOvr>
     <a:masterClrMapping/>
@@ -2418,8 +3883,8 @@
 </file>
 
 <file path=ppt/slideMasters/slideMaster1.xml><?xml version="1.0" encoding="utf-8"?>
-<p:sldMaster xmlns:a="http://schemas.openxmlformats.org/drawingml/2006/main" xmlns:r="http://schemas.openxmlformats.org/officeDocument/2006/relationships" xmlns:p="http://schemas.openxmlformats.org/presentationml/2006/main">
-  <p:cSld>
+<p:sldMaster xmlns:a="http://schemas.openxmlformats.org/drawingml/2006/main" xmlns:r="http://schemas.openxmlformats.org/officeDocument/2006/relationships" xmlns:p="http://schemas.openxmlformats.org/presentationml/2006/main" xmlns:m="http://schemas.openxmlformats.org/officeDocument/2006/math" xmlns:w="http://schemas.openxmlformats.org/wordprocessingml/2006/main" preserve="0">
+  <p:cSld name="">
     <p:bg>
       <p:bgRef idx="1001">
         <a:schemeClr val="bg1"/>
@@ -2431,7 +3896,7 @@
         <p:cNvGrpSpPr/>
         <p:nvPr/>
       </p:nvGrpSpPr>
-      <p:grpSpPr>
+      <p:grpSpPr bwMode="auto">
         <a:xfrm>
           <a:off x="0" y="0"/>
           <a:ext cx="0" cy="0"/>
@@ -2441,7 +3906,7 @@
       </p:grpSpPr>
       <p:sp>
         <p:nvSpPr>
-          <p:cNvPr id="2" name="Title Placeholder 1"/>
+          <p:cNvPr id="1917881162" name="Title Placeholder 1"/>
           <p:cNvSpPr>
             <a:spLocks noGrp="1"/>
           </p:cNvSpPr>
@@ -2449,7 +3914,7 @@
             <p:ph type="title"/>
           </p:nvPr>
         </p:nvSpPr>
-        <p:spPr>
+        <p:spPr bwMode="auto">
           <a:xfrm>
             <a:off x="838200" y="365125"/>
             <a:ext cx="10515600" cy="1325563"/>
@@ -2464,8 +3929,11 @@
           </a:bodyPr>
           <a:lstStyle/>
           <a:p>
-            <a:r>
-              <a:rPr lang="en-US" smtClean="0"/>
+            <a:pPr>
+              <a:defRPr/>
+            </a:pPr>
+            <a:r>
+              <a:rPr lang="en-US"/>
               <a:t>Click to edit Master title style</a:t>
             </a:r>
             <a:endParaRPr lang="en-US"/>
@@ -2474,7 +3942,7 @@
       </p:sp>
       <p:sp>
         <p:nvSpPr>
-          <p:cNvPr id="3" name="Text Placeholder 2"/>
+          <p:cNvPr id="65191838" name="Text Placeholder 2"/>
           <p:cNvSpPr>
             <a:spLocks noGrp="1"/>
           </p:cNvSpPr>
@@ -2482,7 +3950,7 @@
             <p:ph type="body" idx="1"/>
           </p:nvPr>
         </p:nvSpPr>
-        <p:spPr>
+        <p:spPr bwMode="auto">
           <a:xfrm>
             <a:off x="838200" y="1825625"/>
             <a:ext cx="10515600" cy="4351338"/>
@@ -2497,37 +3965,51 @@
           </a:bodyPr>
           <a:lstStyle/>
           <a:p>
-            <a:pPr lvl="0"/>
-            <a:r>
-              <a:rPr lang="en-US" smtClean="0"/>
+            <a:pPr lvl="0">
+              <a:defRPr/>
+            </a:pPr>
+            <a:r>
+              <a:rPr lang="en-US"/>
               <a:t>Edit Master text styles</a:t>
             </a:r>
-          </a:p>
-          <a:p>
-            <a:pPr lvl="1"/>
-            <a:r>
-              <a:rPr lang="en-US" smtClean="0"/>
+            <a:endParaRPr/>
+          </a:p>
+          <a:p>
+            <a:pPr lvl="1">
+              <a:defRPr/>
+            </a:pPr>
+            <a:r>
+              <a:rPr lang="en-US"/>
               <a:t>Second level</a:t>
             </a:r>
-          </a:p>
-          <a:p>
-            <a:pPr lvl="2"/>
-            <a:r>
-              <a:rPr lang="en-US" smtClean="0"/>
+            <a:endParaRPr/>
+          </a:p>
+          <a:p>
+            <a:pPr lvl="2">
+              <a:defRPr/>
+            </a:pPr>
+            <a:r>
+              <a:rPr lang="en-US"/>
               <a:t>Third level</a:t>
             </a:r>
-          </a:p>
-          <a:p>
-            <a:pPr lvl="3"/>
-            <a:r>
-              <a:rPr lang="en-US" smtClean="0"/>
+            <a:endParaRPr/>
+          </a:p>
+          <a:p>
+            <a:pPr lvl="3">
+              <a:defRPr/>
+            </a:pPr>
+            <a:r>
+              <a:rPr lang="en-US"/>
               <a:t>Fourth level</a:t>
             </a:r>
-          </a:p>
-          <a:p>
-            <a:pPr lvl="4"/>
-            <a:r>
-              <a:rPr lang="en-US" smtClean="0"/>
+            <a:endParaRPr/>
+          </a:p>
+          <a:p>
+            <a:pPr lvl="4">
+              <a:defRPr/>
+            </a:pPr>
+            <a:r>
+              <a:rPr lang="en-US"/>
               <a:t>Fifth level</a:t>
             </a:r>
             <a:endParaRPr lang="en-US"/>
@@ -2536,7 +4018,7 @@
       </p:sp>
       <p:sp>
         <p:nvSpPr>
-          <p:cNvPr id="4" name="Date Placeholder 3"/>
+          <p:cNvPr id="920113987" name="Date Placeholder 3"/>
           <p:cNvSpPr>
             <a:spLocks noGrp="1"/>
           </p:cNvSpPr>
@@ -2544,7 +4026,7 @@
             <p:ph type="dt" sz="half" idx="2"/>
           </p:nvPr>
         </p:nvSpPr>
-        <p:spPr>
+        <p:spPr bwMode="auto">
           <a:xfrm>
             <a:off x="838200" y="6356350"/>
             <a:ext cx="2743200" cy="365125"/>
@@ -2567,8 +4049,11 @@
             </a:lvl1pPr>
           </a:lstStyle>
           <a:p>
+            <a:pPr>
+              <a:defRPr/>
+            </a:pPr>
             <a:fld id="{EDBC742C-A8E5-4E57-BD43-F0B8F462B862}" type="datetimeFigureOut">
-              <a:rPr lang="en-US" smtClean="0"/>
+              <a:rPr lang="en-US"/>
               <a:t>4/1/2026</a:t>
             </a:fld>
             <a:endParaRPr lang="en-US"/>
@@ -2577,7 +4062,7 @@
       </p:sp>
       <p:sp>
         <p:nvSpPr>
-          <p:cNvPr id="5" name="Footer Placeholder 4"/>
+          <p:cNvPr id="495998900" name="Footer Placeholder 4"/>
           <p:cNvSpPr>
             <a:spLocks noGrp="1"/>
           </p:cNvSpPr>
@@ -2585,7 +4070,7 @@
             <p:ph type="ftr" sz="quarter" idx="3"/>
           </p:nvPr>
         </p:nvSpPr>
-        <p:spPr>
+        <p:spPr bwMode="auto">
           <a:xfrm>
             <a:off x="4038600" y="6356350"/>
             <a:ext cx="4114800" cy="365125"/>
@@ -2608,13 +4093,16 @@
             </a:lvl1pPr>
           </a:lstStyle>
           <a:p>
-            <a:endParaRPr lang="en-US"/>
-          </a:p>
-        </p:txBody>
-      </p:sp>
-      <p:sp>
-        <p:nvSpPr>
-          <p:cNvPr id="6" name="Slide Number Placeholder 5"/>
+            <a:pPr>
+              <a:defRPr/>
+            </a:pPr>
+            <a:endParaRPr lang="en-US"/>
+          </a:p>
+        </p:txBody>
+      </p:sp>
+      <p:sp>
+        <p:nvSpPr>
+          <p:cNvPr id="930051364" name="Slide Number Placeholder 5"/>
           <p:cNvSpPr>
             <a:spLocks noGrp="1"/>
           </p:cNvSpPr>
@@ -2622,7 +4110,7 @@
             <p:ph type="sldNum" sz="quarter" idx="4"/>
           </p:nvPr>
         </p:nvSpPr>
-        <p:spPr>
+        <p:spPr bwMode="auto">
           <a:xfrm>
             <a:off x="8610600" y="6356350"/>
             <a:ext cx="2743200" cy="365125"/>
@@ -2645,8 +4133,11 @@
             </a:lvl1pPr>
           </a:lstStyle>
           <a:p>
+            <a:pPr>
+              <a:defRPr/>
+            </a:pPr>
             <a:fld id="{FD8C485D-1393-4FBB-854E-BDC6A27E3064}" type="slidenum">
-              <a:rPr lang="en-US" smtClean="0"/>
+              <a:rPr lang="en-US"/>
               <a:t>‹#›</a:t>
             </a:fld>
             <a:endParaRPr lang="en-US"/>
@@ -2654,11 +4145,6 @@
         </p:txBody>
       </p:sp>
     </p:spTree>
-    <p:extLst>
-      <p:ext uri="{BB962C8B-B14F-4D97-AF65-F5344CB8AC3E}">
-        <p14:creationId xmlns:p14="http://schemas.microsoft.com/office/powerpoint/2010/main" val="3878809940"/>
-      </p:ext>
-    </p:extLst>
   </p:cSld>
   <p:clrMap bg1="lt1" tx1="dk1" bg2="lt2" tx2="dk2" accent1="accent1" accent2="accent2" accent3="accent3" accent4="accent4" accent5="accent5" accent6="accent6" hlink="hlink" folHlink="folHlink"/>
   <p:sldLayoutIdLst>
@@ -2676,15 +4162,15 @@
   </p:sldLayoutIdLst>
   <p:txStyles>
     <p:titleStyle>
-      <a:lvl1pPr algn="l" defTabSz="914400" rtl="0" eaLnBrk="1" latinLnBrk="0" hangingPunct="1">
+      <a:lvl1pPr algn="l" defTabSz="914400" rtl="0">
         <a:lnSpc>
           <a:spcPct val="90000"/>
         </a:lnSpc>
         <a:spcBef>
-          <a:spcPct val="0"/>
+          <a:spcPts val="0"/>
         </a:spcBef>
         <a:buNone/>
-        <a:defRPr sz="4400" kern="1200">
+        <a:defRPr sz="4400">
           <a:solidFill>
             <a:schemeClr val="tx1"/>
           </a:solidFill>
@@ -2695,16 +4181,16 @@
       </a:lvl1pPr>
     </p:titleStyle>
     <p:bodyStyle>
-      <a:lvl1pPr marL="228600" indent="-228600" algn="l" defTabSz="914400" rtl="0" eaLnBrk="1" latinLnBrk="0" hangingPunct="1">
+      <a:lvl1pPr marL="228600" indent="-228600" algn="l" defTabSz="914400" rtl="0">
         <a:lnSpc>
           <a:spcPct val="90000"/>
         </a:lnSpc>
         <a:spcBef>
           <a:spcPts val="1000"/>
         </a:spcBef>
-        <a:buFont typeface="Arial" panose="020B0604020202020204" pitchFamily="34" charset="0"/>
+        <a:buFont typeface="Arial"/>
         <a:buChar char="•"/>
-        <a:defRPr sz="2800" kern="1200">
+        <a:defRPr sz="2800">
           <a:solidFill>
             <a:schemeClr val="tx1"/>
           </a:solidFill>
@@ -2713,16 +4199,16 @@
           <a:cs typeface="+mn-cs"/>
         </a:defRPr>
       </a:lvl1pPr>
-      <a:lvl2pPr marL="685800" indent="-228600" algn="l" defTabSz="914400" rtl="0" eaLnBrk="1" latinLnBrk="0" hangingPunct="1">
+      <a:lvl2pPr marL="685800" indent="-228600" algn="l" defTabSz="914400" rtl="0">
         <a:lnSpc>
           <a:spcPct val="90000"/>
         </a:lnSpc>
         <a:spcBef>
           <a:spcPts val="500"/>
         </a:spcBef>
-        <a:buFont typeface="Arial" panose="020B0604020202020204" pitchFamily="34" charset="0"/>
+        <a:buFont typeface="Arial"/>
         <a:buChar char="•"/>
-        <a:defRPr sz="2400" kern="1200">
+        <a:defRPr sz="2400">
           <a:solidFill>
             <a:schemeClr val="tx1"/>
           </a:solidFill>
@@ -2731,16 +4217,16 @@
           <a:cs typeface="+mn-cs"/>
         </a:defRPr>
       </a:lvl2pPr>
-      <a:lvl3pPr marL="1143000" indent="-228600" algn="l" defTabSz="914400" rtl="0" eaLnBrk="1" latinLnBrk="0" hangingPunct="1">
+      <a:lvl3pPr marL="1143000" indent="-228600" algn="l" defTabSz="914400" rtl="0">
         <a:lnSpc>
           <a:spcPct val="90000"/>
         </a:lnSpc>
         <a:spcBef>
           <a:spcPts val="500"/>
         </a:spcBef>
-        <a:buFont typeface="Arial" panose="020B0604020202020204" pitchFamily="34" charset="0"/>
+        <a:buFont typeface="Arial"/>
         <a:buChar char="•"/>
-        <a:defRPr sz="2000" kern="1200">
+        <a:defRPr sz="2000">
           <a:solidFill>
             <a:schemeClr val="tx1"/>
           </a:solidFill>
@@ -2749,16 +4235,16 @@
           <a:cs typeface="+mn-cs"/>
         </a:defRPr>
       </a:lvl3pPr>
-      <a:lvl4pPr marL="1600200" indent="-228600" algn="l" defTabSz="914400" rtl="0" eaLnBrk="1" latinLnBrk="0" hangingPunct="1">
+      <a:lvl4pPr marL="1600200" indent="-228600" algn="l" defTabSz="914400" rtl="0">
         <a:lnSpc>
           <a:spcPct val="90000"/>
         </a:lnSpc>
         <a:spcBef>
           <a:spcPts val="500"/>
         </a:spcBef>
-        <a:buFont typeface="Arial" panose="020B0604020202020204" pitchFamily="34" charset="0"/>
+        <a:buFont typeface="Arial"/>
         <a:buChar char="•"/>
-        <a:defRPr sz="1800" kern="1200">
+        <a:defRPr sz="1800">
           <a:solidFill>
             <a:schemeClr val="tx1"/>
           </a:solidFill>
@@ -2767,16 +4253,16 @@
           <a:cs typeface="+mn-cs"/>
         </a:defRPr>
       </a:lvl4pPr>
-      <a:lvl5pPr marL="2057400" indent="-228600" algn="l" defTabSz="914400" rtl="0" eaLnBrk="1" latinLnBrk="0" hangingPunct="1">
+      <a:lvl5pPr marL="2057400" indent="-228600" algn="l" defTabSz="914400" rtl="0">
         <a:lnSpc>
           <a:spcPct val="90000"/>
         </a:lnSpc>
         <a:spcBef>
           <a:spcPts val="500"/>
         </a:spcBef>
-        <a:buFont typeface="Arial" panose="020B0604020202020204" pitchFamily="34" charset="0"/>
+        <a:buFont typeface="Arial"/>
         <a:buChar char="•"/>
-        <a:defRPr sz="1800" kern="1200">
+        <a:defRPr sz="1800">
           <a:solidFill>
             <a:schemeClr val="tx1"/>
           </a:solidFill>
@@ -2785,16 +4271,16 @@
           <a:cs typeface="+mn-cs"/>
         </a:defRPr>
       </a:lvl5pPr>
-      <a:lvl6pPr marL="2514600" indent="-228600" algn="l" defTabSz="914400" rtl="0" eaLnBrk="1" latinLnBrk="0" hangingPunct="1">
+      <a:lvl6pPr marL="2514600" indent="-228600" algn="l" defTabSz="914400" rtl="0">
         <a:lnSpc>
           <a:spcPct val="90000"/>
         </a:lnSpc>
         <a:spcBef>
           <a:spcPts val="500"/>
         </a:spcBef>
-        <a:buFont typeface="Arial" panose="020B0604020202020204" pitchFamily="34" charset="0"/>
+        <a:buFont typeface="Arial"/>
         <a:buChar char="•"/>
-        <a:defRPr sz="1800" kern="1200">
+        <a:defRPr sz="1800">
           <a:solidFill>
             <a:schemeClr val="tx1"/>
           </a:solidFill>
@@ -2803,16 +4289,16 @@
           <a:cs typeface="+mn-cs"/>
         </a:defRPr>
       </a:lvl6pPr>
-      <a:lvl7pPr marL="2971800" indent="-228600" algn="l" defTabSz="914400" rtl="0" eaLnBrk="1" latinLnBrk="0" hangingPunct="1">
+      <a:lvl7pPr marL="2971800" indent="-228600" algn="l" defTabSz="914400" rtl="0">
         <a:lnSpc>
           <a:spcPct val="90000"/>
         </a:lnSpc>
         <a:spcBef>
           <a:spcPts val="500"/>
         </a:spcBef>
-        <a:buFont typeface="Arial" panose="020B0604020202020204" pitchFamily="34" charset="0"/>
+        <a:buFont typeface="Arial"/>
         <a:buChar char="•"/>
-        <a:defRPr sz="1800" kern="1200">
+        <a:defRPr sz="1800">
           <a:solidFill>
             <a:schemeClr val="tx1"/>
           </a:solidFill>
@@ -2821,16 +4307,16 @@
           <a:cs typeface="+mn-cs"/>
         </a:defRPr>
       </a:lvl7pPr>
-      <a:lvl8pPr marL="3429000" indent="-228600" algn="l" defTabSz="914400" rtl="0" eaLnBrk="1" latinLnBrk="0" hangingPunct="1">
+      <a:lvl8pPr marL="3429000" indent="-228600" algn="l" defTabSz="914400" rtl="0">
         <a:lnSpc>
           <a:spcPct val="90000"/>
         </a:lnSpc>
         <a:spcBef>
           <a:spcPts val="500"/>
         </a:spcBef>
-        <a:buFont typeface="Arial" panose="020B0604020202020204" pitchFamily="34" charset="0"/>
+        <a:buFont typeface="Arial"/>
         <a:buChar char="•"/>
-        <a:defRPr sz="1800" kern="1200">
+        <a:defRPr sz="1800">
           <a:solidFill>
             <a:schemeClr val="tx1"/>
           </a:solidFill>
@@ -2839,16 +4325,16 @@
           <a:cs typeface="+mn-cs"/>
         </a:defRPr>
       </a:lvl8pPr>
-      <a:lvl9pPr marL="3886200" indent="-228600" algn="l" defTabSz="914400" rtl="0" eaLnBrk="1" latinLnBrk="0" hangingPunct="1">
+      <a:lvl9pPr marL="3886200" indent="-228600" algn="l" defTabSz="914400" rtl="0">
         <a:lnSpc>
           <a:spcPct val="90000"/>
         </a:lnSpc>
         <a:spcBef>
           <a:spcPts val="500"/>
         </a:spcBef>
-        <a:buFont typeface="Arial" panose="020B0604020202020204" pitchFamily="34" charset="0"/>
+        <a:buFont typeface="Arial"/>
         <a:buChar char="•"/>
-        <a:defRPr sz="1800" kern="1200">
+        <a:defRPr sz="1800">
           <a:solidFill>
             <a:schemeClr val="tx1"/>
           </a:solidFill>
@@ -2862,8 +4348,8 @@
       <a:defPPr>
         <a:defRPr lang="en-US"/>
       </a:defPPr>
-      <a:lvl1pPr marL="0" algn="l" defTabSz="914400" rtl="0" eaLnBrk="1" latinLnBrk="0" hangingPunct="1">
-        <a:defRPr sz="1800" kern="1200">
+      <a:lvl1pPr marL="0" algn="l" defTabSz="914400" rtl="0">
+        <a:defRPr sz="1800">
           <a:solidFill>
             <a:schemeClr val="tx1"/>
           </a:solidFill>
@@ -2872,8 +4358,8 @@
           <a:cs typeface="+mn-cs"/>
         </a:defRPr>
       </a:lvl1pPr>
-      <a:lvl2pPr marL="457200" algn="l" defTabSz="914400" rtl="0" eaLnBrk="1" latinLnBrk="0" hangingPunct="1">
-        <a:defRPr sz="1800" kern="1200">
+      <a:lvl2pPr marL="457200" algn="l" defTabSz="914400" rtl="0">
+        <a:defRPr sz="1800">
           <a:solidFill>
             <a:schemeClr val="tx1"/>
           </a:solidFill>
@@ -2882,8 +4368,8 @@
           <a:cs typeface="+mn-cs"/>
         </a:defRPr>
       </a:lvl2pPr>
-      <a:lvl3pPr marL="914400" algn="l" defTabSz="914400" rtl="0" eaLnBrk="1" latinLnBrk="0" hangingPunct="1">
-        <a:defRPr sz="1800" kern="1200">
+      <a:lvl3pPr marL="914400" algn="l" defTabSz="914400" rtl="0">
+        <a:defRPr sz="1800">
           <a:solidFill>
             <a:schemeClr val="tx1"/>
           </a:solidFill>
@@ -2892,8 +4378,8 @@
           <a:cs typeface="+mn-cs"/>
         </a:defRPr>
       </a:lvl3pPr>
-      <a:lvl4pPr marL="1371600" algn="l" defTabSz="914400" rtl="0" eaLnBrk="1" latinLnBrk="0" hangingPunct="1">
-        <a:defRPr sz="1800" kern="1200">
+      <a:lvl4pPr marL="1371600" algn="l" defTabSz="914400" rtl="0">
+        <a:defRPr sz="1800">
           <a:solidFill>
             <a:schemeClr val="tx1"/>
           </a:solidFill>
@@ -2902,8 +4388,8 @@
           <a:cs typeface="+mn-cs"/>
         </a:defRPr>
       </a:lvl4pPr>
-      <a:lvl5pPr marL="1828800" algn="l" defTabSz="914400" rtl="0" eaLnBrk="1" latinLnBrk="0" hangingPunct="1">
-        <a:defRPr sz="1800" kern="1200">
+      <a:lvl5pPr marL="1828800" algn="l" defTabSz="914400" rtl="0">
+        <a:defRPr sz="1800">
           <a:solidFill>
             <a:schemeClr val="tx1"/>
           </a:solidFill>
@@ -2912,8 +4398,8 @@
           <a:cs typeface="+mn-cs"/>
         </a:defRPr>
       </a:lvl5pPr>
-      <a:lvl6pPr marL="2286000" algn="l" defTabSz="914400" rtl="0" eaLnBrk="1" latinLnBrk="0" hangingPunct="1">
-        <a:defRPr sz="1800" kern="1200">
+      <a:lvl6pPr marL="2286000" algn="l" defTabSz="914400" rtl="0">
+        <a:defRPr sz="1800">
           <a:solidFill>
             <a:schemeClr val="tx1"/>
           </a:solidFill>
@@ -2922,8 +4408,8 @@
           <a:cs typeface="+mn-cs"/>
         </a:defRPr>
       </a:lvl6pPr>
-      <a:lvl7pPr marL="2743200" algn="l" defTabSz="914400" rtl="0" eaLnBrk="1" latinLnBrk="0" hangingPunct="1">
-        <a:defRPr sz="1800" kern="1200">
+      <a:lvl7pPr marL="2743200" algn="l" defTabSz="914400" rtl="0">
+        <a:defRPr sz="1800">
           <a:solidFill>
             <a:schemeClr val="tx1"/>
           </a:solidFill>
@@ -2932,8 +4418,8 @@
           <a:cs typeface="+mn-cs"/>
         </a:defRPr>
       </a:lvl7pPr>
-      <a:lvl8pPr marL="3200400" algn="l" defTabSz="914400" rtl="0" eaLnBrk="1" latinLnBrk="0" hangingPunct="1">
-        <a:defRPr sz="1800" kern="1200">
+      <a:lvl8pPr marL="3200400" algn="l" defTabSz="914400" rtl="0">
+        <a:defRPr sz="1800">
           <a:solidFill>
             <a:schemeClr val="tx1"/>
           </a:solidFill>
@@ -2942,8 +4428,8 @@
           <a:cs typeface="+mn-cs"/>
         </a:defRPr>
       </a:lvl8pPr>
-      <a:lvl9pPr marL="3657600" algn="l" defTabSz="914400" rtl="0" eaLnBrk="1" latinLnBrk="0" hangingPunct="1">
-        <a:defRPr sz="1800" kern="1200">
+      <a:lvl9pPr marL="3657600" algn="l" defTabSz="914400" rtl="0">
+        <a:defRPr sz="1800">
           <a:solidFill>
             <a:schemeClr val="tx1"/>
           </a:solidFill>
@@ -2958,15 +4444,15 @@
 </file>
 
 <file path=ppt/slides/slide1.xml><?xml version="1.0" encoding="utf-8"?>
-<p:sld xmlns:a="http://schemas.openxmlformats.org/drawingml/2006/main" xmlns:r="http://schemas.openxmlformats.org/officeDocument/2006/relationships" xmlns:p="http://schemas.openxmlformats.org/presentationml/2006/main">
-  <p:cSld>
+<p:sld xmlns:a="http://schemas.openxmlformats.org/drawingml/2006/main" xmlns:r="http://schemas.openxmlformats.org/officeDocument/2006/relationships" xmlns:p="http://schemas.openxmlformats.org/presentationml/2006/main" xmlns:m="http://schemas.openxmlformats.org/officeDocument/2006/math" xmlns:w="http://schemas.openxmlformats.org/wordprocessingml/2006/main" xmlns:mc="http://schemas.openxmlformats.org/markup-compatibility/2006" showMasterPhAnim="0" showMasterSp="1" show="1">
+  <p:cSld name="">
     <p:spTree>
       <p:nvGrpSpPr>
         <p:cNvPr id="1" name=""/>
         <p:cNvGrpSpPr/>
         <p:nvPr/>
       </p:nvGrpSpPr>
-      <p:grpSpPr>
+      <p:grpSpPr bwMode="auto">
         <a:xfrm>
           <a:off x="0" y="0"/>
           <a:ext cx="0" cy="0"/>
@@ -2976,7 +4462,7 @@
       </p:grpSpPr>
       <p:sp>
         <p:nvSpPr>
-          <p:cNvPr id="2" name="Title 1"/>
+          <p:cNvPr id="1811312947" name="Title 1"/>
           <p:cNvSpPr>
             <a:spLocks noGrp="1"/>
           </p:cNvSpPr>
@@ -2984,27 +4470,31 @@
             <p:ph type="ctrTitle"/>
           </p:nvPr>
         </p:nvSpPr>
-        <p:spPr/>
+        <p:spPr bwMode="auto"/>
         <p:txBody>
           <a:bodyPr>
             <a:noAutofit/>
           </a:bodyPr>
           <a:lstStyle/>
           <a:p>
-            <a:r>
-              <a:rPr lang="en-US" sz="4400" b="1" dirty="0">
+            <a:pPr>
+              <a:defRPr/>
+            </a:pPr>
+            <a:r>
+              <a:rPr lang="en-US" sz="4400" b="1">
                 <a:solidFill>
                   <a:srgbClr val="FF0000"/>
                 </a:solidFill>
               </a:rPr>
               <a:t>Requirements of transmitter and receiver in WDM networks, types of tunable lasers, optical amplifiers, SOA and FOA, EDFA and EBFA.</a:t>
             </a:r>
-          </a:p>
-        </p:txBody>
-      </p:sp>
-      <p:sp>
-        <p:nvSpPr>
-          <p:cNvPr id="3" name="Subtitle 2"/>
+            <a:endParaRPr/>
+          </a:p>
+        </p:txBody>
+      </p:sp>
+      <p:sp>
+        <p:nvSpPr>
+          <p:cNvPr id="277475723" name="Subtitle 2"/>
           <p:cNvSpPr>
             <a:spLocks noGrp="1"/>
           </p:cNvSpPr>
@@ -3012,38 +4502,44 @@
             <p:ph type="subTitle" idx="1"/>
           </p:nvPr>
         </p:nvSpPr>
-        <p:spPr/>
-        <p:txBody>
-          <a:bodyPr/>
-          <a:lstStyle/>
-          <a:p>
+        <p:spPr bwMode="auto"/>
+        <p:txBody>
+          <a:bodyPr/>
+          <a:lstStyle/>
+          <a:p>
+            <a:pPr>
+              <a:defRPr/>
+            </a:pPr>
             <a:endParaRPr lang="en-US"/>
           </a:p>
         </p:txBody>
       </p:sp>
     </p:spTree>
-    <p:extLst>
-      <p:ext uri="{BB962C8B-B14F-4D97-AF65-F5344CB8AC3E}">
-        <p14:creationId xmlns:p14="http://schemas.microsoft.com/office/powerpoint/2010/main" val="4282694598"/>
-      </p:ext>
-    </p:extLst>
   </p:cSld>
   <p:clrMapOvr>
     <a:masterClrMapping/>
   </p:clrMapOvr>
+  <mc:AlternateContent xmlns:mc="http://schemas.openxmlformats.org/markup-compatibility/2006">
+    <mc:Choice xmlns:p159="http://schemas.microsoft.com/office/powerpoint/2015/09/main" xmlns:p14="http://schemas.microsoft.com/office/powerpoint/2010/main" Requires="p159">
+      <p:transition p14:dur="500" advClick="1"/>
+    </mc:Choice>
+    <mc:Fallback>
+      <p:transition advClick="1"/>
+    </mc:Fallback>
+  </mc:AlternateContent>
 </p:sld>
 </file>
 
 <file path=ppt/slides/slide10.xml><?xml version="1.0" encoding="utf-8"?>
-<p:sld xmlns:a="http://schemas.openxmlformats.org/drawingml/2006/main" xmlns:r="http://schemas.openxmlformats.org/officeDocument/2006/relationships" xmlns:p="http://schemas.openxmlformats.org/presentationml/2006/main">
-  <p:cSld>
+<p:sld xmlns:a="http://schemas.openxmlformats.org/drawingml/2006/main" xmlns:r="http://schemas.openxmlformats.org/officeDocument/2006/relationships" xmlns:p="http://schemas.openxmlformats.org/presentationml/2006/main" xmlns:m="http://schemas.openxmlformats.org/officeDocument/2006/math" xmlns:w="http://schemas.openxmlformats.org/wordprocessingml/2006/main" xmlns:mc="http://schemas.openxmlformats.org/markup-compatibility/2006" showMasterPhAnim="0" showMasterSp="1" show="1">
+  <p:cSld name="">
     <p:spTree>
       <p:nvGrpSpPr>
         <p:cNvPr id="1" name=""/>
         <p:cNvGrpSpPr/>
         <p:nvPr/>
       </p:nvGrpSpPr>
-      <p:grpSpPr>
+      <p:grpSpPr bwMode="auto">
         <a:xfrm>
           <a:off x="0" y="0"/>
           <a:ext cx="0" cy="0"/>
@@ -3053,7 +4549,7 @@
       </p:grpSpPr>
       <p:sp>
         <p:nvSpPr>
-          <p:cNvPr id="2" name="Title 1"/>
+          <p:cNvPr id="1903345258" name="Title 1"/>
           <p:cNvSpPr>
             <a:spLocks noGrp="1"/>
           </p:cNvSpPr>
@@ -3061,22 +4557,25 @@
             <p:ph type="title"/>
           </p:nvPr>
         </p:nvSpPr>
-        <p:spPr/>
-        <p:txBody>
-          <a:bodyPr/>
-          <a:lstStyle/>
-          <a:p>
-            <a:r>
-              <a:rPr lang="en-US" dirty="0" smtClean="0"/>
+        <p:spPr bwMode="auto"/>
+        <p:txBody>
+          <a:bodyPr/>
+          <a:lstStyle/>
+          <a:p>
+            <a:pPr>
+              <a:defRPr/>
+            </a:pPr>
+            <a:r>
+              <a:rPr lang="en-US"/>
               <a:t>Example: The Highway Analogy</a:t>
             </a:r>
-            <a:endParaRPr lang="en-US" dirty="0"/>
-          </a:p>
-        </p:txBody>
-      </p:sp>
-      <p:sp>
-        <p:nvSpPr>
-          <p:cNvPr id="3" name="Content Placeholder 2"/>
+            <a:endParaRPr lang="en-US"/>
+          </a:p>
+        </p:txBody>
+      </p:sp>
+      <p:sp>
+        <p:nvSpPr>
+          <p:cNvPr id="332510224" name="Content Placeholder 2"/>
           <p:cNvSpPr>
             <a:spLocks noGrp="1"/>
           </p:cNvSpPr>
@@ -3084,28 +4583,34 @@
             <p:ph idx="1"/>
           </p:nvPr>
         </p:nvSpPr>
-        <p:spPr/>
-        <p:txBody>
-          <a:bodyPr/>
-          <a:lstStyle/>
-          <a:p>
-            <a:r>
-              <a:rPr lang="en-US" dirty="0" smtClean="0"/>
+        <p:spPr bwMode="auto"/>
+        <p:txBody>
+          <a:bodyPr/>
+          <a:lstStyle/>
+          <a:p>
+            <a:pPr>
+              <a:defRPr/>
+            </a:pPr>
+            <a:r>
+              <a:rPr lang="en-US"/>
               <a:t>Imagine a 40-lane highway (WDM Fiber).</a:t>
             </a:r>
-          </a:p>
-          <a:p>
-            <a:pPr lvl="1"/>
-            <a:r>
-              <a:rPr lang="en-US" b="1" dirty="0" smtClean="0"/>
+            <a:endParaRPr/>
+          </a:p>
+          <a:p>
+            <a:pPr lvl="1">
+              <a:defRPr/>
+            </a:pPr>
+            <a:r>
+              <a:rPr lang="en-US" b="1"/>
               <a:t>Transmitter:</a:t>
             </a:r>
             <a:r>
-              <a:rPr lang="en-US" dirty="0" smtClean="0"/>
+              <a:rPr lang="en-US"/>
               <a:t> A specialized ramp that ensures </a:t>
             </a:r>
             <a:r>
-              <a:rPr lang="en-US" dirty="0" smtClean="0">
+              <a:rPr lang="en-US">
                 <a:solidFill>
                   <a:srgbClr val="FF0000"/>
                 </a:solidFill>
@@ -3113,22 +4618,25 @@
               <a:t>only Blue cars enter Lane 1 and only Red cars enter Lane 2</a:t>
             </a:r>
             <a:r>
-              <a:rPr lang="en-US" dirty="0" smtClean="0"/>
+              <a:rPr lang="en-US"/>
               <a:t>.</a:t>
             </a:r>
-          </a:p>
-          <a:p>
-            <a:pPr lvl="1"/>
-            <a:r>
-              <a:rPr lang="en-US" b="1" dirty="0" smtClean="0"/>
+            <a:endParaRPr/>
+          </a:p>
+          <a:p>
+            <a:pPr lvl="1">
+              <a:defRPr/>
+            </a:pPr>
+            <a:r>
+              <a:rPr lang="en-US" b="1"/>
               <a:t>Receiver:</a:t>
             </a:r>
             <a:r>
-              <a:rPr lang="en-US" dirty="0" smtClean="0"/>
+              <a:rPr lang="en-US"/>
               <a:t> A specialized exit that </a:t>
             </a:r>
             <a:r>
-              <a:rPr lang="en-US" dirty="0" smtClean="0">
+              <a:rPr lang="en-US">
                 <a:solidFill>
                   <a:srgbClr val="FF0000"/>
                 </a:solidFill>
@@ -3136,22 +4644,25 @@
               <a:t>only lets the Blue cars off at a specific destination</a:t>
             </a:r>
             <a:r>
-              <a:rPr lang="en-US" dirty="0" smtClean="0"/>
+              <a:rPr lang="en-US"/>
               <a:t>.</a:t>
             </a:r>
-          </a:p>
-          <a:p>
-            <a:pPr lvl="1"/>
-            <a:r>
-              <a:rPr lang="en-US" b="1" dirty="0" smtClean="0"/>
+            <a:endParaRPr/>
+          </a:p>
+          <a:p>
+            <a:pPr lvl="1">
+              <a:defRPr/>
+            </a:pPr>
+            <a:r>
+              <a:rPr lang="en-US" b="1"/>
               <a:t>Amplifier (EDFA):</a:t>
             </a:r>
             <a:r>
-              <a:rPr lang="en-US" dirty="0" smtClean="0"/>
+              <a:rPr lang="en-US"/>
               <a:t> A "speed boost" zone in the middle of the highway that </a:t>
             </a:r>
             <a:r>
-              <a:rPr lang="en-US" dirty="0" smtClean="0">
+              <a:rPr lang="en-US">
                 <a:solidFill>
                   <a:srgbClr val="FF0000"/>
                 </a:solidFill>
@@ -3159,11 +4670,11 @@
               <a:t>gives every car more fuel as they drive through</a:t>
             </a:r>
             <a:r>
-              <a:rPr lang="en-US" dirty="0" smtClean="0"/>
+              <a:rPr lang="en-US"/>
               <a:t>, </a:t>
             </a:r>
             <a:r>
-              <a:rPr lang="en-US" dirty="0" smtClean="0">
+              <a:rPr lang="en-US">
                 <a:solidFill>
                   <a:srgbClr val="FF0000"/>
                 </a:solidFill>
@@ -3171,39 +4682,45 @@
               <a:t>without them having to stop at a gas station</a:t>
             </a:r>
             <a:r>
-              <a:rPr lang="en-US" dirty="0" smtClean="0"/>
+              <a:rPr lang="en-US"/>
               <a:t>.</a:t>
             </a:r>
-          </a:p>
-          <a:p>
-            <a:pPr lvl="1"/>
-            <a:endParaRPr lang="en-US" dirty="0"/>
+            <a:endParaRPr/>
+          </a:p>
+          <a:p>
+            <a:pPr lvl="1">
+              <a:defRPr/>
+            </a:pPr>
+            <a:endParaRPr lang="en-US"/>
           </a:p>
         </p:txBody>
       </p:sp>
     </p:spTree>
-    <p:extLst>
-      <p:ext uri="{BB962C8B-B14F-4D97-AF65-F5344CB8AC3E}">
-        <p14:creationId xmlns:p14="http://schemas.microsoft.com/office/powerpoint/2010/main" val="1429277239"/>
-      </p:ext>
-    </p:extLst>
   </p:cSld>
   <p:clrMapOvr>
     <a:masterClrMapping/>
   </p:clrMapOvr>
+  <mc:AlternateContent xmlns:mc="http://schemas.openxmlformats.org/markup-compatibility/2006">
+    <mc:Choice xmlns:p159="http://schemas.microsoft.com/office/powerpoint/2015/09/main" xmlns:p14="http://schemas.microsoft.com/office/powerpoint/2010/main" Requires="p159">
+      <p:transition p14:dur="500" advClick="1"/>
+    </mc:Choice>
+    <mc:Fallback>
+      <p:transition advClick="1"/>
+    </mc:Fallback>
+  </mc:AlternateContent>
 </p:sld>
 </file>
 
 <file path=ppt/slides/slide11.xml><?xml version="1.0" encoding="utf-8"?>
-<p:sld xmlns:a="http://schemas.openxmlformats.org/drawingml/2006/main" xmlns:r="http://schemas.openxmlformats.org/officeDocument/2006/relationships" xmlns:p="http://schemas.openxmlformats.org/presentationml/2006/main">
-  <p:cSld>
+<p:sld xmlns:a="http://schemas.openxmlformats.org/drawingml/2006/main" xmlns:r="http://schemas.openxmlformats.org/officeDocument/2006/relationships" xmlns:p="http://schemas.openxmlformats.org/presentationml/2006/main" xmlns:m="http://schemas.openxmlformats.org/officeDocument/2006/math" xmlns:w="http://schemas.openxmlformats.org/wordprocessingml/2006/main" xmlns:mc="http://schemas.openxmlformats.org/markup-compatibility/2006" showMasterPhAnim="0" showMasterSp="1" show="1">
+  <p:cSld name="">
     <p:spTree>
       <p:nvGrpSpPr>
         <p:cNvPr id="1" name=""/>
         <p:cNvGrpSpPr/>
         <p:nvPr/>
       </p:nvGrpSpPr>
-      <p:grpSpPr>
+      <p:grpSpPr bwMode="auto">
         <a:xfrm>
           <a:off x="0" y="0"/>
           <a:ext cx="0" cy="0"/>
@@ -3213,7 +4730,7 @@
       </p:grpSpPr>
       <p:sp>
         <p:nvSpPr>
-          <p:cNvPr id="2" name="Title 1"/>
+          <p:cNvPr id="1358113167" name="Title 1"/>
           <p:cNvSpPr>
             <a:spLocks noGrp="1"/>
           </p:cNvSpPr>
@@ -3221,7 +4738,7 @@
             <p:ph type="title"/>
           </p:nvPr>
         </p:nvSpPr>
-        <p:spPr>
+        <p:spPr bwMode="auto">
           <a:xfrm>
             <a:off x="838200" y="0"/>
             <a:ext cx="10515600" cy="1325563"/>
@@ -3231,17 +4748,20 @@
           <a:bodyPr/>
           <a:lstStyle/>
           <a:p>
-            <a:r>
-              <a:rPr lang="en-US" dirty="0" smtClean="0"/>
+            <a:pPr>
+              <a:defRPr/>
+            </a:pPr>
+            <a:r>
+              <a:rPr lang="en-US"/>
               <a:t>WDM Power Calculation</a:t>
             </a:r>
-            <a:endParaRPr lang="en-US" dirty="0"/>
-          </a:p>
-        </p:txBody>
-      </p:sp>
-      <p:sp>
-        <p:nvSpPr>
-          <p:cNvPr id="3" name="Content Placeholder 2"/>
+            <a:endParaRPr lang="en-US"/>
+          </a:p>
+        </p:txBody>
+      </p:sp>
+      <p:sp>
+        <p:nvSpPr>
+          <p:cNvPr id="889408526" name="Content Placeholder 2"/>
           <p:cNvSpPr>
             <a:spLocks noGrp="1"/>
           </p:cNvSpPr>
@@ -3249,7 +4769,7 @@
             <p:ph idx="1"/>
           </p:nvPr>
         </p:nvSpPr>
-        <p:spPr>
+        <p:spPr bwMode="auto">
           <a:xfrm>
             <a:off x="741484" y="920017"/>
             <a:ext cx="10515600" cy="4351338"/>
@@ -3259,24 +4779,27 @@
           <a:bodyPr/>
           <a:lstStyle/>
           <a:p>
-            <a:r>
-              <a:rPr lang="en-US" dirty="0" smtClean="0"/>
+            <a:pPr>
+              <a:defRPr/>
+            </a:pPr>
+            <a:r>
+              <a:rPr lang="en-US"/>
               <a:t>A WDM system has 8 channels. Each channel enters an EDFA with a power of </a:t>
             </a:r>
             <a:r>
-              <a:rPr lang="en-US" b="1" dirty="0" smtClean="0"/>
+              <a:rPr lang="en-US" b="1"/>
               <a:t>-20 </a:t>
             </a:r>
             <a:r>
-              <a:rPr lang="en-US" b="1" dirty="0" err="1" smtClean="0"/>
+              <a:rPr lang="en-US" b="1"/>
               <a:t>dBm</a:t>
             </a:r>
             <a:r>
-              <a:rPr lang="en-US" dirty="0" smtClean="0"/>
+              <a:rPr lang="en-US"/>
               <a:t>. The </a:t>
             </a:r>
             <a:r>
-              <a:rPr lang="en-US" dirty="0" smtClean="0">
+              <a:rPr lang="en-US">
                 <a:solidFill>
                   <a:srgbClr val="FF0000"/>
                 </a:solidFill>
@@ -3284,82 +4807,88 @@
               <a:t>EDFA (Erbium-Doped Fiber Amplifier) </a:t>
             </a:r>
             <a:r>
-              <a:rPr lang="en-US" dirty="0" smtClean="0"/>
+              <a:rPr lang="en-US"/>
               <a:t>has a gain of </a:t>
             </a:r>
             <a:r>
-              <a:rPr lang="en-US" b="1" dirty="0" smtClean="0"/>
+              <a:rPr lang="en-US" b="1"/>
               <a:t>25 </a:t>
             </a:r>
             <a:r>
-              <a:rPr lang="en-US" b="1" dirty="0" err="1" smtClean="0"/>
+              <a:rPr lang="en-US" b="1"/>
               <a:t>dB</a:t>
             </a:r>
             <a:r>
-              <a:rPr lang="en-US" dirty="0" err="1" smtClean="0"/>
+              <a:rPr lang="en-US"/>
               <a:t>.</a:t>
             </a:r>
-            <a:endParaRPr lang="en-US" dirty="0" smtClean="0"/>
-          </a:p>
-          <a:p>
-            <a:pPr lvl="1"/>
-            <a:r>
-              <a:rPr lang="en-US" dirty="0" smtClean="0"/>
+            <a:endParaRPr lang="en-US"/>
+          </a:p>
+          <a:p>
+            <a:pPr lvl="1">
+              <a:defRPr/>
+            </a:pPr>
+            <a:r>
+              <a:rPr lang="en-US"/>
               <a:t>Calculate the output power of a single channel in </a:t>
             </a:r>
             <a:r>
-              <a:rPr lang="en-US" dirty="0" err="1" smtClean="0"/>
+              <a:rPr lang="en-US"/>
               <a:t>dBm</a:t>
             </a:r>
             <a:r>
-              <a:rPr lang="en-US" dirty="0" smtClean="0"/>
+              <a:rPr lang="en-US"/>
               <a:t>.</a:t>
             </a:r>
-          </a:p>
-          <a:p>
-            <a:pPr lvl="1"/>
-            <a:r>
-              <a:rPr lang="en-US" dirty="0" smtClean="0"/>
+            <a:endParaRPr/>
+          </a:p>
+          <a:p>
+            <a:pPr lvl="1">
+              <a:defRPr/>
+            </a:pPr>
+            <a:r>
+              <a:rPr lang="en-US"/>
               <a:t>Calculate the total output power of the EDFA in </a:t>
             </a:r>
             <a:r>
-              <a:rPr lang="en-US" dirty="0" err="1" smtClean="0"/>
+              <a:rPr lang="en-US"/>
               <a:t>milliwatts</a:t>
             </a:r>
             <a:r>
-              <a:rPr lang="en-US" dirty="0" smtClean="0"/>
+              <a:rPr lang="en-US"/>
               <a:t> (</a:t>
             </a:r>
             <a:r>
-              <a:rPr lang="en-US" dirty="0" err="1" smtClean="0"/>
+              <a:rPr lang="en-US"/>
               <a:t>mW</a:t>
             </a:r>
             <a:r>
-              <a:rPr lang="en-US" dirty="0" smtClean="0"/>
+              <a:rPr lang="en-US"/>
               <a:t>).</a:t>
             </a:r>
-          </a:p>
-          <a:p>
-            <a:pPr lvl="1"/>
-            <a:endParaRPr lang="en-US" dirty="0"/>
+            <a:endParaRPr/>
+          </a:p>
+          <a:p>
+            <a:pPr lvl="1">
+              <a:defRPr/>
+            </a:pPr>
+            <a:endParaRPr lang="en-US"/>
           </a:p>
         </p:txBody>
       </p:sp>
       <p:pic>
         <p:nvPicPr>
-          <p:cNvPr id="4" name="Picture 3"/>
+          <p:cNvPr id="922645599" name="Picture 3"/>
           <p:cNvPicPr>
             <a:picLocks noChangeAspect="1"/>
           </p:cNvPicPr>
           <p:nvPr/>
         </p:nvPicPr>
-        <p:blipFill>
-          <a:blip r:embed="rId2"/>
-          <a:stretch>
-            <a:fillRect/>
-          </a:stretch>
+        <p:blipFill rotWithShape="1">
+          <a:blip r:embed="rId3"/>
+          <a:stretch/>
         </p:blipFill>
-        <p:spPr>
+        <p:spPr bwMode="auto">
           <a:xfrm>
             <a:off x="1985875" y="2937404"/>
             <a:ext cx="8490643" cy="3050158"/>
@@ -3370,28 +4899,31 @@
         </p:spPr>
       </p:pic>
     </p:spTree>
-    <p:extLst>
-      <p:ext uri="{BB962C8B-B14F-4D97-AF65-F5344CB8AC3E}">
-        <p14:creationId xmlns:p14="http://schemas.microsoft.com/office/powerpoint/2010/main" val="3464708216"/>
-      </p:ext>
-    </p:extLst>
   </p:cSld>
   <p:clrMapOvr>
     <a:masterClrMapping/>
   </p:clrMapOvr>
+  <mc:AlternateContent xmlns:mc="http://schemas.openxmlformats.org/markup-compatibility/2006">
+    <mc:Choice xmlns:p159="http://schemas.microsoft.com/office/powerpoint/2015/09/main" xmlns:p14="http://schemas.microsoft.com/office/powerpoint/2010/main" Requires="p159">
+      <p:transition p14:dur="500" advClick="1"/>
+    </mc:Choice>
+    <mc:Fallback>
+      <p:transition advClick="1"/>
+    </mc:Fallback>
+  </mc:AlternateContent>
 </p:sld>
 </file>
 
 <file path=ppt/slides/slide2.xml><?xml version="1.0" encoding="utf-8"?>
-<p:sld xmlns:a="http://schemas.openxmlformats.org/drawingml/2006/main" xmlns:r="http://schemas.openxmlformats.org/officeDocument/2006/relationships" xmlns:p="http://schemas.openxmlformats.org/presentationml/2006/main">
-  <p:cSld>
+<p:sld xmlns:a="http://schemas.openxmlformats.org/drawingml/2006/main" xmlns:r="http://schemas.openxmlformats.org/officeDocument/2006/relationships" xmlns:p="http://schemas.openxmlformats.org/presentationml/2006/main" xmlns:m="http://schemas.openxmlformats.org/officeDocument/2006/math" xmlns:w="http://schemas.openxmlformats.org/wordprocessingml/2006/main" xmlns:mc="http://schemas.openxmlformats.org/markup-compatibility/2006" showMasterPhAnim="0" showMasterSp="1" show="1">
+  <p:cSld name="">
     <p:spTree>
       <p:nvGrpSpPr>
         <p:cNvPr id="1" name=""/>
         <p:cNvGrpSpPr/>
         <p:nvPr/>
       </p:nvGrpSpPr>
-      <p:grpSpPr>
+      <p:grpSpPr bwMode="auto">
         <a:xfrm>
           <a:off x="0" y="0"/>
           <a:ext cx="0" cy="0"/>
@@ -3401,7 +4933,7 @@
       </p:grpSpPr>
       <p:sp>
         <p:nvSpPr>
-          <p:cNvPr id="2" name="Title 1"/>
+          <p:cNvPr id="1049071715" name="Title 1"/>
           <p:cNvSpPr>
             <a:spLocks noGrp="1"/>
           </p:cNvSpPr>
@@ -3409,26 +4941,29 @@
             <p:ph type="title"/>
           </p:nvPr>
         </p:nvSpPr>
-        <p:spPr/>
-        <p:txBody>
-          <a:bodyPr/>
-          <a:lstStyle/>
-          <a:p>
-            <a:r>
-              <a:rPr lang="en-US" b="1" dirty="0" smtClean="0"/>
+        <p:spPr bwMode="auto"/>
+        <p:txBody>
+          <a:bodyPr/>
+          <a:lstStyle/>
+          <a:p>
+            <a:pPr>
+              <a:defRPr/>
+            </a:pPr>
+            <a:r>
+              <a:rPr lang="en-US" b="1"/>
               <a:t>WDM (Wavelength Division Multiplexing)</a:t>
             </a:r>
             <a:r>
-              <a:rPr lang="en-US" dirty="0" smtClean="0"/>
+              <a:rPr lang="en-US"/>
               <a:t> </a:t>
             </a:r>
-            <a:endParaRPr lang="en-US" dirty="0"/>
-          </a:p>
-        </p:txBody>
-      </p:sp>
-      <p:sp>
-        <p:nvSpPr>
-          <p:cNvPr id="3" name="Content Placeholder 2"/>
+            <a:endParaRPr lang="en-US"/>
+          </a:p>
+        </p:txBody>
+      </p:sp>
+      <p:sp>
+        <p:nvSpPr>
+          <p:cNvPr id="1743594323" name="Content Placeholder 2"/>
           <p:cNvSpPr>
             <a:spLocks noGrp="1"/>
           </p:cNvSpPr>
@@ -3436,25 +4971,28 @@
             <p:ph idx="1"/>
           </p:nvPr>
         </p:nvSpPr>
-        <p:spPr/>
-        <p:txBody>
-          <a:bodyPr/>
-          <a:lstStyle/>
-          <a:p>
-            <a:r>
-              <a:rPr lang="en-US" dirty="0" smtClean="0"/>
+        <p:spPr bwMode="auto"/>
+        <p:txBody>
+          <a:bodyPr/>
+          <a:lstStyle/>
+          <a:p>
+            <a:pPr>
+              <a:defRPr/>
+            </a:pPr>
+            <a:r>
+              <a:rPr lang="en-US"/>
               <a:t>In </a:t>
             </a:r>
             <a:r>
-              <a:rPr lang="en-US" b="1" dirty="0" smtClean="0"/>
+              <a:rPr lang="en-US" b="1"/>
               <a:t>WDM (Wavelength Division Multiplexing)</a:t>
             </a:r>
             <a:r>
-              <a:rPr lang="en-US" dirty="0" smtClean="0"/>
+              <a:rPr lang="en-US"/>
               <a:t> networks, </a:t>
             </a:r>
             <a:r>
-              <a:rPr lang="en-US" dirty="0" smtClean="0">
+              <a:rPr lang="en-US">
                 <a:solidFill>
                   <a:srgbClr val="FF0000"/>
                 </a:solidFill>
@@ -3462,11 +5000,11 @@
               <a:t>multiple data signals are sent simultaneously</a:t>
             </a:r>
             <a:r>
-              <a:rPr lang="en-US" dirty="0" smtClean="0"/>
+              <a:rPr lang="en-US"/>
               <a:t> over a single optical fiber </a:t>
             </a:r>
             <a:r>
-              <a:rPr lang="en-US" dirty="0" smtClean="0">
+              <a:rPr lang="en-US">
                 <a:solidFill>
                   <a:srgbClr val="FF0000"/>
                 </a:solidFill>
@@ -3474,17 +5012,21 @@
               <a:t>by using different wavelengths (colors) of laser light</a:t>
             </a:r>
             <a:r>
-              <a:rPr lang="en-US" dirty="0" smtClean="0"/>
+              <a:rPr lang="en-US"/>
               <a:t>. </a:t>
             </a:r>
-          </a:p>
-          <a:p>
-            <a:r>
-              <a:rPr lang="en-US" dirty="0" smtClean="0"/>
+            <a:endParaRPr/>
+          </a:p>
+          <a:p>
+            <a:pPr>
+              <a:defRPr/>
+            </a:pPr>
+            <a:r>
+              <a:rPr lang="en-US"/>
               <a:t>To make this work, the hardware—</a:t>
             </a:r>
             <a:r>
-              <a:rPr lang="en-US" dirty="0" smtClean="0">
+              <a:rPr lang="en-US">
                 <a:solidFill>
                   <a:srgbClr val="FF0000"/>
                 </a:solidFill>
@@ -3492,36 +5034,39 @@
               <a:t>transmitters, receivers, and amplifiers—must meet specific high-performance requirements</a:t>
             </a:r>
             <a:r>
-              <a:rPr lang="en-US" dirty="0" smtClean="0"/>
+              <a:rPr lang="en-US"/>
               <a:t>.</a:t>
             </a:r>
-            <a:endParaRPr lang="en-US" dirty="0"/>
+            <a:endParaRPr lang="en-US"/>
           </a:p>
         </p:txBody>
       </p:sp>
     </p:spTree>
-    <p:extLst>
-      <p:ext uri="{BB962C8B-B14F-4D97-AF65-F5344CB8AC3E}">
-        <p14:creationId xmlns:p14="http://schemas.microsoft.com/office/powerpoint/2010/main" val="1936008955"/>
-      </p:ext>
-    </p:extLst>
   </p:cSld>
   <p:clrMapOvr>
     <a:masterClrMapping/>
   </p:clrMapOvr>
+  <mc:AlternateContent xmlns:mc="http://schemas.openxmlformats.org/markup-compatibility/2006">
+    <mc:Choice xmlns:p159="http://schemas.microsoft.com/office/powerpoint/2015/09/main" xmlns:p14="http://schemas.microsoft.com/office/powerpoint/2010/main" Requires="p159">
+      <p:transition p14:dur="500" advClick="1"/>
+    </mc:Choice>
+    <mc:Fallback>
+      <p:transition advClick="1"/>
+    </mc:Fallback>
+  </mc:AlternateContent>
 </p:sld>
 </file>
 
 <file path=ppt/slides/slide3.xml><?xml version="1.0" encoding="utf-8"?>
-<p:sld xmlns:a="http://schemas.openxmlformats.org/drawingml/2006/main" xmlns:r="http://schemas.openxmlformats.org/officeDocument/2006/relationships" xmlns:p="http://schemas.openxmlformats.org/presentationml/2006/main">
-  <p:cSld>
+<p:sld xmlns:a="http://schemas.openxmlformats.org/drawingml/2006/main" xmlns:r="http://schemas.openxmlformats.org/officeDocument/2006/relationships" xmlns:p="http://schemas.openxmlformats.org/presentationml/2006/main" xmlns:m="http://schemas.openxmlformats.org/officeDocument/2006/math" xmlns:w="http://schemas.openxmlformats.org/wordprocessingml/2006/main" xmlns:mc="http://schemas.openxmlformats.org/markup-compatibility/2006" showMasterPhAnim="0" showMasterSp="1" show="1">
+  <p:cSld name="">
     <p:spTree>
       <p:nvGrpSpPr>
         <p:cNvPr id="1" name=""/>
         <p:cNvGrpSpPr/>
         <p:nvPr/>
       </p:nvGrpSpPr>
-      <p:grpSpPr>
+      <p:grpSpPr bwMode="auto">
         <a:xfrm>
           <a:off x="0" y="0"/>
           <a:ext cx="0" cy="0"/>
@@ -3531,7 +5076,7 @@
       </p:grpSpPr>
       <p:sp>
         <p:nvSpPr>
-          <p:cNvPr id="2" name="Title 1"/>
+          <p:cNvPr id="818060048" name="Title 1"/>
           <p:cNvSpPr>
             <a:spLocks noGrp="1"/>
           </p:cNvSpPr>
@@ -3539,22 +5084,25 @@
             <p:ph type="title"/>
           </p:nvPr>
         </p:nvSpPr>
-        <p:spPr/>
-        <p:txBody>
-          <a:bodyPr/>
-          <a:lstStyle/>
-          <a:p>
-            <a:r>
-              <a:rPr lang="en-US" dirty="0" smtClean="0"/>
+        <p:spPr bwMode="auto"/>
+        <p:txBody>
+          <a:bodyPr/>
+          <a:lstStyle/>
+          <a:p>
+            <a:pPr>
+              <a:defRPr/>
+            </a:pPr>
+            <a:r>
+              <a:rPr lang="en-US"/>
               <a:t>1. Transmitter and Receiver Requirements</a:t>
             </a:r>
-            <a:endParaRPr lang="en-US" dirty="0"/>
-          </a:p>
-        </p:txBody>
-      </p:sp>
-      <p:sp>
-        <p:nvSpPr>
-          <p:cNvPr id="3" name="Content Placeholder 2"/>
+            <a:endParaRPr lang="en-US"/>
+          </a:p>
+        </p:txBody>
+      </p:sp>
+      <p:sp>
+        <p:nvSpPr>
+          <p:cNvPr id="245154868" name="Content Placeholder 2"/>
           <p:cNvSpPr>
             <a:spLocks noGrp="1"/>
           </p:cNvSpPr>
@@ -3562,30 +5110,36 @@
             <p:ph idx="1"/>
           </p:nvPr>
         </p:nvSpPr>
-        <p:spPr/>
+        <p:spPr bwMode="auto"/>
         <p:txBody>
           <a:bodyPr>
             <a:normAutofit/>
           </a:bodyPr>
           <a:lstStyle/>
           <a:p>
-            <a:r>
-              <a:rPr lang="en-US" sz="3600" b="1" dirty="0" smtClean="0"/>
+            <a:pPr>
+              <a:defRPr/>
+            </a:pPr>
+            <a:r>
+              <a:rPr lang="en-US" sz="3600" b="1"/>
               <a:t>Transmitter Requirements:</a:t>
             </a:r>
-          </a:p>
-          <a:p>
-            <a:pPr lvl="1"/>
-            <a:r>
-              <a:rPr lang="en-US" sz="3200" b="1" dirty="0" smtClean="0"/>
+            <a:endParaRPr/>
+          </a:p>
+          <a:p>
+            <a:pPr lvl="1">
+              <a:defRPr/>
+            </a:pPr>
+            <a:r>
+              <a:rPr lang="en-US" sz="3200" b="1"/>
               <a:t>Precision Wavelength:</a:t>
             </a:r>
             <a:r>
-              <a:rPr lang="en-US" sz="3200" dirty="0" smtClean="0"/>
+              <a:rPr lang="en-US" sz="3200"/>
               <a:t> The laser must emit </a:t>
             </a:r>
             <a:r>
-              <a:rPr lang="en-US" sz="3200" dirty="0" smtClean="0">
+              <a:rPr lang="en-US" sz="3200">
                 <a:solidFill>
                   <a:srgbClr val="FF0000"/>
                 </a:solidFill>
@@ -3593,22 +5147,25 @@
               <a:t>a very specific wavelength to avoid interfering with adjacent channels </a:t>
             </a:r>
             <a:r>
-              <a:rPr lang="en-US" sz="3200" dirty="0" smtClean="0"/>
+              <a:rPr lang="en-US" sz="3200"/>
               <a:t>(Crosstalk).</a:t>
             </a:r>
-          </a:p>
-          <a:p>
-            <a:pPr lvl="1"/>
-            <a:r>
-              <a:rPr lang="en-US" sz="3200" b="1" dirty="0" smtClean="0"/>
+            <a:endParaRPr/>
+          </a:p>
+          <a:p>
+            <a:pPr lvl="1">
+              <a:defRPr/>
+            </a:pPr>
+            <a:r>
+              <a:rPr lang="en-US" sz="3200" b="1"/>
               <a:t>Stability:</a:t>
             </a:r>
             <a:r>
-              <a:rPr lang="en-US" sz="3200" dirty="0" smtClean="0"/>
+              <a:rPr lang="en-US" sz="3200"/>
               <a:t> The wavelength </a:t>
             </a:r>
             <a:r>
-              <a:rPr lang="en-US" sz="3200" dirty="0" smtClean="0">
+              <a:rPr lang="en-US" sz="3200">
                 <a:solidFill>
                   <a:srgbClr val="FF0000"/>
                 </a:solidFill>
@@ -3616,22 +5173,25 @@
               <a:t>must remain constant regardless of temperature changes </a:t>
             </a:r>
             <a:r>
-              <a:rPr lang="en-US" sz="3200" dirty="0" smtClean="0"/>
+              <a:rPr lang="en-US" sz="3200"/>
               <a:t>(often using "wavelength lockers").</a:t>
             </a:r>
-          </a:p>
-          <a:p>
-            <a:pPr lvl="1"/>
-            <a:r>
-              <a:rPr lang="en-US" sz="3200" b="1" dirty="0" smtClean="0"/>
+            <a:endParaRPr/>
+          </a:p>
+          <a:p>
+            <a:pPr lvl="1">
+              <a:defRPr/>
+            </a:pPr>
+            <a:r>
+              <a:rPr lang="en-US" sz="3200" b="1"/>
               <a:t>Narrow Linewidth:</a:t>
             </a:r>
             <a:r>
-              <a:rPr lang="en-US" sz="3200" dirty="0" smtClean="0"/>
+              <a:rPr lang="en-US" sz="3200"/>
               <a:t> The light beam must be </a:t>
             </a:r>
             <a:r>
-              <a:rPr lang="en-US" sz="3200" dirty="0" smtClean="0">
+              <a:rPr lang="en-US" sz="3200">
                 <a:solidFill>
                   <a:srgbClr val="FF0000"/>
                 </a:solidFill>
@@ -3639,36 +5199,39 @@
               <a:t>"pure" so the signal doesn't spread out (dispersion) over long distances</a:t>
             </a:r>
             <a:r>
-              <a:rPr lang="en-US" sz="3200" dirty="0" smtClean="0"/>
+              <a:rPr lang="en-US" sz="3200"/>
               <a:t>.</a:t>
             </a:r>
-            <a:endParaRPr lang="en-US" sz="3200" dirty="0"/>
+            <a:endParaRPr lang="en-US" sz="3200"/>
           </a:p>
         </p:txBody>
       </p:sp>
     </p:spTree>
-    <p:extLst>
-      <p:ext uri="{BB962C8B-B14F-4D97-AF65-F5344CB8AC3E}">
-        <p14:creationId xmlns:p14="http://schemas.microsoft.com/office/powerpoint/2010/main" val="290854192"/>
-      </p:ext>
-    </p:extLst>
   </p:cSld>
   <p:clrMapOvr>
     <a:masterClrMapping/>
   </p:clrMapOvr>
+  <mc:AlternateContent xmlns:mc="http://schemas.openxmlformats.org/markup-compatibility/2006">
+    <mc:Choice xmlns:p159="http://schemas.microsoft.com/office/powerpoint/2015/09/main" xmlns:p14="http://schemas.microsoft.com/office/powerpoint/2010/main" Requires="p159">
+      <p:transition p14:dur="500" advClick="1"/>
+    </mc:Choice>
+    <mc:Fallback>
+      <p:transition advClick="1"/>
+    </mc:Fallback>
+  </mc:AlternateContent>
 </p:sld>
 </file>
 
 <file path=ppt/slides/slide4.xml><?xml version="1.0" encoding="utf-8"?>
-<p:sld xmlns:a="http://schemas.openxmlformats.org/drawingml/2006/main" xmlns:r="http://schemas.openxmlformats.org/officeDocument/2006/relationships" xmlns:p="http://schemas.openxmlformats.org/presentationml/2006/main">
-  <p:cSld>
+<p:sld xmlns:a="http://schemas.openxmlformats.org/drawingml/2006/main" xmlns:r="http://schemas.openxmlformats.org/officeDocument/2006/relationships" xmlns:p="http://schemas.openxmlformats.org/presentationml/2006/main" xmlns:m="http://schemas.openxmlformats.org/officeDocument/2006/math" xmlns:w="http://schemas.openxmlformats.org/wordprocessingml/2006/main" xmlns:mc="http://schemas.openxmlformats.org/markup-compatibility/2006" showMasterPhAnim="0" showMasterSp="1" show="1">
+  <p:cSld name="">
     <p:spTree>
       <p:nvGrpSpPr>
         <p:cNvPr id="1" name=""/>
         <p:cNvGrpSpPr/>
         <p:nvPr/>
       </p:nvGrpSpPr>
-      <p:grpSpPr>
+      <p:grpSpPr bwMode="auto">
         <a:xfrm>
           <a:off x="0" y="0"/>
           <a:ext cx="0" cy="0"/>
@@ -3678,7 +5241,7 @@
       </p:grpSpPr>
       <p:sp>
         <p:nvSpPr>
-          <p:cNvPr id="2" name="Title 1"/>
+          <p:cNvPr id="76223582" name="Title 1"/>
           <p:cNvSpPr>
             <a:spLocks noGrp="1"/>
           </p:cNvSpPr>
@@ -3686,22 +5249,25 @@
             <p:ph type="title"/>
           </p:nvPr>
         </p:nvSpPr>
-        <p:spPr/>
-        <p:txBody>
-          <a:bodyPr/>
-          <a:lstStyle/>
-          <a:p>
-            <a:r>
-              <a:rPr lang="en-US" b="1" dirty="0" smtClean="0"/>
+        <p:spPr bwMode="auto"/>
+        <p:txBody>
+          <a:bodyPr/>
+          <a:lstStyle/>
+          <a:p>
+            <a:pPr>
+              <a:defRPr/>
+            </a:pPr>
+            <a:r>
+              <a:rPr lang="en-US" b="1"/>
               <a:t>wavelength lockers</a:t>
             </a:r>
-            <a:endParaRPr lang="en-US" b="1" dirty="0"/>
-          </a:p>
-        </p:txBody>
-      </p:sp>
-      <p:sp>
-        <p:nvSpPr>
-          <p:cNvPr id="3" name="Content Placeholder 2"/>
+            <a:endParaRPr lang="en-US" b="1"/>
+          </a:p>
+        </p:txBody>
+      </p:sp>
+      <p:sp>
+        <p:nvSpPr>
+          <p:cNvPr id="1776957831" name="Content Placeholder 2"/>
           <p:cNvSpPr>
             <a:spLocks noGrp="1"/>
           </p:cNvSpPr>
@@ -3709,121 +5275,132 @@
             <p:ph idx="1"/>
           </p:nvPr>
         </p:nvSpPr>
-        <p:spPr/>
-        <p:txBody>
-          <a:bodyPr/>
-          <a:lstStyle/>
-          <a:p>
-            <a:r>
-              <a:rPr lang="en-US" dirty="0" smtClean="0"/>
+        <p:spPr bwMode="auto"/>
+        <p:txBody>
+          <a:bodyPr/>
+          <a:lstStyle/>
+          <a:p>
+            <a:pPr>
+              <a:defRPr/>
+            </a:pPr>
+            <a:r>
+              <a:rPr lang="en-US"/>
               <a:t>Wavelength lockers </a:t>
             </a:r>
             <a:r>
-              <a:rPr lang="as-IN" dirty="0" smtClean="0"/>
+              <a:rPr lang="as-IN"/>
               <a:t>হলো অপটিক্যাল কমিউনিকেশন সিস্টেমে ব্যবহৃত একটি গুরুত্বপূর্ণ ডিভাইস, যা লেজারের নির্দিষ্ট তরঙ্গদৈর্ঘ্য (</a:t>
             </a:r>
             <a:r>
-              <a:rPr lang="en-US" dirty="0" smtClean="0"/>
+              <a:rPr lang="en-US"/>
               <a:t>wavelength) </a:t>
             </a:r>
             <a:r>
-              <a:rPr lang="as-IN" dirty="0" smtClean="0"/>
+              <a:rPr lang="as-IN"/>
               <a:t>স্থির রাখতে সাহায্য করে।</a:t>
             </a:r>
-            <a:endParaRPr lang="en-US" dirty="0" smtClean="0"/>
-          </a:p>
-          <a:p>
-            <a:r>
-              <a:rPr lang="as-IN" dirty="0" smtClean="0"/>
+            <a:endParaRPr lang="en-US"/>
+          </a:p>
+          <a:p>
+            <a:pPr>
+              <a:defRPr/>
+            </a:pPr>
+            <a:r>
+              <a:rPr lang="as-IN"/>
               <a:t>লেজার থেকে যে আলো বের হয়, তার </a:t>
             </a:r>
             <a:r>
-              <a:rPr lang="en-US" dirty="0" smtClean="0"/>
+              <a:rPr lang="en-US"/>
               <a:t>wavelength </a:t>
             </a:r>
             <a:r>
-              <a:rPr lang="as-IN" dirty="0" smtClean="0"/>
+              <a:rPr lang="as-IN"/>
               <a:t>কখনো কখনো তাপমাত্রা বা অন্য কারণে পরিবর্তিত হতে পারে। কিন্তু </a:t>
             </a:r>
             <a:r>
-              <a:rPr lang="en-US" b="1" dirty="0" smtClean="0"/>
+              <a:rPr lang="en-US" b="1"/>
               <a:t>fiber optic communication</a:t>
             </a:r>
             <a:r>
-              <a:rPr lang="en-US" dirty="0" smtClean="0"/>
+              <a:rPr lang="en-US"/>
               <a:t>-</a:t>
             </a:r>
             <a:r>
-              <a:rPr lang="as-IN" dirty="0" smtClean="0"/>
+              <a:rPr lang="as-IN"/>
               <a:t>এ নির্দিষ্ট </a:t>
             </a:r>
             <a:r>
-              <a:rPr lang="en-US" dirty="0" smtClean="0"/>
+              <a:rPr lang="en-US"/>
               <a:t>wavelength </a:t>
             </a:r>
             <a:r>
-              <a:rPr lang="as-IN" dirty="0" smtClean="0"/>
+              <a:rPr lang="as-IN"/>
               <a:t>খুব গুরুত্বপূর্ণ (বিশেষ করে </a:t>
             </a:r>
             <a:r>
-              <a:rPr lang="en-US" dirty="0" smtClean="0"/>
+              <a:rPr lang="en-US"/>
               <a:t>WDM </a:t>
             </a:r>
             <a:r>
-              <a:rPr lang="as-IN" dirty="0" smtClean="0"/>
+              <a:rPr lang="as-IN"/>
               <a:t>সিস্টেমে)।</a:t>
             </a:r>
-            <a:endParaRPr lang="en-US" dirty="0"/>
-          </a:p>
-          <a:p>
-            <a:pPr lvl="1"/>
-            <a:r>
-              <a:rPr lang="as-IN" dirty="0" smtClean="0"/>
+            <a:endParaRPr lang="en-US"/>
+          </a:p>
+          <a:p>
+            <a:pPr lvl="1">
+              <a:defRPr/>
+            </a:pPr>
+            <a:r>
+              <a:rPr lang="as-IN"/>
               <a:t>এই </a:t>
             </a:r>
             <a:r>
-              <a:rPr lang="en-US" dirty="0" smtClean="0"/>
+              <a:rPr lang="en-US"/>
               <a:t>wavelength </a:t>
             </a:r>
             <a:r>
-              <a:rPr lang="as-IN" dirty="0" smtClean="0"/>
+              <a:rPr lang="as-IN"/>
               <a:t>ঠিক রাখার কাজই করে </a:t>
             </a:r>
             <a:r>
-              <a:rPr lang="en-US" b="1" dirty="0" smtClean="0"/>
+              <a:rPr lang="en-US" b="1"/>
               <a:t>wavelength locker</a:t>
             </a:r>
             <a:r>
-              <a:rPr lang="en-US" dirty="0" smtClean="0"/>
+              <a:rPr lang="en-US"/>
               <a:t>।</a:t>
             </a:r>
-            <a:endParaRPr lang="en-US" dirty="0"/>
+            <a:endParaRPr lang="en-US"/>
           </a:p>
         </p:txBody>
       </p:sp>
     </p:spTree>
-    <p:extLst>
-      <p:ext uri="{BB962C8B-B14F-4D97-AF65-F5344CB8AC3E}">
-        <p14:creationId xmlns:p14="http://schemas.microsoft.com/office/powerpoint/2010/main" val="2719588203"/>
-      </p:ext>
-    </p:extLst>
   </p:cSld>
   <p:clrMapOvr>
     <a:masterClrMapping/>
   </p:clrMapOvr>
+  <mc:AlternateContent xmlns:mc="http://schemas.openxmlformats.org/markup-compatibility/2006">
+    <mc:Choice xmlns:p159="http://schemas.microsoft.com/office/powerpoint/2015/09/main" xmlns:p14="http://schemas.microsoft.com/office/powerpoint/2010/main" Requires="p159">
+      <p:transition p14:dur="500" advClick="1"/>
+    </mc:Choice>
+    <mc:Fallback>
+      <p:transition advClick="1"/>
+    </mc:Fallback>
+  </mc:AlternateContent>
 </p:sld>
 </file>
 
 <file path=ppt/slides/slide5.xml><?xml version="1.0" encoding="utf-8"?>
-<p:sld xmlns:a="http://schemas.openxmlformats.org/drawingml/2006/main" xmlns:r="http://schemas.openxmlformats.org/officeDocument/2006/relationships" xmlns:p="http://schemas.openxmlformats.org/presentationml/2006/main">
-  <p:cSld>
+<p:sld xmlns:a="http://schemas.openxmlformats.org/drawingml/2006/main" xmlns:r="http://schemas.openxmlformats.org/officeDocument/2006/relationships" xmlns:p="http://schemas.openxmlformats.org/presentationml/2006/main" xmlns:m="http://schemas.openxmlformats.org/officeDocument/2006/math" xmlns:w="http://schemas.openxmlformats.org/wordprocessingml/2006/main" xmlns:mc="http://schemas.openxmlformats.org/markup-compatibility/2006" showMasterPhAnim="0" showMasterSp="1" show="1">
+  <p:cSld name="">
     <p:spTree>
       <p:nvGrpSpPr>
         <p:cNvPr id="1" name=""/>
         <p:cNvGrpSpPr/>
         <p:nvPr/>
       </p:nvGrpSpPr>
-      <p:grpSpPr>
+      <p:grpSpPr bwMode="auto">
         <a:xfrm>
           <a:off x="0" y="0"/>
           <a:ext cx="0" cy="0"/>
@@ -3833,26 +5410,7 @@
       </p:grpSpPr>
       <p:sp>
         <p:nvSpPr>
-          <p:cNvPr id="2" name="Title 1"/>
-          <p:cNvSpPr>
-            <a:spLocks noGrp="1"/>
-          </p:cNvSpPr>
-          <p:nvPr>
-            <p:ph type="title"/>
-          </p:nvPr>
-        </p:nvSpPr>
-        <p:spPr/>
-        <p:txBody>
-          <a:bodyPr/>
-          <a:lstStyle/>
-          <a:p>
-            <a:endParaRPr lang="en-US"/>
-          </a:p>
-        </p:txBody>
-      </p:sp>
-      <p:sp>
-        <p:nvSpPr>
-          <p:cNvPr id="3" name="Content Placeholder 2"/>
+          <p:cNvPr id="2025263198" name="Content Placeholder 2"/>
           <p:cNvSpPr>
             <a:spLocks noGrp="1"/>
           </p:cNvSpPr>
@@ -3860,30 +5418,36 @@
             <p:ph idx="1"/>
           </p:nvPr>
         </p:nvSpPr>
-        <p:spPr/>
+        <p:spPr bwMode="auto"/>
         <p:txBody>
           <a:bodyPr>
             <a:normAutofit/>
           </a:bodyPr>
           <a:lstStyle/>
           <a:p>
-            <a:r>
-              <a:rPr lang="en-US" sz="3600" b="1" dirty="0" smtClean="0"/>
+            <a:pPr>
+              <a:defRPr/>
+            </a:pPr>
+            <a:r>
+              <a:rPr lang="en-US" sz="3600" b="1"/>
               <a:t>Receiver Requirements:</a:t>
             </a:r>
-          </a:p>
-          <a:p>
-            <a:pPr lvl="1"/>
-            <a:r>
-              <a:rPr lang="en-US" sz="3200" b="1" dirty="0" smtClean="0"/>
+            <a:endParaRPr/>
+          </a:p>
+          <a:p>
+            <a:pPr lvl="1">
+              <a:defRPr/>
+            </a:pPr>
+            <a:r>
+              <a:rPr lang="en-US" sz="3200" b="1"/>
               <a:t>Selectivity:</a:t>
             </a:r>
             <a:r>
-              <a:rPr lang="en-US" sz="3200" dirty="0" smtClean="0"/>
+              <a:rPr lang="en-US" sz="3200"/>
               <a:t> The receiver must be </a:t>
             </a:r>
             <a:r>
-              <a:rPr lang="en-US" sz="3200" dirty="0" smtClean="0">
+              <a:rPr lang="en-US" sz="3200">
                 <a:solidFill>
                   <a:srgbClr val="FF0000"/>
                 </a:solidFill>
@@ -3891,22 +5455,25 @@
               <a:t>able to pick out one specific wavelength from the many arriving at the end of the fiber</a:t>
             </a:r>
             <a:r>
-              <a:rPr lang="en-US" sz="3200" dirty="0" smtClean="0"/>
+              <a:rPr lang="en-US" sz="3200"/>
               <a:t>.</a:t>
             </a:r>
-          </a:p>
-          <a:p>
-            <a:pPr lvl="1"/>
-            <a:r>
-              <a:rPr lang="en-US" sz="3200" b="1" dirty="0" smtClean="0"/>
+            <a:endParaRPr/>
+          </a:p>
+          <a:p>
+            <a:pPr lvl="1">
+              <a:defRPr/>
+            </a:pPr>
+            <a:r>
+              <a:rPr lang="en-US" sz="3200" b="1"/>
               <a:t>Sensitivity:</a:t>
             </a:r>
             <a:r>
-              <a:rPr lang="en-US" sz="3200" dirty="0" smtClean="0"/>
+              <a:rPr lang="en-US" sz="3200"/>
               <a:t> It must be </a:t>
             </a:r>
             <a:r>
-              <a:rPr lang="en-US" sz="3200" dirty="0" smtClean="0">
+              <a:rPr lang="en-US" sz="3200">
                 <a:solidFill>
                   <a:srgbClr val="FF0000"/>
                 </a:solidFill>
@@ -3914,22 +5481,25 @@
               <a:t>able to detect very weak signals after they have traveled hundreds of kilometers</a:t>
             </a:r>
             <a:r>
-              <a:rPr lang="en-US" sz="3200" dirty="0" smtClean="0"/>
+              <a:rPr lang="en-US" sz="3200"/>
               <a:t>.</a:t>
             </a:r>
-          </a:p>
-          <a:p>
-            <a:pPr lvl="1"/>
-            <a:r>
-              <a:rPr lang="en-US" sz="3200" b="1" dirty="0" smtClean="0"/>
+            <a:endParaRPr/>
+          </a:p>
+          <a:p>
+            <a:pPr lvl="1">
+              <a:defRPr/>
+            </a:pPr>
+            <a:r>
+              <a:rPr lang="en-US" sz="3200" b="1"/>
               <a:t>Wide Bandwidth:</a:t>
             </a:r>
             <a:r>
-              <a:rPr lang="en-US" sz="3200" dirty="0" smtClean="0"/>
+              <a:rPr lang="en-US" sz="3200"/>
               <a:t> It </a:t>
             </a:r>
             <a:r>
-              <a:rPr lang="en-US" sz="3200" dirty="0" smtClean="0">
+              <a:rPr lang="en-US" sz="3200">
                 <a:solidFill>
                   <a:srgbClr val="FF0000"/>
                 </a:solidFill>
@@ -3937,38 +5507,45 @@
               <a:t>needs to handle the high data rates (e.g., 100Gbps or 400Gbps) sent by the transmitter</a:t>
             </a:r>
             <a:r>
-              <a:rPr lang="en-US" sz="3200" dirty="0" smtClean="0"/>
+              <a:rPr lang="en-US" sz="3200"/>
               <a:t>.</a:t>
             </a:r>
-          </a:p>
-          <a:p>
-            <a:endParaRPr lang="en-US" sz="3600" dirty="0"/>
+            <a:endParaRPr/>
+          </a:p>
+          <a:p>
+            <a:pPr>
+              <a:defRPr/>
+            </a:pPr>
+            <a:endParaRPr lang="en-US" sz="3600"/>
           </a:p>
         </p:txBody>
       </p:sp>
     </p:spTree>
-    <p:extLst>
-      <p:ext uri="{BB962C8B-B14F-4D97-AF65-F5344CB8AC3E}">
-        <p14:creationId xmlns:p14="http://schemas.microsoft.com/office/powerpoint/2010/main" val="3050614291"/>
-      </p:ext>
-    </p:extLst>
   </p:cSld>
   <p:clrMapOvr>
     <a:masterClrMapping/>
   </p:clrMapOvr>
+  <mc:AlternateContent xmlns:mc="http://schemas.openxmlformats.org/markup-compatibility/2006">
+    <mc:Choice xmlns:p159="http://schemas.microsoft.com/office/powerpoint/2015/09/main" xmlns:p14="http://schemas.microsoft.com/office/powerpoint/2010/main" Requires="p159">
+      <p:transition p14:dur="500" advClick="1"/>
+    </mc:Choice>
+    <mc:Fallback>
+      <p:transition advClick="1"/>
+    </mc:Fallback>
+  </mc:AlternateContent>
 </p:sld>
 </file>
 
 <file path=ppt/slides/slide6.xml><?xml version="1.0" encoding="utf-8"?>
-<p:sld xmlns:a="http://schemas.openxmlformats.org/drawingml/2006/main" xmlns:r="http://schemas.openxmlformats.org/officeDocument/2006/relationships" xmlns:p="http://schemas.openxmlformats.org/presentationml/2006/main">
-  <p:cSld>
+<p:sld xmlns:a="http://schemas.openxmlformats.org/drawingml/2006/main" xmlns:r="http://schemas.openxmlformats.org/officeDocument/2006/relationships" xmlns:p="http://schemas.openxmlformats.org/presentationml/2006/main" xmlns:m="http://schemas.openxmlformats.org/officeDocument/2006/math" xmlns:w="http://schemas.openxmlformats.org/wordprocessingml/2006/main" xmlns:mc="http://schemas.openxmlformats.org/markup-compatibility/2006" showMasterPhAnim="0" showMasterSp="1" show="1">
+  <p:cSld name="">
     <p:spTree>
       <p:nvGrpSpPr>
         <p:cNvPr id="1" name=""/>
         <p:cNvGrpSpPr/>
         <p:nvPr/>
       </p:nvGrpSpPr>
-      <p:grpSpPr>
+      <p:grpSpPr bwMode="auto">
         <a:xfrm>
           <a:off x="0" y="0"/>
           <a:ext cx="0" cy="0"/>
@@ -3978,7 +5555,7 @@
       </p:grpSpPr>
       <p:sp>
         <p:nvSpPr>
-          <p:cNvPr id="2" name="Title 1"/>
+          <p:cNvPr id="1170913836" name="Title 1"/>
           <p:cNvSpPr>
             <a:spLocks noGrp="1"/>
           </p:cNvSpPr>
@@ -3986,25 +5563,28 @@
             <p:ph type="title"/>
           </p:nvPr>
         </p:nvSpPr>
-        <p:spPr/>
-        <p:txBody>
-          <a:bodyPr/>
-          <a:lstStyle/>
-          <a:p>
-            <a:r>
-              <a:rPr lang="en-US" b="1" dirty="0" smtClean="0"/>
+        <p:spPr bwMode="auto"/>
+        <p:txBody>
+          <a:bodyPr/>
+          <a:lstStyle/>
+          <a:p>
+            <a:pPr>
+              <a:defRPr/>
+            </a:pPr>
+            <a:r>
+              <a:rPr lang="en-US" b="1"/>
               <a:t>2. Types of Tunable Lasers</a:t>
             </a:r>
             <a:br>
-              <a:rPr lang="en-US" b="1" dirty="0" smtClean="0"/>
+              <a:rPr lang="en-US" b="1"/>
             </a:br>
-            <a:endParaRPr lang="en-US" dirty="0"/>
-          </a:p>
-        </p:txBody>
-      </p:sp>
-      <p:sp>
-        <p:nvSpPr>
-          <p:cNvPr id="3" name="Content Placeholder 2"/>
+            <a:endParaRPr lang="en-US"/>
+          </a:p>
+        </p:txBody>
+      </p:sp>
+      <p:sp>
+        <p:nvSpPr>
+          <p:cNvPr id="950181500" name="Content Placeholder 2"/>
           <p:cNvSpPr>
             <a:spLocks noGrp="1"/>
           </p:cNvSpPr>
@@ -4012,19 +5592,22 @@
             <p:ph idx="1"/>
           </p:nvPr>
         </p:nvSpPr>
-        <p:spPr/>
+        <p:spPr bwMode="auto"/>
         <p:txBody>
           <a:bodyPr>
             <a:noAutofit/>
           </a:bodyPr>
           <a:lstStyle/>
           <a:p>
-            <a:r>
-              <a:rPr lang="en-US" sz="3200" dirty="0" smtClean="0"/>
+            <a:pPr>
+              <a:defRPr/>
+            </a:pPr>
+            <a:r>
+              <a:rPr lang="en-US" sz="3200"/>
               <a:t>A tunable laser </a:t>
             </a:r>
             <a:r>
-              <a:rPr lang="en-US" sz="3200" dirty="0" smtClean="0">
+              <a:rPr lang="en-US" sz="3200">
                 <a:solidFill>
                   <a:srgbClr val="FF0000"/>
                 </a:solidFill>
@@ -4032,17 +5615,21 @@
               <a:t>can change its operating wavelength</a:t>
             </a:r>
             <a:r>
-              <a:rPr lang="en-US" sz="3200" dirty="0" smtClean="0"/>
+              <a:rPr lang="en-US" sz="3200"/>
               <a:t>. </a:t>
             </a:r>
-          </a:p>
-          <a:p>
-            <a:r>
-              <a:rPr lang="en-US" sz="3200" dirty="0" smtClean="0"/>
+            <a:endParaRPr/>
+          </a:p>
+          <a:p>
+            <a:pPr>
+              <a:defRPr/>
+            </a:pPr>
+            <a:r>
+              <a:rPr lang="en-US" sz="3200"/>
               <a:t>This is </a:t>
             </a:r>
             <a:r>
-              <a:rPr lang="en-US" sz="3200" dirty="0" smtClean="0">
+              <a:rPr lang="en-US" sz="3200">
                 <a:solidFill>
                   <a:srgbClr val="FF0000"/>
                 </a:solidFill>
@@ -4050,22 +5637,25 @@
               <a:t>useful because one backup laser can replace any failed laser in a WDM system</a:t>
             </a:r>
             <a:r>
-              <a:rPr lang="en-US" sz="3200" dirty="0" smtClean="0"/>
+              <a:rPr lang="en-US" sz="3200"/>
               <a:t>.</a:t>
             </a:r>
-          </a:p>
-          <a:p>
-            <a:pPr lvl="1"/>
-            <a:r>
-              <a:rPr lang="en-US" sz="2800" b="1" dirty="0" smtClean="0"/>
+            <a:endParaRPr/>
+          </a:p>
+          <a:p>
+            <a:pPr lvl="1">
+              <a:defRPr/>
+            </a:pPr>
+            <a:r>
+              <a:rPr lang="en-US" sz="2800" b="1"/>
               <a:t>External Cavity Lasers (ECL):</a:t>
             </a:r>
             <a:r>
-              <a:rPr lang="en-US" sz="2800" dirty="0" smtClean="0"/>
+              <a:rPr lang="en-US" sz="2800"/>
               <a:t> Uses a </a:t>
             </a:r>
             <a:r>
-              <a:rPr lang="en-US" sz="2800" dirty="0" smtClean="0">
+              <a:rPr lang="en-US" sz="2800">
                 <a:solidFill>
                   <a:srgbClr val="FF0000"/>
                 </a:solidFill>
@@ -4073,11 +5663,11 @@
               <a:t>physical grating that moves to change the color</a:t>
             </a:r>
             <a:r>
-              <a:rPr lang="en-US" sz="2800" dirty="0" smtClean="0"/>
+              <a:rPr lang="en-US" sz="2800"/>
               <a:t>. Very </a:t>
             </a:r>
             <a:r>
-              <a:rPr lang="en-US" sz="2800" dirty="0" smtClean="0">
+              <a:rPr lang="en-US" sz="2800">
                 <a:solidFill>
                   <a:srgbClr val="FF0000"/>
                 </a:solidFill>
@@ -4085,22 +5675,25 @@
               <a:t>precise but mechanically complex</a:t>
             </a:r>
             <a:r>
-              <a:rPr lang="en-US" sz="2800" dirty="0" smtClean="0"/>
+              <a:rPr lang="en-US" sz="2800"/>
               <a:t>.</a:t>
             </a:r>
-          </a:p>
-          <a:p>
-            <a:pPr lvl="1"/>
-            <a:r>
-              <a:rPr lang="en-US" sz="2800" b="1" dirty="0" smtClean="0"/>
+            <a:endParaRPr/>
+          </a:p>
+          <a:p>
+            <a:pPr lvl="1">
+              <a:defRPr/>
+            </a:pPr>
+            <a:r>
+              <a:rPr lang="en-US" sz="2800" b="1"/>
               <a:t>Distributed Bragg Reflector (DBR):</a:t>
             </a:r>
             <a:r>
-              <a:rPr lang="en-US" sz="2800" dirty="0" smtClean="0"/>
+              <a:rPr lang="en-US" sz="2800"/>
               <a:t> </a:t>
             </a:r>
             <a:r>
-              <a:rPr lang="en-US" sz="2800" dirty="0" smtClean="0">
+              <a:rPr lang="en-US" sz="2800">
                 <a:solidFill>
                   <a:srgbClr val="FF0000"/>
                 </a:solidFill>
@@ -4108,22 +5701,25 @@
               <a:t>Uses electrical current to change the refractive index of a built-in grating, changing the wavelength</a:t>
             </a:r>
             <a:r>
-              <a:rPr lang="en-US" sz="2800" dirty="0" smtClean="0"/>
+              <a:rPr lang="en-US" sz="2800"/>
               <a:t>.</a:t>
             </a:r>
-          </a:p>
-          <a:p>
-            <a:pPr lvl="1"/>
-            <a:r>
-              <a:rPr lang="en-US" sz="2800" b="1" dirty="0" smtClean="0"/>
+            <a:endParaRPr/>
+          </a:p>
+          <a:p>
+            <a:pPr lvl="1">
+              <a:defRPr/>
+            </a:pPr>
+            <a:r>
+              <a:rPr lang="en-US" sz="2800" b="1"/>
               <a:t>Vertical Cavity Surface Emitting Lasers (VCSEL):</a:t>
             </a:r>
             <a:r>
-              <a:rPr lang="en-US" sz="2800" dirty="0" smtClean="0"/>
+              <a:rPr lang="en-US" sz="2800"/>
               <a:t> Small and cheap; </a:t>
             </a:r>
             <a:r>
-              <a:rPr lang="en-US" sz="2800" dirty="0" smtClean="0">
+              <a:rPr lang="en-US" sz="2800">
                 <a:solidFill>
                   <a:srgbClr val="FF0000"/>
                 </a:solidFill>
@@ -4131,38 +5727,45 @@
               <a:t>they tune by moving a tiny top mirror </a:t>
             </a:r>
             <a:r>
-              <a:rPr lang="en-US" sz="2800" dirty="0" smtClean="0"/>
+              <a:rPr lang="en-US" sz="2800"/>
               <a:t>using MEMS technology.</a:t>
             </a:r>
-          </a:p>
-          <a:p>
-            <a:endParaRPr lang="en-US" sz="3200" dirty="0"/>
+            <a:endParaRPr/>
+          </a:p>
+          <a:p>
+            <a:pPr>
+              <a:defRPr/>
+            </a:pPr>
+            <a:endParaRPr lang="en-US" sz="3200"/>
           </a:p>
         </p:txBody>
       </p:sp>
     </p:spTree>
-    <p:extLst>
-      <p:ext uri="{BB962C8B-B14F-4D97-AF65-F5344CB8AC3E}">
-        <p14:creationId xmlns:p14="http://schemas.microsoft.com/office/powerpoint/2010/main" val="2251812276"/>
-      </p:ext>
-    </p:extLst>
   </p:cSld>
   <p:clrMapOvr>
     <a:masterClrMapping/>
   </p:clrMapOvr>
+  <mc:AlternateContent xmlns:mc="http://schemas.openxmlformats.org/markup-compatibility/2006">
+    <mc:Choice xmlns:p159="http://schemas.microsoft.com/office/powerpoint/2015/09/main" xmlns:p14="http://schemas.microsoft.com/office/powerpoint/2010/main" Requires="p159">
+      <p:transition p14:dur="500" advClick="1"/>
+    </mc:Choice>
+    <mc:Fallback>
+      <p:transition advClick="1"/>
+    </mc:Fallback>
+  </mc:AlternateContent>
 </p:sld>
 </file>
 
 <file path=ppt/slides/slide7.xml><?xml version="1.0" encoding="utf-8"?>
-<p:sld xmlns:a="http://schemas.openxmlformats.org/drawingml/2006/main" xmlns:r="http://schemas.openxmlformats.org/officeDocument/2006/relationships" xmlns:p="http://schemas.openxmlformats.org/presentationml/2006/main">
-  <p:cSld>
+<p:sld xmlns:a="http://schemas.openxmlformats.org/drawingml/2006/main" xmlns:r="http://schemas.openxmlformats.org/officeDocument/2006/relationships" xmlns:p="http://schemas.openxmlformats.org/presentationml/2006/main" xmlns:m="http://schemas.openxmlformats.org/officeDocument/2006/math" xmlns:w="http://schemas.openxmlformats.org/wordprocessingml/2006/main" xmlns:mc="http://schemas.openxmlformats.org/markup-compatibility/2006" showMasterPhAnim="0" showMasterSp="1" show="1">
+  <p:cSld name="">
     <p:spTree>
       <p:nvGrpSpPr>
         <p:cNvPr id="1" name=""/>
         <p:cNvGrpSpPr/>
         <p:nvPr/>
       </p:nvGrpSpPr>
-      <p:grpSpPr>
+      <p:grpSpPr bwMode="auto">
         <a:xfrm>
           <a:off x="0" y="0"/>
           <a:ext cx="0" cy="0"/>
@@ -4172,7 +5775,7 @@
       </p:grpSpPr>
       <p:sp>
         <p:nvSpPr>
-          <p:cNvPr id="2" name="Title 1"/>
+          <p:cNvPr id="976542652" name="Title 1"/>
           <p:cNvSpPr>
             <a:spLocks noGrp="1"/>
           </p:cNvSpPr>
@@ -4180,22 +5783,25 @@
             <p:ph type="title"/>
           </p:nvPr>
         </p:nvSpPr>
-        <p:spPr/>
-        <p:txBody>
-          <a:bodyPr/>
-          <a:lstStyle/>
-          <a:p>
-            <a:r>
-              <a:rPr lang="en-US" dirty="0" smtClean="0"/>
+        <p:spPr bwMode="auto"/>
+        <p:txBody>
+          <a:bodyPr/>
+          <a:lstStyle/>
+          <a:p>
+            <a:pPr>
+              <a:defRPr/>
+            </a:pPr>
+            <a:r>
+              <a:rPr lang="en-US"/>
               <a:t>MEMS technology</a:t>
             </a:r>
-            <a:endParaRPr lang="en-US" dirty="0"/>
-          </a:p>
-        </p:txBody>
-      </p:sp>
-      <p:sp>
-        <p:nvSpPr>
-          <p:cNvPr id="3" name="Content Placeholder 2"/>
+            <a:endParaRPr lang="en-US"/>
+          </a:p>
+        </p:txBody>
+      </p:sp>
+      <p:sp>
+        <p:nvSpPr>
+          <p:cNvPr id="1632898851" name="Content Placeholder 2"/>
           <p:cNvSpPr>
             <a:spLocks noGrp="1"/>
           </p:cNvSpPr>
@@ -4203,132 +5809,158 @@
             <p:ph idx="1"/>
           </p:nvPr>
         </p:nvSpPr>
-        <p:spPr/>
+        <p:spPr bwMode="auto"/>
         <p:txBody>
           <a:bodyPr>
             <a:normAutofit/>
           </a:bodyPr>
           <a:lstStyle/>
           <a:p>
-            <a:r>
-              <a:rPr lang="en-US" dirty="0" smtClean="0"/>
+            <a:pPr>
+              <a:defRPr/>
+            </a:pPr>
+            <a:r>
+              <a:rPr lang="en-US"/>
               <a:t>MEMS technology </a:t>
             </a:r>
             <a:r>
-              <a:rPr lang="as-IN" dirty="0" smtClean="0"/>
+              <a:rPr lang="as-IN"/>
               <a:t>এর পূর্ণরূপ হলো </a:t>
             </a:r>
             <a:r>
-              <a:rPr lang="en-US" dirty="0" smtClean="0"/>
+              <a:rPr lang="en-US"/>
               <a:t>Micro-Electro-Mechanical Systems।.</a:t>
             </a:r>
-          </a:p>
-          <a:p>
-            <a:r>
-              <a:rPr lang="en-US" dirty="0" smtClean="0"/>
+            <a:endParaRPr/>
+          </a:p>
+          <a:p>
+            <a:pPr>
+              <a:defRPr/>
+            </a:pPr>
+            <a:r>
+              <a:rPr lang="en-US"/>
               <a:t>MEMS </a:t>
             </a:r>
             <a:r>
-              <a:rPr lang="as-IN" dirty="0" smtClean="0"/>
+              <a:rPr lang="as-IN"/>
               <a:t>হলো এমন একটি প্রযুক্তি যেখানে খুব ছোট (</a:t>
             </a:r>
             <a:r>
-              <a:rPr lang="en-US" dirty="0" smtClean="0"/>
+              <a:rPr lang="en-US"/>
               <a:t>micro-level) </a:t>
             </a:r>
             <a:r>
-              <a:rPr lang="en-US" b="1" dirty="0" smtClean="0"/>
+              <a:rPr lang="en-US" b="1"/>
               <a:t>mechanical + electrical components</a:t>
             </a:r>
             <a:r>
-              <a:rPr lang="en-US" dirty="0" smtClean="0"/>
+              <a:rPr lang="en-US"/>
               <a:t> </a:t>
             </a:r>
             <a:r>
-              <a:rPr lang="as-IN" dirty="0" smtClean="0"/>
+              <a:rPr lang="as-IN"/>
               <a:t>একসাথে একটি চিপের মধ্যে তৈরি করা হয়।</a:t>
             </a:r>
-            <a:endParaRPr lang="en-US" dirty="0" smtClean="0"/>
-          </a:p>
-          <a:p>
-            <a:r>
-              <a:rPr lang="as-IN" b="1" dirty="0" smtClean="0"/>
+            <a:endParaRPr lang="en-US"/>
+          </a:p>
+          <a:p>
+            <a:pPr>
+              <a:defRPr/>
+            </a:pPr>
+            <a:r>
+              <a:rPr lang="as-IN" b="1"/>
               <a:t>উদাহরণ:</a:t>
             </a:r>
-          </a:p>
-          <a:p>
-            <a:pPr lvl="1"/>
-            <a:r>
-              <a:rPr lang="en-US" dirty="0" smtClean="0"/>
+            <a:endParaRPr/>
+          </a:p>
+          <a:p>
+            <a:pPr lvl="1">
+              <a:defRPr/>
+            </a:pPr>
+            <a:r>
+              <a:rPr lang="en-US"/>
               <a:t>Mobile phone-</a:t>
             </a:r>
             <a:r>
-              <a:rPr lang="as-IN" dirty="0" smtClean="0"/>
+              <a:rPr lang="as-IN"/>
               <a:t>এর </a:t>
             </a:r>
             <a:r>
-              <a:rPr lang="en-US" b="1" dirty="0" smtClean="0"/>
+              <a:rPr lang="en-US" b="1"/>
               <a:t>accelerometer</a:t>
             </a:r>
             <a:r>
-              <a:rPr lang="en-US" dirty="0" smtClean="0"/>
+              <a:rPr lang="en-US"/>
               <a:t> (</a:t>
             </a:r>
             <a:r>
-              <a:rPr lang="as-IN" dirty="0" smtClean="0"/>
+              <a:rPr lang="as-IN"/>
               <a:t>ফোন ঘোরালে </a:t>
             </a:r>
             <a:r>
-              <a:rPr lang="en-US" dirty="0" smtClean="0"/>
+              <a:rPr lang="en-US"/>
               <a:t>screen rotate </a:t>
             </a:r>
             <a:r>
-              <a:rPr lang="as-IN" dirty="0" smtClean="0"/>
+              <a:rPr lang="as-IN"/>
               <a:t>হয়) </a:t>
             </a:r>
-          </a:p>
-          <a:p>
-            <a:pPr lvl="1"/>
-            <a:r>
-              <a:rPr lang="en-US" dirty="0" smtClean="0"/>
+            <a:endParaRPr/>
+          </a:p>
+          <a:p>
+            <a:pPr lvl="1">
+              <a:defRPr/>
+            </a:pPr>
+            <a:r>
+              <a:rPr lang="en-US"/>
               <a:t>Car airbag sensor </a:t>
             </a:r>
-          </a:p>
-          <a:p>
-            <a:pPr lvl="1"/>
-            <a:r>
-              <a:rPr lang="en-US" dirty="0" smtClean="0"/>
+            <a:endParaRPr/>
+          </a:p>
+          <a:p>
+            <a:pPr lvl="1">
+              <a:defRPr/>
+            </a:pPr>
+            <a:r>
+              <a:rPr lang="en-US"/>
               <a:t>Inkjet printer head </a:t>
             </a:r>
-          </a:p>
-          <a:p>
-            <a:endParaRPr lang="en-US" dirty="0"/>
+            <a:endParaRPr/>
+          </a:p>
+          <a:p>
+            <a:pPr>
+              <a:defRPr/>
+            </a:pPr>
+            <a:endParaRPr lang="en-US"/>
           </a:p>
         </p:txBody>
       </p:sp>
     </p:spTree>
-    <p:extLst>
-      <p:ext uri="{BB962C8B-B14F-4D97-AF65-F5344CB8AC3E}">
-        <p14:creationId xmlns:p14="http://schemas.microsoft.com/office/powerpoint/2010/main" val="477767734"/>
-      </p:ext>
-    </p:extLst>
   </p:cSld>
   <p:clrMapOvr>
     <a:masterClrMapping/>
   </p:clrMapOvr>
+  <mc:AlternateContent xmlns:mc="http://schemas.openxmlformats.org/markup-compatibility/2006">
+    <mc:Choice xmlns:p159="http://schemas.microsoft.com/office/powerpoint/2015/09/main" xmlns:p14="http://schemas.microsoft.com/office/powerpoint/2010/main" Requires="p159">
+      <p:transition p14:dur="500" advClick="1"/>
+    </mc:Choice>
+    <mc:Fallback>
+      <p:transition advClick="1"/>
+    </mc:Fallback>
+  </mc:AlternateContent>
 </p:sld>
 </file>
 
 <file path=ppt/slides/slide8.xml><?xml version="1.0" encoding="utf-8"?>
-<p:sld xmlns:a="http://schemas.openxmlformats.org/drawingml/2006/main" xmlns:r="http://schemas.openxmlformats.org/officeDocument/2006/relationships" xmlns:p="http://schemas.openxmlformats.org/presentationml/2006/main">
-  <p:cSld>
+<p:sld xmlns:a="http://schemas.openxmlformats.org/drawingml/2006/main" xmlns:r="http://schemas.openxmlformats.org/officeDocument/2006/relationships" xmlns:p="http://schemas.openxmlformats.org/presentationml/2006/main" xmlns:m="http://schemas.openxmlformats.org/officeDocument/2006/math" xmlns:w="http://schemas.openxmlformats.org/wordprocessingml/2006/main" xmlns:mc="http://schemas.openxmlformats.org/markup-compatibility/2006" showMasterPhAnim="0" showMasterSp="1" show="1">
+  <p:cSld name="">
     <p:spTree>
       <p:nvGrpSpPr>
         <p:cNvPr id="1" name=""/>
         <p:cNvGrpSpPr/>
         <p:nvPr/>
       </p:nvGrpSpPr>
-      <p:grpSpPr>
+      <p:grpSpPr bwMode="auto">
         <a:xfrm>
           <a:off x="0" y="0"/>
           <a:ext cx="0" cy="0"/>
@@ -4338,7 +5970,7 @@
       </p:grpSpPr>
       <p:sp>
         <p:nvSpPr>
-          <p:cNvPr id="2" name="Title 1"/>
+          <p:cNvPr id="2119590324" name="Title 1"/>
           <p:cNvSpPr>
             <a:spLocks noGrp="1"/>
           </p:cNvSpPr>
@@ -4346,22 +5978,25 @@
             <p:ph type="title"/>
           </p:nvPr>
         </p:nvSpPr>
-        <p:spPr/>
-        <p:txBody>
-          <a:bodyPr/>
-          <a:lstStyle/>
-          <a:p>
-            <a:r>
-              <a:rPr lang="en-US" b="1" dirty="0" smtClean="0"/>
+        <p:spPr bwMode="auto"/>
+        <p:txBody>
+          <a:bodyPr/>
+          <a:lstStyle/>
+          <a:p>
+            <a:pPr>
+              <a:defRPr/>
+            </a:pPr>
+            <a:r>
+              <a:rPr lang="en-US" b="1"/>
               <a:t>3. Optical Amplifiers</a:t>
             </a:r>
-            <a:endParaRPr lang="en-US" b="1" dirty="0"/>
-          </a:p>
-        </p:txBody>
-      </p:sp>
-      <p:sp>
-        <p:nvSpPr>
-          <p:cNvPr id="3" name="Content Placeholder 2"/>
+            <a:endParaRPr lang="en-US" b="1"/>
+          </a:p>
+        </p:txBody>
+      </p:sp>
+      <p:sp>
+        <p:nvSpPr>
+          <p:cNvPr id="664494747" name="Content Placeholder 2"/>
           <p:cNvSpPr>
             <a:spLocks noGrp="1"/>
           </p:cNvSpPr>
@@ -4369,17 +6004,20 @@
             <p:ph idx="1"/>
           </p:nvPr>
         </p:nvSpPr>
-        <p:spPr/>
-        <p:txBody>
-          <a:bodyPr/>
-          <a:lstStyle/>
-          <a:p>
-            <a:r>
-              <a:rPr lang="en-US" dirty="0" smtClean="0"/>
+        <p:spPr bwMode="auto"/>
+        <p:txBody>
+          <a:bodyPr/>
+          <a:lstStyle/>
+          <a:p>
+            <a:pPr>
+              <a:defRPr/>
+            </a:pPr>
+            <a:r>
+              <a:rPr lang="en-US"/>
               <a:t>In the past, to boost a signal, we </a:t>
             </a:r>
             <a:r>
-              <a:rPr lang="en-US" dirty="0" smtClean="0">
+              <a:rPr lang="en-US">
                 <a:solidFill>
                   <a:srgbClr val="FF0000"/>
                 </a:solidFill>
@@ -4387,11 +6025,11 @@
               <a:t>had to convert light to electricity</a:t>
             </a:r>
             <a:r>
-              <a:rPr lang="en-US" dirty="0" smtClean="0"/>
+              <a:rPr lang="en-US"/>
               <a:t>, </a:t>
             </a:r>
             <a:r>
-              <a:rPr lang="en-US" dirty="0" smtClean="0">
+              <a:rPr lang="en-US">
                 <a:solidFill>
                   <a:srgbClr val="FF0000"/>
                 </a:solidFill>
@@ -4399,13 +6037,17 @@
               <a:t>amplify it, and turn it back to light</a:t>
             </a:r>
             <a:r>
-              <a:rPr lang="en-US" dirty="0" smtClean="0"/>
+              <a:rPr lang="en-US"/>
               <a:t>. </a:t>
             </a:r>
-          </a:p>
-          <a:p>
-            <a:r>
-              <a:rPr lang="en-US" dirty="0" smtClean="0">
+            <a:endParaRPr/>
+          </a:p>
+          <a:p>
+            <a:pPr>
+              <a:defRPr/>
+            </a:pPr>
+            <a:r>
+              <a:rPr lang="en-US">
                 <a:solidFill>
                   <a:srgbClr val="FF0000"/>
                 </a:solidFill>
@@ -4413,7 +6055,7 @@
               <a:t>Modern </a:t>
             </a:r>
             <a:r>
-              <a:rPr lang="en-US" b="1" dirty="0" smtClean="0">
+              <a:rPr lang="en-US" b="1">
                 <a:solidFill>
                   <a:srgbClr val="FF0000"/>
                 </a:solidFill>
@@ -4421,7 +6063,7 @@
               <a:t>Optical Amplifiers</a:t>
             </a:r>
             <a:r>
-              <a:rPr lang="en-US" dirty="0" smtClean="0">
+              <a:rPr lang="en-US">
                 <a:solidFill>
                   <a:srgbClr val="FF0000"/>
                 </a:solidFill>
@@ -4429,36 +6071,39 @@
               <a:t> boost the light signal directly</a:t>
             </a:r>
             <a:r>
-              <a:rPr lang="en-US" dirty="0" smtClean="0"/>
+              <a:rPr lang="en-US"/>
               <a:t>.</a:t>
             </a:r>
-            <a:endParaRPr lang="en-US" dirty="0"/>
+            <a:endParaRPr lang="en-US"/>
           </a:p>
         </p:txBody>
       </p:sp>
     </p:spTree>
-    <p:extLst>
-      <p:ext uri="{BB962C8B-B14F-4D97-AF65-F5344CB8AC3E}">
-        <p14:creationId xmlns:p14="http://schemas.microsoft.com/office/powerpoint/2010/main" val="1755420526"/>
-      </p:ext>
-    </p:extLst>
   </p:cSld>
   <p:clrMapOvr>
     <a:masterClrMapping/>
   </p:clrMapOvr>
+  <mc:AlternateContent xmlns:mc="http://schemas.openxmlformats.org/markup-compatibility/2006">
+    <mc:Choice xmlns:p159="http://schemas.microsoft.com/office/powerpoint/2015/09/main" xmlns:p14="http://schemas.microsoft.com/office/powerpoint/2010/main" Requires="p159">
+      <p:transition p14:dur="500" advClick="1"/>
+    </mc:Choice>
+    <mc:Fallback>
+      <p:transition advClick="1"/>
+    </mc:Fallback>
+  </mc:AlternateContent>
 </p:sld>
 </file>
 
 <file path=ppt/slides/slide9.xml><?xml version="1.0" encoding="utf-8"?>
-<p:sld xmlns:a="http://schemas.openxmlformats.org/drawingml/2006/main" xmlns:r="http://schemas.openxmlformats.org/officeDocument/2006/relationships" xmlns:p="http://schemas.openxmlformats.org/presentationml/2006/main">
-  <p:cSld>
+<p:sld xmlns:a="http://schemas.openxmlformats.org/drawingml/2006/main" xmlns:r="http://schemas.openxmlformats.org/officeDocument/2006/relationships" xmlns:p="http://schemas.openxmlformats.org/presentationml/2006/main" xmlns:m="http://schemas.openxmlformats.org/officeDocument/2006/math" xmlns:w="http://schemas.openxmlformats.org/wordprocessingml/2006/main" xmlns:mc="http://schemas.openxmlformats.org/markup-compatibility/2006" showMasterPhAnim="0" showMasterSp="1" show="1">
+  <p:cSld name="">
     <p:spTree>
       <p:nvGrpSpPr>
         <p:cNvPr id="1" name=""/>
         <p:cNvGrpSpPr/>
         <p:nvPr/>
       </p:nvGrpSpPr>
-      <p:grpSpPr>
+      <p:grpSpPr bwMode="auto">
         <a:xfrm>
           <a:off x="0" y="0"/>
           <a:ext cx="0" cy="0"/>
@@ -4468,7 +6113,7 @@
       </p:grpSpPr>
       <p:sp>
         <p:nvSpPr>
-          <p:cNvPr id="2" name="Title 1"/>
+          <p:cNvPr id="1633509822" name="Title 1"/>
           <p:cNvSpPr>
             <a:spLocks noGrp="1"/>
           </p:cNvSpPr>
@@ -4476,22 +6121,25 @@
             <p:ph type="title"/>
           </p:nvPr>
         </p:nvSpPr>
-        <p:spPr/>
-        <p:txBody>
-          <a:bodyPr/>
-          <a:lstStyle/>
-          <a:p>
-            <a:r>
-              <a:rPr lang="en-US" b="1" dirty="0" smtClean="0"/>
+        <p:spPr bwMode="auto"/>
+        <p:txBody>
+          <a:bodyPr/>
+          <a:lstStyle/>
+          <a:p>
+            <a:pPr>
+              <a:defRPr/>
+            </a:pPr>
+            <a:r>
+              <a:rPr lang="en-US" b="1"/>
               <a:t>3. Optical Amplifiers</a:t>
             </a:r>
-            <a:endParaRPr lang="en-US" b="1" dirty="0"/>
-          </a:p>
-        </p:txBody>
-      </p:sp>
-      <p:sp>
-        <p:nvSpPr>
-          <p:cNvPr id="3" name="Content Placeholder 2"/>
+            <a:endParaRPr lang="en-US" b="1"/>
+          </a:p>
+        </p:txBody>
+      </p:sp>
+      <p:sp>
+        <p:nvSpPr>
+          <p:cNvPr id="648860905" name="Content Placeholder 2"/>
           <p:cNvSpPr>
             <a:spLocks noGrp="1"/>
           </p:cNvSpPr>
@@ -4499,30 +6147,36 @@
             <p:ph idx="1"/>
           </p:nvPr>
         </p:nvSpPr>
-        <p:spPr/>
+        <p:spPr bwMode="auto"/>
         <p:txBody>
           <a:bodyPr>
             <a:normAutofit fontScale="92500" lnSpcReduction="10000"/>
           </a:bodyPr>
           <a:lstStyle/>
           <a:p>
-            <a:r>
-              <a:rPr lang="en-US" b="1" dirty="0" smtClean="0"/>
+            <a:pPr>
+              <a:defRPr/>
+            </a:pPr>
+            <a:r>
+              <a:rPr lang="en-US" b="1"/>
               <a:t>SOA (Semiconductor Optical Amplifier)</a:t>
             </a:r>
-          </a:p>
-          <a:p>
-            <a:pPr lvl="1"/>
-            <a:r>
-              <a:rPr lang="en-US" b="1" dirty="0" smtClean="0"/>
+            <a:endParaRPr/>
+          </a:p>
+          <a:p>
+            <a:pPr lvl="1">
+              <a:defRPr/>
+            </a:pPr>
+            <a:r>
+              <a:rPr lang="en-US" b="1"/>
               <a:t>Mechanism:</a:t>
             </a:r>
             <a:r>
-              <a:rPr lang="en-US" dirty="0" smtClean="0"/>
+              <a:rPr lang="en-US"/>
               <a:t> Uses a semiconductor chip (</a:t>
             </a:r>
             <a:r>
-              <a:rPr lang="en-US" dirty="0" smtClean="0">
+              <a:rPr lang="en-US">
                 <a:solidFill>
                   <a:srgbClr val="FF0000"/>
                 </a:solidFill>
@@ -4530,22 +6184,25 @@
               <a:t>similar to a laser but without the mirrors</a:t>
             </a:r>
             <a:r>
-              <a:rPr lang="en-US" dirty="0" smtClean="0"/>
+              <a:rPr lang="en-US"/>
               <a:t>).</a:t>
             </a:r>
-          </a:p>
-          <a:p>
-            <a:pPr lvl="1"/>
-            <a:r>
-              <a:rPr lang="en-US" b="1" dirty="0" smtClean="0"/>
+            <a:endParaRPr/>
+          </a:p>
+          <a:p>
+            <a:pPr lvl="1">
+              <a:defRPr/>
+            </a:pPr>
+            <a:r>
+              <a:rPr lang="en-US" b="1"/>
               <a:t>Pros:</a:t>
             </a:r>
             <a:r>
-              <a:rPr lang="en-US" dirty="0" smtClean="0"/>
+              <a:rPr lang="en-US"/>
               <a:t> </a:t>
             </a:r>
             <a:r>
-              <a:rPr lang="en-US" dirty="0" smtClean="0">
+              <a:rPr lang="en-US">
                 <a:solidFill>
                   <a:srgbClr val="FF0000"/>
                 </a:solidFill>
@@ -4553,22 +6210,25 @@
               <a:t>Small, can be integrated on circuits</a:t>
             </a:r>
             <a:r>
-              <a:rPr lang="en-US" dirty="0" smtClean="0"/>
+              <a:rPr lang="en-US"/>
               <a:t>.</a:t>
             </a:r>
-          </a:p>
-          <a:p>
-            <a:pPr lvl="1"/>
-            <a:r>
-              <a:rPr lang="en-US" b="1" dirty="0" smtClean="0"/>
+            <a:endParaRPr/>
+          </a:p>
+          <a:p>
+            <a:pPr lvl="1">
+              <a:defRPr/>
+            </a:pPr>
+            <a:r>
+              <a:rPr lang="en-US" b="1"/>
               <a:t>Cons:</a:t>
             </a:r>
             <a:r>
-              <a:rPr lang="en-US" dirty="0" smtClean="0"/>
+              <a:rPr lang="en-US"/>
               <a:t> </a:t>
             </a:r>
             <a:r>
-              <a:rPr lang="en-US" dirty="0" smtClean="0">
+              <a:rPr lang="en-US">
                 <a:solidFill>
                   <a:srgbClr val="FF0000"/>
                 </a:solidFill>
@@ -4576,28 +6236,35 @@
               <a:t>Higher noise and lower power than fiber-based amplifiers</a:t>
             </a:r>
             <a:r>
-              <a:rPr lang="en-US" dirty="0" smtClean="0"/>
+              <a:rPr lang="en-US"/>
               <a:t>.</a:t>
             </a:r>
-          </a:p>
-          <a:p>
-            <a:r>
-              <a:rPr lang="en-US" b="1" dirty="0" smtClean="0"/>
+            <a:endParaRPr/>
+          </a:p>
+          <a:p>
+            <a:pPr>
+              <a:defRPr/>
+            </a:pPr>
+            <a:r>
+              <a:rPr lang="en-US" b="1"/>
               <a:t>EDFA (Erbium-Doped Fiber Amplifier)</a:t>
             </a:r>
-          </a:p>
-          <a:p>
-            <a:pPr lvl="1"/>
-            <a:r>
-              <a:rPr lang="en-US" b="1" dirty="0" smtClean="0"/>
+            <a:endParaRPr/>
+          </a:p>
+          <a:p>
+            <a:pPr lvl="1">
+              <a:defRPr/>
+            </a:pPr>
+            <a:r>
+              <a:rPr lang="en-US" b="1"/>
               <a:t>Mechanism:</a:t>
             </a:r>
             <a:r>
-              <a:rPr lang="en-US" dirty="0" smtClean="0"/>
+              <a:rPr lang="en-US"/>
               <a:t> </a:t>
             </a:r>
             <a:r>
-              <a:rPr lang="en-US" dirty="0" smtClean="0">
+              <a:rPr lang="en-US">
                 <a:solidFill>
                   <a:srgbClr val="FF0000"/>
                 </a:solidFill>
@@ -4605,18 +6272,21 @@
               <a:t>A piece of glass fiber is "doped" with Erbium ions</a:t>
             </a:r>
             <a:r>
-              <a:rPr lang="en-US" dirty="0" smtClean="0"/>
+              <a:rPr lang="en-US"/>
               <a:t>. </a:t>
             </a:r>
-          </a:p>
-          <a:p>
-            <a:pPr lvl="2"/>
-            <a:r>
-              <a:rPr lang="en-US" dirty="0" smtClean="0"/>
+            <a:endParaRPr/>
+          </a:p>
+          <a:p>
+            <a:pPr lvl="2">
+              <a:defRPr/>
+            </a:pPr>
+            <a:r>
+              <a:rPr lang="en-US"/>
               <a:t>A "pump laser" </a:t>
             </a:r>
             <a:r>
-              <a:rPr lang="en-US" dirty="0" smtClean="0">
+              <a:rPr lang="en-US">
                 <a:solidFill>
                   <a:srgbClr val="FF0000"/>
                 </a:solidFill>
@@ -4624,47 +6294,57 @@
               <a:t>excites these ions, and when the signal passes through, the ions release energy to boost the signal</a:t>
             </a:r>
             <a:r>
-              <a:rPr lang="en-US" dirty="0" smtClean="0"/>
+              <a:rPr lang="en-US"/>
               <a:t>.</a:t>
             </a:r>
-          </a:p>
-          <a:p>
-            <a:pPr lvl="1"/>
-            <a:r>
-              <a:rPr lang="en-US" b="1" dirty="0" smtClean="0"/>
+            <a:endParaRPr/>
+          </a:p>
+          <a:p>
+            <a:pPr lvl="1">
+              <a:defRPr/>
+            </a:pPr>
+            <a:r>
+              <a:rPr lang="en-US" b="1"/>
               <a:t>Standard:</a:t>
             </a:r>
             <a:r>
-              <a:rPr lang="en-US" dirty="0" smtClean="0"/>
+              <a:rPr lang="en-US"/>
               <a:t> This is the </a:t>
             </a:r>
             <a:r>
-              <a:rPr lang="en-US" dirty="0" smtClean="0">
+              <a:rPr lang="en-US">
                 <a:solidFill>
                   <a:srgbClr val="FF0000"/>
                 </a:solidFill>
               </a:rPr>
               <a:t>"gold standard" for long-distance internet because it can amplify many WDM channels at once without distortion.</a:t>
             </a:r>
-          </a:p>
-          <a:p>
-            <a:r>
-              <a:rPr lang="en-US" b="1" dirty="0" smtClean="0"/>
+            <a:endParaRPr/>
+          </a:p>
+          <a:p>
+            <a:pPr>
+              <a:defRPr/>
+            </a:pPr>
+            <a:r>
+              <a:rPr lang="en-US" b="1"/>
               <a:t>EBFA (Erbium-Bismuth Fiber Amplifier)</a:t>
             </a:r>
-          </a:p>
-          <a:p>
-            <a:pPr lvl="1"/>
-            <a:r>
-              <a:rPr lang="en-US" b="1" dirty="0" smtClean="0"/>
+            <a:endParaRPr/>
+          </a:p>
+          <a:p>
+            <a:pPr lvl="1">
+              <a:defRPr/>
+            </a:pPr>
+            <a:r>
+              <a:rPr lang="en-US" b="1"/>
               <a:t>Evolution:</a:t>
             </a:r>
             <a:r>
-              <a:rPr lang="en-US" dirty="0" smtClean="0"/>
+              <a:rPr lang="en-US"/>
               <a:t> Similar to EDFA </a:t>
             </a:r>
             <a:r>
-              <a:rPr lang="en-US" dirty="0" smtClean="0">
+              <a:rPr lang="en-US">
                 <a:solidFill>
                   <a:srgbClr val="FF0000"/>
                 </a:solidFill>
@@ -4672,7 +6352,7 @@
               <a:t>but uses Bismuth-doped glass to provide a </a:t>
             </a:r>
             <a:r>
-              <a:rPr lang="en-US" b="1" dirty="0" smtClean="0">
+              <a:rPr lang="en-US" b="1">
                 <a:solidFill>
                   <a:srgbClr val="FF0000"/>
                 </a:solidFill>
@@ -4680,15 +6360,15 @@
               <a:t>wider </a:t>
             </a:r>
             <a:r>
-              <a:rPr lang="en-US" b="1" dirty="0" smtClean="0"/>
+              <a:rPr lang="en-US" b="1"/>
               <a:t>bandwidth</a:t>
             </a:r>
             <a:r>
-              <a:rPr lang="en-US" dirty="0" smtClean="0"/>
+              <a:rPr lang="en-US"/>
               <a:t>, allowing even </a:t>
             </a:r>
             <a:r>
-              <a:rPr lang="en-US" dirty="0" smtClean="0">
+              <a:rPr lang="en-US">
                 <a:solidFill>
                   <a:srgbClr val="FF0000"/>
                 </a:solidFill>
@@ -4696,28 +6376,31 @@
               <a:t>more WDM channels to be packed into the fiber</a:t>
             </a:r>
             <a:r>
-              <a:rPr lang="en-US" dirty="0" smtClean="0"/>
+              <a:rPr lang="en-US"/>
               <a:t>.</a:t>
             </a:r>
-            <a:endParaRPr lang="en-US" dirty="0"/>
+            <a:endParaRPr lang="en-US"/>
           </a:p>
         </p:txBody>
       </p:sp>
     </p:spTree>
-    <p:extLst>
-      <p:ext uri="{BB962C8B-B14F-4D97-AF65-F5344CB8AC3E}">
-        <p14:creationId xmlns:p14="http://schemas.microsoft.com/office/powerpoint/2010/main" val="2630535390"/>
-      </p:ext>
-    </p:extLst>
   </p:cSld>
   <p:clrMapOvr>
     <a:masterClrMapping/>
   </p:clrMapOvr>
+  <mc:AlternateContent xmlns:mc="http://schemas.openxmlformats.org/markup-compatibility/2006">
+    <mc:Choice xmlns:p159="http://schemas.microsoft.com/office/powerpoint/2015/09/main" xmlns:p14="http://schemas.microsoft.com/office/powerpoint/2010/main" Requires="p159">
+      <p:transition p14:dur="500" advClick="1"/>
+    </mc:Choice>
+    <mc:Fallback>
+      <p:transition advClick="1"/>
+    </mc:Fallback>
+  </mc:AlternateContent>
 </p:sld>
 </file>
 
 <file path=ppt/theme/theme1.xml><?xml version="1.0" encoding="utf-8"?>
-<a:theme xmlns:a="http://schemas.openxmlformats.org/drawingml/2006/main" name="Office Theme">
+<a:theme xmlns:a="http://schemas.openxmlformats.org/drawingml/2006/main" xmlns:r="http://schemas.openxmlformats.org/officeDocument/2006/relationships" xmlns:p="http://schemas.openxmlformats.org/presentationml/2006/main" name="Office Theme">
   <a:themeElements>
     <a:clrScheme name="Office">
       <a:dk1>
@@ -4759,74 +6442,14 @@
     </a:clrScheme>
     <a:fontScheme name="Office">
       <a:majorFont>
-        <a:latin typeface="Calibri Light" panose="020F0302020204030204"/>
-        <a:ea typeface=""/>
-        <a:cs typeface=""/>
-        <a:font script="Jpan" typeface="游ゴシック Light"/>
-        <a:font script="Hang" typeface="맑은 고딕"/>
-        <a:font script="Hans" typeface="等线 Light"/>
-        <a:font script="Hant" typeface="新細明體"/>
-        <a:font script="Arab" typeface="Times New Roman"/>
-        <a:font script="Hebr" typeface="Times New Roman"/>
-        <a:font script="Thai" typeface="Angsana New"/>
-        <a:font script="Ethi" typeface="Nyala"/>
-        <a:font script="Beng" typeface="Vrinda"/>
-        <a:font script="Gujr" typeface="Shruti"/>
-        <a:font script="Khmr" typeface="MoolBoran"/>
-        <a:font script="Knda" typeface="Tunga"/>
-        <a:font script="Guru" typeface="Raavi"/>
-        <a:font script="Cans" typeface="Euphemia"/>
-        <a:font script="Cher" typeface="Plantagenet Cherokee"/>
-        <a:font script="Yiii" typeface="Microsoft Yi Baiti"/>
-        <a:font script="Tibt" typeface="Microsoft Himalaya"/>
-        <a:font script="Thaa" typeface="MV Boli"/>
-        <a:font script="Deva" typeface="Mangal"/>
-        <a:font script="Telu" typeface="Gautami"/>
-        <a:font script="Taml" typeface="Latha"/>
-        <a:font script="Syrc" typeface="Estrangelo Edessa"/>
-        <a:font script="Orya" typeface="Kalinga"/>
-        <a:font script="Mlym" typeface="Kartika"/>
-        <a:font script="Laoo" typeface="DokChampa"/>
-        <a:font script="Sinh" typeface="Iskoola Pota"/>
-        <a:font script="Mong" typeface="Mongolian Baiti"/>
-        <a:font script="Viet" typeface="Times New Roman"/>
-        <a:font script="Uigh" typeface="Microsoft Uighur"/>
-        <a:font script="Geor" typeface="Sylfaen"/>
+        <a:latin typeface="Calibri Light"/>
+        <a:ea typeface="Arial"/>
+        <a:cs typeface="Arial"/>
       </a:majorFont>
       <a:minorFont>
-        <a:latin typeface="Calibri" panose="020F0502020204030204"/>
-        <a:ea typeface=""/>
-        <a:cs typeface=""/>
-        <a:font script="Jpan" typeface="游ゴシック"/>
-        <a:font script="Hang" typeface="맑은 고딕"/>
-        <a:font script="Hans" typeface="等线"/>
-        <a:font script="Hant" typeface="新細明體"/>
-        <a:font script="Arab" typeface="Arial"/>
-        <a:font script="Hebr" typeface="Arial"/>
-        <a:font script="Thai" typeface="Cordia New"/>
-        <a:font script="Ethi" typeface="Nyala"/>
-        <a:font script="Beng" typeface="Vrinda"/>
-        <a:font script="Gujr" typeface="Shruti"/>
-        <a:font script="Khmr" typeface="DaunPenh"/>
-        <a:font script="Knda" typeface="Tunga"/>
-        <a:font script="Guru" typeface="Raavi"/>
-        <a:font script="Cans" typeface="Euphemia"/>
-        <a:font script="Cher" typeface="Plantagenet Cherokee"/>
-        <a:font script="Yiii" typeface="Microsoft Yi Baiti"/>
-        <a:font script="Tibt" typeface="Microsoft Himalaya"/>
-        <a:font script="Thaa" typeface="MV Boli"/>
-        <a:font script="Deva" typeface="Mangal"/>
-        <a:font script="Telu" typeface="Gautami"/>
-        <a:font script="Taml" typeface="Latha"/>
-        <a:font script="Syrc" typeface="Estrangelo Edessa"/>
-        <a:font script="Orya" typeface="Kalinga"/>
-        <a:font script="Mlym" typeface="Kartika"/>
-        <a:font script="Laoo" typeface="DokChampa"/>
-        <a:font script="Sinh" typeface="Iskoola Pota"/>
-        <a:font script="Mong" typeface="Mongolian Baiti"/>
-        <a:font script="Viet" typeface="Arial"/>
-        <a:font script="Uigh" typeface="Microsoft Uighur"/>
-        <a:font script="Geor" typeface="Sylfaen"/>
+        <a:latin typeface="Calibri"/>
+        <a:ea typeface="Arial"/>
+        <a:cs typeface="Arial"/>
       </a:minorFont>
     </a:fontScheme>
     <a:fmtScheme name="Office">
@@ -4834,7 +6457,7 @@
         <a:solidFill>
           <a:schemeClr val="phClr"/>
         </a:solidFill>
-        <a:gradFill rotWithShape="1">
+        <a:gradFill>
           <a:gsLst>
             <a:gs pos="0">
               <a:schemeClr val="phClr">
@@ -4860,7 +6483,7 @@
           </a:gsLst>
           <a:lin ang="5400000" scaled="0"/>
         </a:gradFill>
-        <a:gradFill rotWithShape="1">
+        <a:gradFill>
           <a:gsLst>
             <a:gs pos="0">
               <a:schemeClr val="phClr">
@@ -4937,7 +6560,7 @@
             <a:satMod val="170000"/>
           </a:schemeClr>
         </a:solidFill>
-        <a:gradFill rotWithShape="1">
+        <a:gradFill>
           <a:gsLst>
             <a:gs pos="0">
               <a:schemeClr val="phClr">
@@ -4968,11 +6591,200 @@
     </a:fmtScheme>
   </a:themeElements>
   <a:objectDefaults/>
-  <a:extraClrSchemeLst/>
-  <a:extLst>
-    <a:ext uri="{05A4C25C-085E-4340-85A3-A5531E510DB2}">
-      <thm15:themeFamily xmlns:thm15="http://schemas.microsoft.com/office/thememl/2012/main" name="Office Theme" id="{62F939B6-93AF-4DB8-9C6B-D6C7DFDC589F}" vid="{4A3C46E8-61CC-4603-A589-7422A47A8E4A}"/>
-    </a:ext>
-  </a:extLst>
+</a:theme>
+</file>
+
+<file path=ppt/theme/theme2.xml><?xml version="1.0" encoding="utf-8"?>
+<a:theme xmlns:a="http://schemas.openxmlformats.org/drawingml/2006/main" xmlns:r="http://schemas.openxmlformats.org/officeDocument/2006/relationships" xmlns:p="http://schemas.openxmlformats.org/presentationml/2006/main" name="Office Theme">
+  <a:themeElements>
+    <a:clrScheme name="Office">
+      <a:dk1>
+        <a:sysClr val="windowText" lastClr="000000"/>
+      </a:dk1>
+      <a:lt1>
+        <a:sysClr val="window" lastClr="FFFFFF"/>
+      </a:lt1>
+      <a:dk2>
+        <a:srgbClr val="44546A"/>
+      </a:dk2>
+      <a:lt2>
+        <a:srgbClr val="E7E6E6"/>
+      </a:lt2>
+      <a:accent1>
+        <a:srgbClr val="5B9BD5"/>
+      </a:accent1>
+      <a:accent2>
+        <a:srgbClr val="ED7D31"/>
+      </a:accent2>
+      <a:accent3>
+        <a:srgbClr val="A5A5A5"/>
+      </a:accent3>
+      <a:accent4>
+        <a:srgbClr val="FFC000"/>
+      </a:accent4>
+      <a:accent5>
+        <a:srgbClr val="4472C4"/>
+      </a:accent5>
+      <a:accent6>
+        <a:srgbClr val="70AD47"/>
+      </a:accent6>
+      <a:hlink>
+        <a:srgbClr val="0563C1"/>
+      </a:hlink>
+      <a:folHlink>
+        <a:srgbClr val="954F72"/>
+      </a:folHlink>
+    </a:clrScheme>
+    <a:fontScheme name="">
+      <a:majorFont>
+        <a:latin typeface="Calibri Light"/>
+        <a:ea typeface="Arial"/>
+        <a:cs typeface="Arial"/>
+      </a:majorFont>
+      <a:minorFont>
+        <a:latin typeface="Calibri"/>
+        <a:ea typeface="Arial"/>
+        <a:cs typeface="Arial"/>
+      </a:minorFont>
+    </a:fontScheme>
+    <a:fmtScheme name="Office">
+      <a:fillStyleLst>
+        <a:solidFill>
+          <a:schemeClr val="phClr"/>
+        </a:solidFill>
+        <a:gradFill>
+          <a:gsLst>
+            <a:gs pos="0">
+              <a:schemeClr val="phClr">
+                <a:lumMod val="110000"/>
+                <a:satMod val="105000"/>
+                <a:tint val="67000"/>
+              </a:schemeClr>
+            </a:gs>
+            <a:gs pos="50000">
+              <a:schemeClr val="phClr">
+                <a:lumMod val="105000"/>
+                <a:satMod val="103000"/>
+                <a:tint val="73000"/>
+              </a:schemeClr>
+            </a:gs>
+            <a:gs pos="100000">
+              <a:schemeClr val="phClr">
+                <a:lumMod val="105000"/>
+                <a:satMod val="109000"/>
+                <a:tint val="81000"/>
+              </a:schemeClr>
+            </a:gs>
+          </a:gsLst>
+          <a:lin ang="5400000" scaled="0"/>
+        </a:gradFill>
+        <a:gradFill>
+          <a:gsLst>
+            <a:gs pos="0">
+              <a:schemeClr val="phClr">
+                <a:satMod val="103000"/>
+                <a:lumMod val="102000"/>
+                <a:tint val="94000"/>
+              </a:schemeClr>
+            </a:gs>
+            <a:gs pos="50000">
+              <a:schemeClr val="phClr">
+                <a:satMod val="110000"/>
+                <a:lumMod val="100000"/>
+                <a:shade val="100000"/>
+              </a:schemeClr>
+            </a:gs>
+            <a:gs pos="100000">
+              <a:schemeClr val="phClr">
+                <a:lumMod val="99000"/>
+                <a:satMod val="120000"/>
+                <a:shade val="78000"/>
+              </a:schemeClr>
+            </a:gs>
+          </a:gsLst>
+          <a:lin ang="5400000" scaled="0"/>
+        </a:gradFill>
+      </a:fillStyleLst>
+      <a:lnStyleLst>
+        <a:ln w="6350" cap="flat" cmpd="sng" algn="ctr">
+          <a:solidFill>
+            <a:schemeClr val="phClr"/>
+          </a:solidFill>
+          <a:prstDash val="solid"/>
+          <a:miter lim="800000"/>
+        </a:ln>
+        <a:ln w="12700" cap="flat" cmpd="sng" algn="ctr">
+          <a:solidFill>
+            <a:schemeClr val="phClr"/>
+          </a:solidFill>
+          <a:prstDash val="solid"/>
+          <a:miter lim="800000"/>
+        </a:ln>
+        <a:ln w="19050" cap="flat" cmpd="sng" algn="ctr">
+          <a:solidFill>
+            <a:schemeClr val="phClr"/>
+          </a:solidFill>
+          <a:prstDash val="solid"/>
+          <a:miter lim="800000"/>
+        </a:ln>
+      </a:lnStyleLst>
+      <a:effectStyleLst>
+        <a:effectStyle>
+          <a:effectLst/>
+        </a:effectStyle>
+        <a:effectStyle>
+          <a:effectLst/>
+        </a:effectStyle>
+        <a:effectStyle>
+          <a:effectLst>
+            <a:outerShdw blurRad="57150" dist="19050" dir="5400000" algn="ctr" rotWithShape="0">
+              <a:srgbClr val="000000">
+                <a:alpha val="63000"/>
+              </a:srgbClr>
+            </a:outerShdw>
+          </a:effectLst>
+        </a:effectStyle>
+      </a:effectStyleLst>
+      <a:bgFillStyleLst>
+        <a:solidFill>
+          <a:schemeClr val="phClr"/>
+        </a:solidFill>
+        <a:solidFill>
+          <a:schemeClr val="phClr">
+            <a:tint val="95000"/>
+            <a:satMod val="170000"/>
+          </a:schemeClr>
+        </a:solidFill>
+        <a:gradFill>
+          <a:gsLst>
+            <a:gs pos="0">
+              <a:schemeClr val="phClr">
+                <a:tint val="93000"/>
+                <a:satMod val="150000"/>
+                <a:shade val="98000"/>
+                <a:lumMod val="102000"/>
+              </a:schemeClr>
+            </a:gs>
+            <a:gs pos="50000">
+              <a:schemeClr val="phClr">
+                <a:tint val="98000"/>
+                <a:satMod val="130000"/>
+                <a:shade val="90000"/>
+                <a:lumMod val="103000"/>
+              </a:schemeClr>
+            </a:gs>
+            <a:gs pos="100000">
+              <a:schemeClr val="phClr">
+                <a:shade val="63000"/>
+                <a:satMod val="120000"/>
+              </a:schemeClr>
+            </a:gs>
+          </a:gsLst>
+          <a:lin ang="5400000" scaled="0"/>
+        </a:gradFill>
+      </a:bgFillStyleLst>
+    </a:fmtScheme>
+  </a:themeElements>
+  <a:objectDefaults/>
 </a:theme>
 </file>
--- a/6th Semester/Level-3, Semester-II/CCE 323  Optical Fiber Communication/Muradul Boshir/Requirements_of_transmitter_and_receiver_in_WDM_networks_1_4_26.pptx
+++ b/6th Semester/Level-3, Semester-II/CCE 323  Optical Fiber Communication/Muradul Boshir/Requirements_of_transmitter_and_receiver_in_WDM_networks_1_4_26.pptx
@@ -144,7 +144,7 @@
       </p:grpSpPr>
       <p:sp>
         <p:nvSpPr>
-          <p:cNvPr id="2" name="Header Placeholder 1"/>
+          <p:cNvPr id="1252890725" name="Header Placeholder 1"/>
           <p:cNvSpPr>
             <a:spLocks noGrp="1"/>
           </p:cNvSpPr>
@@ -178,7 +178,7 @@
       </p:sp>
       <p:sp>
         <p:nvSpPr>
-          <p:cNvPr id="3" name="Date Placeholder 2"/>
+          <p:cNvPr id="1123680420" name="Date Placeholder 2"/>
           <p:cNvSpPr>
             <a:spLocks noGrp="1"/>
           </p:cNvSpPr>
@@ -212,7 +212,7 @@
       </p:sp>
       <p:sp>
         <p:nvSpPr>
-          <p:cNvPr id="3" name="Date Placeholder 2"/>
+          <p:cNvPr id="1654328342" name="Date Placeholder 2"/>
           <p:cNvSpPr>
             <a:spLocks noGrp="1"/>
           </p:cNvSpPr>
@@ -246,7 +246,7 @@
       </p:sp>
       <p:sp>
         <p:nvSpPr>
-          <p:cNvPr id="5" name="Notes Placeholder 4"/>
+          <p:cNvPr id="1278854594" name="Notes Placeholder 4"/>
           <p:cNvSpPr>
             <a:spLocks noGrp="1"/>
           </p:cNvSpPr>
@@ -276,7 +276,7 @@
       </p:sp>
       <p:sp>
         <p:nvSpPr>
-          <p:cNvPr id="6" name="Footer Placeholder 5"/>
+          <p:cNvPr id="701437692" name="Footer Placeholder 5"/>
           <p:cNvSpPr>
             <a:spLocks noGrp="1"/>
           </p:cNvSpPr>
@@ -310,7 +310,7 @@
       </p:sp>
       <p:sp>
         <p:nvSpPr>
-          <p:cNvPr id="7" name="Slide Number Placeholder 6"/>
+          <p:cNvPr id="1350773182" name="Slide Number Placeholder 6"/>
           <p:cNvSpPr>
             <a:spLocks noGrp="1"/>
           </p:cNvSpPr>
@@ -459,7 +459,7 @@
       </p:grpSpPr>
       <p:sp>
         <p:nvSpPr>
-          <p:cNvPr id="2" name="Slide Image Placeholder 1"/>
+          <p:cNvPr id="1141497466" name="Slide Image Placeholder 1"/>
           <p:cNvSpPr>
             <a:spLocks noChangeAspect="1" noGrp="1" noRot="1"/>
           </p:cNvSpPr>
@@ -471,7 +471,7 @@
       </p:sp>
       <p:sp>
         <p:nvSpPr>
-          <p:cNvPr id="3" name="Notes Placeholder 2"/>
+          <p:cNvPr id="1170441593" name="Notes Placeholder 2"/>
           <p:cNvSpPr>
             <a:spLocks noGrp="1"/>
           </p:cNvSpPr>
@@ -493,7 +493,7 @@
       </p:sp>
       <p:sp>
         <p:nvSpPr>
-          <p:cNvPr id="4" name="Slide Number Placeholder 3"/>
+          <p:cNvPr id="1318777669" name="Slide Number Placeholder 3"/>
           <p:cNvSpPr>
             <a:spLocks noGrp="1"/>
           </p:cNvSpPr>
@@ -544,7 +544,7 @@
       </p:grpSpPr>
       <p:sp>
         <p:nvSpPr>
-          <p:cNvPr id="2" name="Slide Image Placeholder 1"/>
+          <p:cNvPr id="777612087" name="Slide Image Placeholder 1"/>
           <p:cNvSpPr>
             <a:spLocks noChangeAspect="1" noGrp="1" noRot="1"/>
           </p:cNvSpPr>
@@ -556,7 +556,7 @@
       </p:sp>
       <p:sp>
         <p:nvSpPr>
-          <p:cNvPr id="3" name="Notes Placeholder 2"/>
+          <p:cNvPr id="141250629" name="Notes Placeholder 2"/>
           <p:cNvSpPr>
             <a:spLocks noGrp="1"/>
           </p:cNvSpPr>
@@ -578,7 +578,7 @@
       </p:sp>
       <p:sp>
         <p:nvSpPr>
-          <p:cNvPr id="4" name="Slide Number Placeholder 3"/>
+          <p:cNvPr id="1704638712" name="Slide Number Placeholder 3"/>
           <p:cNvSpPr>
             <a:spLocks noGrp="1"/>
           </p:cNvSpPr>
@@ -629,7 +629,7 @@
       </p:grpSpPr>
       <p:sp>
         <p:nvSpPr>
-          <p:cNvPr id="2" name="Slide Image Placeholder 1"/>
+          <p:cNvPr id="23395946" name="Slide Image Placeholder 1"/>
           <p:cNvSpPr>
             <a:spLocks noChangeAspect="1" noGrp="1" noRot="1"/>
           </p:cNvSpPr>
@@ -641,7 +641,7 @@
       </p:sp>
       <p:sp>
         <p:nvSpPr>
-          <p:cNvPr id="3" name="Notes Placeholder 2"/>
+          <p:cNvPr id="547568066" name="Notes Placeholder 2"/>
           <p:cNvSpPr>
             <a:spLocks noGrp="1"/>
           </p:cNvSpPr>
@@ -663,7 +663,7 @@
       </p:sp>
       <p:sp>
         <p:nvSpPr>
-          <p:cNvPr id="4" name="Slide Number Placeholder 3"/>
+          <p:cNvPr id="848212452" name="Slide Number Placeholder 3"/>
           <p:cNvSpPr>
             <a:spLocks noGrp="1"/>
           </p:cNvSpPr>
@@ -714,7 +714,7 @@
       </p:grpSpPr>
       <p:sp>
         <p:nvSpPr>
-          <p:cNvPr id="2" name="Slide Image Placeholder 1"/>
+          <p:cNvPr id="1297328090" name="Slide Image Placeholder 1"/>
           <p:cNvSpPr>
             <a:spLocks noChangeAspect="1" noGrp="1" noRot="1"/>
           </p:cNvSpPr>
@@ -726,7 +726,7 @@
       </p:sp>
       <p:sp>
         <p:nvSpPr>
-          <p:cNvPr id="3" name="Notes Placeholder 2"/>
+          <p:cNvPr id="455722537" name="Notes Placeholder 2"/>
           <p:cNvSpPr>
             <a:spLocks noGrp="1"/>
           </p:cNvSpPr>
@@ -748,7 +748,7 @@
       </p:sp>
       <p:sp>
         <p:nvSpPr>
-          <p:cNvPr id="4" name="Slide Number Placeholder 3"/>
+          <p:cNvPr id="1332293485" name="Slide Number Placeholder 3"/>
           <p:cNvSpPr>
             <a:spLocks noGrp="1"/>
           </p:cNvSpPr>
@@ -799,7 +799,7 @@
       </p:grpSpPr>
       <p:sp>
         <p:nvSpPr>
-          <p:cNvPr id="2" name="Slide Image Placeholder 1"/>
+          <p:cNvPr id="87584045" name="Slide Image Placeholder 1"/>
           <p:cNvSpPr>
             <a:spLocks noChangeAspect="1" noGrp="1" noRot="1"/>
           </p:cNvSpPr>
@@ -811,7 +811,7 @@
       </p:sp>
       <p:sp>
         <p:nvSpPr>
-          <p:cNvPr id="3" name="Notes Placeholder 2"/>
+          <p:cNvPr id="1782938240" name="Notes Placeholder 2"/>
           <p:cNvSpPr>
             <a:spLocks noGrp="1"/>
           </p:cNvSpPr>
@@ -833,7 +833,7 @@
       </p:sp>
       <p:sp>
         <p:nvSpPr>
-          <p:cNvPr id="4" name="Slide Number Placeholder 3"/>
+          <p:cNvPr id="441459937" name="Slide Number Placeholder 3"/>
           <p:cNvSpPr>
             <a:spLocks noGrp="1"/>
           </p:cNvSpPr>
@@ -884,7 +884,7 @@
       </p:grpSpPr>
       <p:sp>
         <p:nvSpPr>
-          <p:cNvPr id="2" name="Slide Image Placeholder 1"/>
+          <p:cNvPr id="987123413" name="Slide Image Placeholder 1"/>
           <p:cNvSpPr>
             <a:spLocks noChangeAspect="1" noGrp="1" noRot="1"/>
           </p:cNvSpPr>
@@ -896,7 +896,7 @@
       </p:sp>
       <p:sp>
         <p:nvSpPr>
-          <p:cNvPr id="3" name="Notes Placeholder 2"/>
+          <p:cNvPr id="487936443" name="Notes Placeholder 2"/>
           <p:cNvSpPr>
             <a:spLocks noGrp="1"/>
           </p:cNvSpPr>
@@ -918,7 +918,7 @@
       </p:sp>
       <p:sp>
         <p:nvSpPr>
-          <p:cNvPr id="4" name="Slide Number Placeholder 3"/>
+          <p:cNvPr id="674753348" name="Slide Number Placeholder 3"/>
           <p:cNvSpPr>
             <a:spLocks noGrp="1"/>
           </p:cNvSpPr>
@@ -969,7 +969,7 @@
       </p:grpSpPr>
       <p:sp>
         <p:nvSpPr>
-          <p:cNvPr id="2" name="Slide Image Placeholder 1"/>
+          <p:cNvPr id="1943414388" name="Slide Image Placeholder 1"/>
           <p:cNvSpPr>
             <a:spLocks noChangeAspect="1" noGrp="1" noRot="1"/>
           </p:cNvSpPr>
@@ -981,7 +981,7 @@
       </p:sp>
       <p:sp>
         <p:nvSpPr>
-          <p:cNvPr id="3" name="Notes Placeholder 2"/>
+          <p:cNvPr id="1487775608" name="Notes Placeholder 2"/>
           <p:cNvSpPr>
             <a:spLocks noGrp="1"/>
           </p:cNvSpPr>
@@ -1003,7 +1003,7 @@
       </p:sp>
       <p:sp>
         <p:nvSpPr>
-          <p:cNvPr id="4" name="Slide Number Placeholder 3"/>
+          <p:cNvPr id="2138954918" name="Slide Number Placeholder 3"/>
           <p:cNvSpPr>
             <a:spLocks noGrp="1"/>
           </p:cNvSpPr>
@@ -1054,7 +1054,7 @@
       </p:grpSpPr>
       <p:sp>
         <p:nvSpPr>
-          <p:cNvPr id="2" name="Slide Image Placeholder 1"/>
+          <p:cNvPr id="787143249" name="Slide Image Placeholder 1"/>
           <p:cNvSpPr>
             <a:spLocks noChangeAspect="1" noGrp="1" noRot="1"/>
           </p:cNvSpPr>
@@ -1066,7 +1066,7 @@
       </p:sp>
       <p:sp>
         <p:nvSpPr>
-          <p:cNvPr id="3" name="Notes Placeholder 2"/>
+          <p:cNvPr id="1094705524" name="Notes Placeholder 2"/>
           <p:cNvSpPr>
             <a:spLocks noGrp="1"/>
           </p:cNvSpPr>
@@ -1088,7 +1088,7 @@
       </p:sp>
       <p:sp>
         <p:nvSpPr>
-          <p:cNvPr id="4" name="Slide Number Placeholder 3"/>
+          <p:cNvPr id="473615507" name="Slide Number Placeholder 3"/>
           <p:cNvSpPr>
             <a:spLocks noGrp="1"/>
           </p:cNvSpPr>
@@ -1139,7 +1139,7 @@
       </p:grpSpPr>
       <p:sp>
         <p:nvSpPr>
-          <p:cNvPr id="2" name="Slide Image Placeholder 1"/>
+          <p:cNvPr id="1797885548" name="Slide Image Placeholder 1"/>
           <p:cNvSpPr>
             <a:spLocks noChangeAspect="1" noGrp="1" noRot="1"/>
           </p:cNvSpPr>
@@ -1151,7 +1151,7 @@
       </p:sp>
       <p:sp>
         <p:nvSpPr>
-          <p:cNvPr id="3" name="Notes Placeholder 2"/>
+          <p:cNvPr id="1585569895" name="Notes Placeholder 2"/>
           <p:cNvSpPr>
             <a:spLocks noGrp="1"/>
           </p:cNvSpPr>
@@ -1173,7 +1173,7 @@
       </p:sp>
       <p:sp>
         <p:nvSpPr>
-          <p:cNvPr id="4" name="Slide Number Placeholder 3"/>
+          <p:cNvPr id="1136787089" name="Slide Number Placeholder 3"/>
           <p:cNvSpPr>
             <a:spLocks noGrp="1"/>
           </p:cNvSpPr>
@@ -1224,7 +1224,7 @@
       </p:grpSpPr>
       <p:sp>
         <p:nvSpPr>
-          <p:cNvPr id="2" name="Slide Image Placeholder 1"/>
+          <p:cNvPr id="974284520" name="Slide Image Placeholder 1"/>
           <p:cNvSpPr>
             <a:spLocks noChangeAspect="1" noGrp="1" noRot="1"/>
           </p:cNvSpPr>
@@ -1236,7 +1236,7 @@
       </p:sp>
       <p:sp>
         <p:nvSpPr>
-          <p:cNvPr id="3" name="Notes Placeholder 2"/>
+          <p:cNvPr id="444155485" name="Notes Placeholder 2"/>
           <p:cNvSpPr>
             <a:spLocks noGrp="1"/>
           </p:cNvSpPr>
@@ -1258,7 +1258,7 @@
       </p:sp>
       <p:sp>
         <p:nvSpPr>
-          <p:cNvPr id="4" name="Slide Number Placeholder 3"/>
+          <p:cNvPr id="1910694972" name="Slide Number Placeholder 3"/>
           <p:cNvSpPr>
             <a:spLocks noGrp="1"/>
           </p:cNvSpPr>
@@ -1309,7 +1309,7 @@
       </p:grpSpPr>
       <p:sp>
         <p:nvSpPr>
-          <p:cNvPr id="2" name="Slide Image Placeholder 1"/>
+          <p:cNvPr id="1598379345" name="Slide Image Placeholder 1"/>
           <p:cNvSpPr>
             <a:spLocks noChangeAspect="1" noGrp="1" noRot="1"/>
           </p:cNvSpPr>
@@ -1321,7 +1321,7 @@
       </p:sp>
       <p:sp>
         <p:nvSpPr>
-          <p:cNvPr id="3" name="Notes Placeholder 2"/>
+          <p:cNvPr id="1258010816" name="Notes Placeholder 2"/>
           <p:cNvSpPr>
             <a:spLocks noGrp="1"/>
           </p:cNvSpPr>
@@ -1343,7 +1343,7 @@
       </p:sp>
       <p:sp>
         <p:nvSpPr>
-          <p:cNvPr id="4" name="Slide Number Placeholder 3"/>
+          <p:cNvPr id="424115396" name="Slide Number Placeholder 3"/>
           <p:cNvSpPr>
             <a:spLocks noGrp="1"/>
           </p:cNvSpPr>
@@ -1394,7 +1394,7 @@
       </p:grpSpPr>
       <p:sp>
         <p:nvSpPr>
-          <p:cNvPr id="976016393" name="Title 1"/>
+          <p:cNvPr id="1968266848" name="Title 1"/>
           <p:cNvSpPr>
             <a:spLocks noGrp="1"/>
           </p:cNvSpPr>
@@ -1429,7 +1429,7 @@
       </p:sp>
       <p:sp>
         <p:nvSpPr>
-          <p:cNvPr id="1765539831" name="Subtitle 2"/>
+          <p:cNvPr id="2020582362" name="Subtitle 2"/>
           <p:cNvSpPr>
             <a:spLocks noGrp="1"/>
           </p:cNvSpPr>
@@ -1497,7 +1497,7 @@
       </p:sp>
       <p:sp>
         <p:nvSpPr>
-          <p:cNvPr id="1903504423" name="Date Placeholder 3"/>
+          <p:cNvPr id="1628028563" name="Date Placeholder 3"/>
           <p:cNvSpPr>
             <a:spLocks noGrp="1"/>
           </p:cNvSpPr>
@@ -1523,7 +1523,7 @@
       </p:sp>
       <p:sp>
         <p:nvSpPr>
-          <p:cNvPr id="955750246" name="Footer Placeholder 4"/>
+          <p:cNvPr id="1903879172" name="Footer Placeholder 4"/>
           <p:cNvSpPr>
             <a:spLocks noGrp="1"/>
           </p:cNvSpPr>
@@ -1545,7 +1545,7 @@
       </p:sp>
       <p:sp>
         <p:nvSpPr>
-          <p:cNvPr id="1950930702" name="Slide Number Placeholder 5"/>
+          <p:cNvPr id="309433858" name="Slide Number Placeholder 5"/>
           <p:cNvSpPr>
             <a:spLocks noGrp="1"/>
           </p:cNvSpPr>
@@ -1596,7 +1596,7 @@
       </p:grpSpPr>
       <p:sp>
         <p:nvSpPr>
-          <p:cNvPr id="450930762" name="Title 1"/>
+          <p:cNvPr id="1423991299" name="Title 1"/>
           <p:cNvSpPr>
             <a:spLocks noGrp="1"/>
           </p:cNvSpPr>
@@ -1622,7 +1622,7 @@
       </p:sp>
       <p:sp>
         <p:nvSpPr>
-          <p:cNvPr id="353407919" name="Vertical Text Placeholder 2"/>
+          <p:cNvPr id="1319385485" name="Vertical Text Placeholder 2"/>
           <p:cNvSpPr>
             <a:spLocks noGrp="1"/>
           </p:cNvSpPr>
@@ -1688,7 +1688,7 @@
       </p:sp>
       <p:sp>
         <p:nvSpPr>
-          <p:cNvPr id="274480694" name="Date Placeholder 3"/>
+          <p:cNvPr id="714083581" name="Date Placeholder 3"/>
           <p:cNvSpPr>
             <a:spLocks noGrp="1"/>
           </p:cNvSpPr>
@@ -1714,7 +1714,7 @@
       </p:sp>
       <p:sp>
         <p:nvSpPr>
-          <p:cNvPr id="765382114" name="Footer Placeholder 4"/>
+          <p:cNvPr id="21532275" name="Footer Placeholder 4"/>
           <p:cNvSpPr>
             <a:spLocks noGrp="1"/>
           </p:cNvSpPr>
@@ -1736,7 +1736,7 @@
       </p:sp>
       <p:sp>
         <p:nvSpPr>
-          <p:cNvPr id="1085515334" name="Slide Number Placeholder 5"/>
+          <p:cNvPr id="1391367926" name="Slide Number Placeholder 5"/>
           <p:cNvSpPr>
             <a:spLocks noGrp="1"/>
           </p:cNvSpPr>
@@ -1787,7 +1787,7 @@
       </p:grpSpPr>
       <p:sp>
         <p:nvSpPr>
-          <p:cNvPr id="1935920182" name="Vertical Title 1"/>
+          <p:cNvPr id="791076584" name="Vertical Title 1"/>
           <p:cNvSpPr>
             <a:spLocks noGrp="1"/>
           </p:cNvSpPr>
@@ -1818,7 +1818,7 @@
       </p:sp>
       <p:sp>
         <p:nvSpPr>
-          <p:cNvPr id="876420167" name="Vertical Text Placeholder 2"/>
+          <p:cNvPr id="2082504250" name="Vertical Text Placeholder 2"/>
           <p:cNvSpPr>
             <a:spLocks noGrp="1"/>
           </p:cNvSpPr>
@@ -1889,7 +1889,7 @@
       </p:sp>
       <p:sp>
         <p:nvSpPr>
-          <p:cNvPr id="1822163649" name="Date Placeholder 3"/>
+          <p:cNvPr id="1902095186" name="Date Placeholder 3"/>
           <p:cNvSpPr>
             <a:spLocks noGrp="1"/>
           </p:cNvSpPr>
@@ -1915,7 +1915,7 @@
       </p:sp>
       <p:sp>
         <p:nvSpPr>
-          <p:cNvPr id="1140603659" name="Footer Placeholder 4"/>
+          <p:cNvPr id="252449921" name="Footer Placeholder 4"/>
           <p:cNvSpPr>
             <a:spLocks noGrp="1"/>
           </p:cNvSpPr>
@@ -1937,7 +1937,7 @@
       </p:sp>
       <p:sp>
         <p:nvSpPr>
-          <p:cNvPr id="1652474144" name="Slide Number Placeholder 5"/>
+          <p:cNvPr id="1707168076" name="Slide Number Placeholder 5"/>
           <p:cNvSpPr>
             <a:spLocks noGrp="1"/>
           </p:cNvSpPr>
@@ -1988,7 +1988,7 @@
       </p:grpSpPr>
       <p:sp>
         <p:nvSpPr>
-          <p:cNvPr id="2011744376" name="Title 1"/>
+          <p:cNvPr id="474917576" name="Title 1"/>
           <p:cNvSpPr>
             <a:spLocks noGrp="1"/>
           </p:cNvSpPr>
@@ -2014,7 +2014,7 @@
       </p:sp>
       <p:sp>
         <p:nvSpPr>
-          <p:cNvPr id="1174097145" name="Content Placeholder 2"/>
+          <p:cNvPr id="423797907" name="Content Placeholder 2"/>
           <p:cNvSpPr>
             <a:spLocks noGrp="1"/>
           </p:cNvSpPr>
@@ -2080,7 +2080,7 @@
       </p:sp>
       <p:sp>
         <p:nvSpPr>
-          <p:cNvPr id="1520635747" name="Date Placeholder 3"/>
+          <p:cNvPr id="1392863358" name="Date Placeholder 3"/>
           <p:cNvSpPr>
             <a:spLocks noGrp="1"/>
           </p:cNvSpPr>
@@ -2106,7 +2106,7 @@
       </p:sp>
       <p:sp>
         <p:nvSpPr>
-          <p:cNvPr id="1128284917" name="Footer Placeholder 4"/>
+          <p:cNvPr id="577942496" name="Footer Placeholder 4"/>
           <p:cNvSpPr>
             <a:spLocks noGrp="1"/>
           </p:cNvSpPr>
@@ -2128,7 +2128,7 @@
       </p:sp>
       <p:sp>
         <p:nvSpPr>
-          <p:cNvPr id="188458803" name="Slide Number Placeholder 5"/>
+          <p:cNvPr id="650578319" name="Slide Number Placeholder 5"/>
           <p:cNvSpPr>
             <a:spLocks noGrp="1"/>
           </p:cNvSpPr>
@@ -2179,7 +2179,7 @@
       </p:grpSpPr>
       <p:sp>
         <p:nvSpPr>
-          <p:cNvPr id="934054078" name="Title 1"/>
+          <p:cNvPr id="379058264" name="Title 1"/>
           <p:cNvSpPr>
             <a:spLocks noGrp="1"/>
           </p:cNvSpPr>
@@ -2214,7 +2214,7 @@
       </p:sp>
       <p:sp>
         <p:nvSpPr>
-          <p:cNvPr id="1900997538" name="Text Placeholder 2"/>
+          <p:cNvPr id="201104346" name="Text Placeholder 2"/>
           <p:cNvSpPr>
             <a:spLocks noGrp="1"/>
           </p:cNvSpPr>
@@ -2336,7 +2336,7 @@
       </p:sp>
       <p:sp>
         <p:nvSpPr>
-          <p:cNvPr id="1902818808" name="Date Placeholder 3"/>
+          <p:cNvPr id="1394711257" name="Date Placeholder 3"/>
           <p:cNvSpPr>
             <a:spLocks noGrp="1"/>
           </p:cNvSpPr>
@@ -2362,7 +2362,7 @@
       </p:sp>
       <p:sp>
         <p:nvSpPr>
-          <p:cNvPr id="1217265965" name="Footer Placeholder 4"/>
+          <p:cNvPr id="566944968" name="Footer Placeholder 4"/>
           <p:cNvSpPr>
             <a:spLocks noGrp="1"/>
           </p:cNvSpPr>
@@ -2384,7 +2384,7 @@
       </p:sp>
       <p:sp>
         <p:nvSpPr>
-          <p:cNvPr id="1725778035" name="Slide Number Placeholder 5"/>
+          <p:cNvPr id="486845815" name="Slide Number Placeholder 5"/>
           <p:cNvSpPr>
             <a:spLocks noGrp="1"/>
           </p:cNvSpPr>
@@ -2435,7 +2435,7 @@
       </p:grpSpPr>
       <p:sp>
         <p:nvSpPr>
-          <p:cNvPr id="878999230" name="Title 1"/>
+          <p:cNvPr id="990724217" name="Title 1"/>
           <p:cNvSpPr>
             <a:spLocks noGrp="1"/>
           </p:cNvSpPr>
@@ -2461,7 +2461,7 @@
       </p:sp>
       <p:sp>
         <p:nvSpPr>
-          <p:cNvPr id="1459915382" name="Content Placeholder 2"/>
+          <p:cNvPr id="8547325" name="Content Placeholder 2"/>
           <p:cNvSpPr>
             <a:spLocks noGrp="1"/>
           </p:cNvSpPr>
@@ -2532,7 +2532,7 @@
       </p:sp>
       <p:sp>
         <p:nvSpPr>
-          <p:cNvPr id="1219617859" name="Content Placeholder 3"/>
+          <p:cNvPr id="830880366" name="Content Placeholder 3"/>
           <p:cNvSpPr>
             <a:spLocks noGrp="1"/>
           </p:cNvSpPr>
@@ -2603,7 +2603,7 @@
       </p:sp>
       <p:sp>
         <p:nvSpPr>
-          <p:cNvPr id="452390182" name="Date Placeholder 4"/>
+          <p:cNvPr id="202339588" name="Date Placeholder 4"/>
           <p:cNvSpPr>
             <a:spLocks noGrp="1"/>
           </p:cNvSpPr>
@@ -2629,7 +2629,7 @@
       </p:sp>
       <p:sp>
         <p:nvSpPr>
-          <p:cNvPr id="1046221878" name="Footer Placeholder 5"/>
+          <p:cNvPr id="1739253152" name="Footer Placeholder 5"/>
           <p:cNvSpPr>
             <a:spLocks noGrp="1"/>
           </p:cNvSpPr>
@@ -2651,7 +2651,7 @@
       </p:sp>
       <p:sp>
         <p:nvSpPr>
-          <p:cNvPr id="1509523444" name="Slide Number Placeholder 6"/>
+          <p:cNvPr id="2078440049" name="Slide Number Placeholder 6"/>
           <p:cNvSpPr>
             <a:spLocks noGrp="1"/>
           </p:cNvSpPr>
@@ -2702,7 +2702,7 @@
       </p:grpSpPr>
       <p:sp>
         <p:nvSpPr>
-          <p:cNvPr id="120485709" name="Title 1"/>
+          <p:cNvPr id="1016498799" name="Title 1"/>
           <p:cNvSpPr>
             <a:spLocks noGrp="1"/>
           </p:cNvSpPr>
@@ -2733,7 +2733,7 @@
       </p:sp>
       <p:sp>
         <p:nvSpPr>
-          <p:cNvPr id="1679511531" name="Text Placeholder 2"/>
+          <p:cNvPr id="581259498" name="Text Placeholder 2"/>
           <p:cNvSpPr>
             <a:spLocks noGrp="1"/>
           </p:cNvSpPr>
@@ -2801,7 +2801,7 @@
       </p:sp>
       <p:sp>
         <p:nvSpPr>
-          <p:cNvPr id="1967120179" name="Content Placeholder 3"/>
+          <p:cNvPr id="149625350" name="Content Placeholder 3"/>
           <p:cNvSpPr>
             <a:spLocks noGrp="1"/>
           </p:cNvSpPr>
@@ -2872,7 +2872,7 @@
       </p:sp>
       <p:sp>
         <p:nvSpPr>
-          <p:cNvPr id="2011066761" name="Text Placeholder 4"/>
+          <p:cNvPr id="491088627" name="Text Placeholder 4"/>
           <p:cNvSpPr>
             <a:spLocks noGrp="1"/>
           </p:cNvSpPr>
@@ -2940,7 +2940,7 @@
       </p:sp>
       <p:sp>
         <p:nvSpPr>
-          <p:cNvPr id="777473316" name="Content Placeholder 5"/>
+          <p:cNvPr id="2041746290" name="Content Placeholder 5"/>
           <p:cNvSpPr>
             <a:spLocks noGrp="1"/>
           </p:cNvSpPr>
@@ -3011,7 +3011,7 @@
       </p:sp>
       <p:sp>
         <p:nvSpPr>
-          <p:cNvPr id="794918566" name="Date Placeholder 6"/>
+          <p:cNvPr id="1249461328" name="Date Placeholder 6"/>
           <p:cNvSpPr>
             <a:spLocks noGrp="1"/>
           </p:cNvSpPr>
@@ -3037,7 +3037,7 @@
       </p:sp>
       <p:sp>
         <p:nvSpPr>
-          <p:cNvPr id="820657646" name="Footer Placeholder 7"/>
+          <p:cNvPr id="794153069" name="Footer Placeholder 7"/>
           <p:cNvSpPr>
             <a:spLocks noGrp="1"/>
           </p:cNvSpPr>
@@ -3059,7 +3059,7 @@
       </p:sp>
       <p:sp>
         <p:nvSpPr>
-          <p:cNvPr id="1616739034" name="Slide Number Placeholder 8"/>
+          <p:cNvPr id="1160288191" name="Slide Number Placeholder 8"/>
           <p:cNvSpPr>
             <a:spLocks noGrp="1"/>
           </p:cNvSpPr>
@@ -3110,7 +3110,7 @@
       </p:grpSpPr>
       <p:sp>
         <p:nvSpPr>
-          <p:cNvPr id="1176879999" name="Title 1"/>
+          <p:cNvPr id="1651299134" name="Title 1"/>
           <p:cNvSpPr>
             <a:spLocks noGrp="1"/>
           </p:cNvSpPr>
@@ -3136,7 +3136,7 @@
       </p:sp>
       <p:sp>
         <p:nvSpPr>
-          <p:cNvPr id="939155794" name="Date Placeholder 2"/>
+          <p:cNvPr id="2130631909" name="Date Placeholder 2"/>
           <p:cNvSpPr>
             <a:spLocks noGrp="1"/>
           </p:cNvSpPr>
@@ -3162,7 +3162,7 @@
       </p:sp>
       <p:sp>
         <p:nvSpPr>
-          <p:cNvPr id="986600315" name="Footer Placeholder 3"/>
+          <p:cNvPr id="2057891071" name="Footer Placeholder 3"/>
           <p:cNvSpPr>
             <a:spLocks noGrp="1"/>
           </p:cNvSpPr>
@@ -3184,7 +3184,7 @@
       </p:sp>
       <p:sp>
         <p:nvSpPr>
-          <p:cNvPr id="1777342010" name="Slide Number Placeholder 4"/>
+          <p:cNvPr id="1598500619" name="Slide Number Placeholder 4"/>
           <p:cNvSpPr>
             <a:spLocks noGrp="1"/>
           </p:cNvSpPr>
@@ -3235,7 +3235,7 @@
       </p:grpSpPr>
       <p:sp>
         <p:nvSpPr>
-          <p:cNvPr id="1833552029" name="Date Placeholder 1"/>
+          <p:cNvPr id="928310698" name="Date Placeholder 1"/>
           <p:cNvSpPr>
             <a:spLocks noGrp="1"/>
           </p:cNvSpPr>
@@ -3261,7 +3261,7 @@
       </p:sp>
       <p:sp>
         <p:nvSpPr>
-          <p:cNvPr id="874878642" name="Footer Placeholder 2"/>
+          <p:cNvPr id="38924348" name="Footer Placeholder 2"/>
           <p:cNvSpPr>
             <a:spLocks noGrp="1"/>
           </p:cNvSpPr>
@@ -3283,7 +3283,7 @@
       </p:sp>
       <p:sp>
         <p:nvSpPr>
-          <p:cNvPr id="1283793244" name="Slide Number Placeholder 3"/>
+          <p:cNvPr id="752121257" name="Slide Number Placeholder 3"/>
           <p:cNvSpPr>
             <a:spLocks noGrp="1"/>
           </p:cNvSpPr>
@@ -3334,7 +3334,7 @@
       </p:grpSpPr>
       <p:sp>
         <p:nvSpPr>
-          <p:cNvPr id="1128249954" name="Title 1"/>
+          <p:cNvPr id="35567101" name="Title 1"/>
           <p:cNvSpPr>
             <a:spLocks noGrp="1"/>
           </p:cNvSpPr>
@@ -3369,7 +3369,7 @@
       </p:sp>
       <p:sp>
         <p:nvSpPr>
-          <p:cNvPr id="1897579032" name="Content Placeholder 2"/>
+          <p:cNvPr id="1746557061" name="Content Placeholder 2"/>
           <p:cNvSpPr>
             <a:spLocks noGrp="1"/>
           </p:cNvSpPr>
@@ -3468,7 +3468,7 @@
       </p:sp>
       <p:sp>
         <p:nvSpPr>
-          <p:cNvPr id="840167404" name="Text Placeholder 3"/>
+          <p:cNvPr id="43607395" name="Text Placeholder 3"/>
           <p:cNvSpPr>
             <a:spLocks noGrp="1"/>
           </p:cNvSpPr>
@@ -3536,7 +3536,7 @@
       </p:sp>
       <p:sp>
         <p:nvSpPr>
-          <p:cNvPr id="2013875820" name="Date Placeholder 4"/>
+          <p:cNvPr id="1656975190" name="Date Placeholder 4"/>
           <p:cNvSpPr>
             <a:spLocks noGrp="1"/>
           </p:cNvSpPr>
@@ -3562,7 +3562,7 @@
       </p:sp>
       <p:sp>
         <p:nvSpPr>
-          <p:cNvPr id="701997092" name="Footer Placeholder 5"/>
+          <p:cNvPr id="682518970" name="Footer Placeholder 5"/>
           <p:cNvSpPr>
             <a:spLocks noGrp="1"/>
           </p:cNvSpPr>
@@ -3584,7 +3584,7 @@
       </p:sp>
       <p:sp>
         <p:nvSpPr>
-          <p:cNvPr id="595442855" name="Slide Number Placeholder 6"/>
+          <p:cNvPr id="1738453357" name="Slide Number Placeholder 6"/>
           <p:cNvSpPr>
             <a:spLocks noGrp="1"/>
           </p:cNvSpPr>
@@ -3635,7 +3635,7 @@
       </p:grpSpPr>
       <p:sp>
         <p:nvSpPr>
-          <p:cNvPr id="350907134" name="Title 1"/>
+          <p:cNvPr id="2139781697" name="Title 1"/>
           <p:cNvSpPr>
             <a:spLocks noGrp="1"/>
           </p:cNvSpPr>
@@ -3670,7 +3670,7 @@
       </p:sp>
       <p:sp>
         <p:nvSpPr>
-          <p:cNvPr id="517055461" name="Picture Placeholder 2"/>
+          <p:cNvPr id="150382034" name="Picture Placeholder 2"/>
           <p:cNvSpPr>
             <a:spLocks noGrp="1"/>
           </p:cNvSpPr>
@@ -3734,7 +3734,7 @@
       </p:sp>
       <p:sp>
         <p:nvSpPr>
-          <p:cNvPr id="1923573648" name="Text Placeholder 3"/>
+          <p:cNvPr id="316188075" name="Text Placeholder 3"/>
           <p:cNvSpPr>
             <a:spLocks noGrp="1"/>
           </p:cNvSpPr>
@@ -3802,7 +3802,7 @@
       </p:sp>
       <p:sp>
         <p:nvSpPr>
-          <p:cNvPr id="1239645736" name="Date Placeholder 4"/>
+          <p:cNvPr id="1326237538" name="Date Placeholder 4"/>
           <p:cNvSpPr>
             <a:spLocks noGrp="1"/>
           </p:cNvSpPr>
@@ -3828,7 +3828,7 @@
       </p:sp>
       <p:sp>
         <p:nvSpPr>
-          <p:cNvPr id="1323839439" name="Footer Placeholder 5"/>
+          <p:cNvPr id="821356045" name="Footer Placeholder 5"/>
           <p:cNvSpPr>
             <a:spLocks noGrp="1"/>
           </p:cNvSpPr>
@@ -3850,7 +3850,7 @@
       </p:sp>
       <p:sp>
         <p:nvSpPr>
-          <p:cNvPr id="1073571455" name="Slide Number Placeholder 6"/>
+          <p:cNvPr id="1301542628" name="Slide Number Placeholder 6"/>
           <p:cNvSpPr>
             <a:spLocks noGrp="1"/>
           </p:cNvSpPr>
@@ -3906,7 +3906,7 @@
       </p:grpSpPr>
       <p:sp>
         <p:nvSpPr>
-          <p:cNvPr id="1917881162" name="Title Placeholder 1"/>
+          <p:cNvPr id="1847652619" name="Title Placeholder 1"/>
           <p:cNvSpPr>
             <a:spLocks noGrp="1"/>
           </p:cNvSpPr>
@@ -3942,7 +3942,7 @@
       </p:sp>
       <p:sp>
         <p:nvSpPr>
-          <p:cNvPr id="65191838" name="Text Placeholder 2"/>
+          <p:cNvPr id="1019320233" name="Text Placeholder 2"/>
           <p:cNvSpPr>
             <a:spLocks noGrp="1"/>
           </p:cNvSpPr>
@@ -4018,7 +4018,7 @@
       </p:sp>
       <p:sp>
         <p:nvSpPr>
-          <p:cNvPr id="920113987" name="Date Placeholder 3"/>
+          <p:cNvPr id="1191289973" name="Date Placeholder 3"/>
           <p:cNvSpPr>
             <a:spLocks noGrp="1"/>
           </p:cNvSpPr>
@@ -4062,7 +4062,7 @@
       </p:sp>
       <p:sp>
         <p:nvSpPr>
-          <p:cNvPr id="495998900" name="Footer Placeholder 4"/>
+          <p:cNvPr id="134231455" name="Footer Placeholder 4"/>
           <p:cNvSpPr>
             <a:spLocks noGrp="1"/>
           </p:cNvSpPr>
@@ -4102,7 +4102,7 @@
       </p:sp>
       <p:sp>
         <p:nvSpPr>
-          <p:cNvPr id="930051364" name="Slide Number Placeholder 5"/>
+          <p:cNvPr id="1665958916" name="Slide Number Placeholder 5"/>
           <p:cNvSpPr>
             <a:spLocks noGrp="1"/>
           </p:cNvSpPr>
@@ -4462,7 +4462,7 @@
       </p:grpSpPr>
       <p:sp>
         <p:nvSpPr>
-          <p:cNvPr id="1811312947" name="Title 1"/>
+          <p:cNvPr id="1200841367" name="Title 1"/>
           <p:cNvSpPr>
             <a:spLocks noGrp="1"/>
           </p:cNvSpPr>
@@ -4494,7 +4494,7 @@
       </p:sp>
       <p:sp>
         <p:nvSpPr>
-          <p:cNvPr id="277475723" name="Subtitle 2"/>
+          <p:cNvPr id="666377925" name="Subtitle 2"/>
           <p:cNvSpPr>
             <a:spLocks noGrp="1"/>
           </p:cNvSpPr>
@@ -4549,7 +4549,7 @@
       </p:grpSpPr>
       <p:sp>
         <p:nvSpPr>
-          <p:cNvPr id="1903345258" name="Title 1"/>
+          <p:cNvPr id="1291770503" name="Title 1"/>
           <p:cNvSpPr>
             <a:spLocks noGrp="1"/>
           </p:cNvSpPr>
@@ -4575,7 +4575,7 @@
       </p:sp>
       <p:sp>
         <p:nvSpPr>
-          <p:cNvPr id="332510224" name="Content Placeholder 2"/>
+          <p:cNvPr id="1917744646" name="Content Placeholder 2"/>
           <p:cNvSpPr>
             <a:spLocks noGrp="1"/>
           </p:cNvSpPr>
@@ -4730,7 +4730,7 @@
       </p:grpSpPr>
       <p:sp>
         <p:nvSpPr>
-          <p:cNvPr id="1358113167" name="Title 1"/>
+          <p:cNvPr id="1012880472" name="Title 1"/>
           <p:cNvSpPr>
             <a:spLocks noGrp="1"/>
           </p:cNvSpPr>
@@ -4761,7 +4761,7 @@
       </p:sp>
       <p:sp>
         <p:nvSpPr>
-          <p:cNvPr id="889408526" name="Content Placeholder 2"/>
+          <p:cNvPr id="2052948621" name="Content Placeholder 2"/>
           <p:cNvSpPr>
             <a:spLocks noGrp="1"/>
           </p:cNvSpPr>
@@ -4878,7 +4878,7 @@
       </p:sp>
       <p:pic>
         <p:nvPicPr>
-          <p:cNvPr id="922645599" name="Picture 3"/>
+          <p:cNvPr id="260738527" name="Picture 3"/>
           <p:cNvPicPr>
             <a:picLocks noChangeAspect="1"/>
           </p:cNvPicPr>
@@ -4933,7 +4933,7 @@
       </p:grpSpPr>
       <p:sp>
         <p:nvSpPr>
-          <p:cNvPr id="1049071715" name="Title 1"/>
+          <p:cNvPr id="1524850862" name="Title 1"/>
           <p:cNvSpPr>
             <a:spLocks noGrp="1"/>
           </p:cNvSpPr>
@@ -4963,7 +4963,7 @@
       </p:sp>
       <p:sp>
         <p:nvSpPr>
-          <p:cNvPr id="1743594323" name="Content Placeholder 2"/>
+          <p:cNvPr id="1750824616" name="Content Placeholder 2"/>
           <p:cNvSpPr>
             <a:spLocks noGrp="1"/>
           </p:cNvSpPr>
@@ -5076,7 +5076,7 @@
       </p:grpSpPr>
       <p:sp>
         <p:nvSpPr>
-          <p:cNvPr id="818060048" name="Title 1"/>
+          <p:cNvPr id="181568335" name="Title 1"/>
           <p:cNvSpPr>
             <a:spLocks noGrp="1"/>
           </p:cNvSpPr>
@@ -5102,7 +5102,7 @@
       </p:sp>
       <p:sp>
         <p:nvSpPr>
-          <p:cNvPr id="245154868" name="Content Placeholder 2"/>
+          <p:cNvPr id="1017441929" name="Content Placeholder 2"/>
           <p:cNvSpPr>
             <a:spLocks noGrp="1"/>
           </p:cNvSpPr>
@@ -5241,7 +5241,7 @@
       </p:grpSpPr>
       <p:sp>
         <p:nvSpPr>
-          <p:cNvPr id="76223582" name="Title 1"/>
+          <p:cNvPr id="1241458076" name="Title 1"/>
           <p:cNvSpPr>
             <a:spLocks noGrp="1"/>
           </p:cNvSpPr>
@@ -5267,7 +5267,7 @@
       </p:sp>
       <p:sp>
         <p:nvSpPr>
-          <p:cNvPr id="1776957831" name="Content Placeholder 2"/>
+          <p:cNvPr id="1917212425" name="Content Placeholder 2"/>
           <p:cNvSpPr>
             <a:spLocks noGrp="1"/>
           </p:cNvSpPr>
@@ -5410,7 +5410,7 @@
       </p:grpSpPr>
       <p:sp>
         <p:nvSpPr>
-          <p:cNvPr id="2025263198" name="Content Placeholder 2"/>
+          <p:cNvPr id="2002013198" name="Content Placeholder 2"/>
           <p:cNvSpPr>
             <a:spLocks noGrp="1"/>
           </p:cNvSpPr>
@@ -5555,7 +5555,7 @@
       </p:grpSpPr>
       <p:sp>
         <p:nvSpPr>
-          <p:cNvPr id="1170913836" name="Title 1"/>
+          <p:cNvPr id="730223387" name="Title 1"/>
           <p:cNvSpPr>
             <a:spLocks noGrp="1"/>
           </p:cNvSpPr>
@@ -5584,7 +5584,7 @@
       </p:sp>
       <p:sp>
         <p:nvSpPr>
-          <p:cNvPr id="950181500" name="Content Placeholder 2"/>
+          <p:cNvPr id="162952925" name="Content Placeholder 2"/>
           <p:cNvSpPr>
             <a:spLocks noGrp="1"/>
           </p:cNvSpPr>
@@ -5686,7 +5686,11 @@
             </a:pPr>
             <a:r>
               <a:rPr lang="en-US" sz="2800" b="1"/>
-              <a:t>Distributed Bragg Reflector (DBR):</a:t>
+              <a:t>Distributed Br</a:t>
+            </a:r>
+            <a:r>
+              <a:rPr lang="en-US" sz="2800" b="1"/>
+              <a:t>agg Reflector (DBR):</a:t>
             </a:r>
             <a:r>
               <a:rPr lang="en-US" sz="2800"/>
@@ -5775,7 +5779,7 @@
       </p:grpSpPr>
       <p:sp>
         <p:nvSpPr>
-          <p:cNvPr id="976542652" name="Title 1"/>
+          <p:cNvPr id="410936223" name="Title 1"/>
           <p:cNvSpPr>
             <a:spLocks noGrp="1"/>
           </p:cNvSpPr>
@@ -5801,7 +5805,7 @@
       </p:sp>
       <p:sp>
         <p:nvSpPr>
-          <p:cNvPr id="1632898851" name="Content Placeholder 2"/>
+          <p:cNvPr id="1967011315" name="Content Placeholder 2"/>
           <p:cNvSpPr>
             <a:spLocks noGrp="1"/>
           </p:cNvSpPr>
@@ -5970,7 +5974,7 @@
       </p:grpSpPr>
       <p:sp>
         <p:nvSpPr>
-          <p:cNvPr id="2119590324" name="Title 1"/>
+          <p:cNvPr id="1704790873" name="Title 1"/>
           <p:cNvSpPr>
             <a:spLocks noGrp="1"/>
           </p:cNvSpPr>
@@ -5996,7 +6000,7 @@
       </p:sp>
       <p:sp>
         <p:nvSpPr>
-          <p:cNvPr id="664494747" name="Content Placeholder 2"/>
+          <p:cNvPr id="2093328343" name="Content Placeholder 2"/>
           <p:cNvSpPr>
             <a:spLocks noGrp="1"/>
           </p:cNvSpPr>
@@ -6113,7 +6117,7 @@
       </p:grpSpPr>
       <p:sp>
         <p:nvSpPr>
-          <p:cNvPr id="1633509822" name="Title 1"/>
+          <p:cNvPr id="742830813" name="Title 1"/>
           <p:cNvSpPr>
             <a:spLocks noGrp="1"/>
           </p:cNvSpPr>
@@ -6139,7 +6143,7 @@
       </p:sp>
       <p:sp>
         <p:nvSpPr>
-          <p:cNvPr id="648860905" name="Content Placeholder 2"/>
+          <p:cNvPr id="76223830" name="Content Placeholder 2"/>
           <p:cNvSpPr>
             <a:spLocks noGrp="1"/>
           </p:cNvSpPr>
